--- a/portfolio-ppt/yoonpyo-portfolio.pptx
+++ b/portfolio-ppt/yoonpyo-portfolio.pptx
@@ -125,7 +125,7 @@
     <c:plotArea>
       <c:layout/>
       <c:barChart>
-        <c:barDir val="bar"/>
+        <c:barDir val="col"/>
         <c:grouping val="clustered"/>
         <c:varyColors val="0"/>
         <c:ser>
@@ -137,7 +137,7 @@
               <c:strCache>
                 <c:ptCount val="1"/>
                 <c:pt idx="0">
-                  <c:v>APP FPS</c:v>
+                  <c:v>Single Worker</c:v>
                 </c:pt>
               </c:strCache>
             </c:strRef>
@@ -175,27 +175,15 @@
           </c:dLbls>
           <c:cat>
             <c:multiLvlStrRef>
-              <c:f>Sheet1!$A$2:$A$7</c:f>
+              <c:f>Sheet1!$A$2:$A$3</c:f>
               <c:multiLvlStrCache>
-                <c:ptCount val="6"/>
+                <c:ptCount val="2"/>
                 <c:lvl>
                   <c:pt idx="0">
-                    <c:v>Single (1)</c:v>
+                    <c:v>dGPU 앱 FPS</c:v>
                   </c:pt>
                   <c:pt idx="1">
-                    <c:v>W4</c:v>
-                  </c:pt>
-                  <c:pt idx="2">
-                    <c:v>W6</c:v>
-                  </c:pt>
-                  <c:pt idx="3">
-                    <c:v>W8</c:v>
-                  </c:pt>
-                  <c:pt idx="4">
-                    <c:v>W12 ★</c:v>
-                  </c:pt>
-                  <c:pt idx="5">
-                    <c:v>W19</c:v>
+                    <c:v>iGPU 앱 FPS</c:v>
                   </c:pt>
                 </c:lvl>
               </c:multiLvlStrCache>
@@ -203,27 +191,92 @@
           </c:cat>
           <c:val>
             <c:numRef>
-              <c:f>Sheet1!$B$2:$B$7</c:f>
+              <c:f>Sheet1!$B$2:$B$3</c:f>
               <c:numCache>
                 <c:formatCode>General</c:formatCode>
-                <c:ptCount val="6"/>
+                <c:ptCount val="2"/>
                 <c:pt idx="0">
-                  <c:v>67</c:v>
+                  <c:v>55.94</c:v>
                 </c:pt>
                 <c:pt idx="1">
-                  <c:v>78.5</c:v>
+                  <c:v>58.1</c:v>
                 </c:pt>
-                <c:pt idx="2">
-                  <c:v>84.91</c:v>
+              </c:numCache>
+            </c:numRef>
+          </c:val>
+        </c:ser>
+        <c:ser>
+          <c:idx val="1"/>
+          <c:order val="1"/>
+          <c:tx>
+            <c:strRef>
+              <c:f>Sheet1!$C$1</c:f>
+              <c:strCache>
+                <c:ptCount val="1"/>
+                <c:pt idx="0">
+                  <c:v>Multi Worker</c:v>
                 </c:pt>
-                <c:pt idx="3">
-                  <c:v>85.1</c:v>
+              </c:strCache>
+            </c:strRef>
+          </c:tx>
+          <c:spPr>
+            <a:solidFill>
+              <a:srgbClr val="4F6EF1"/>
+            </a:solidFill>
+            <a:effectLst/>
+          </c:spPr>
+          <c:invertIfNegative val="0"/>
+          <c:dLbls>
+            <c:numFmt formatCode="#,##0" sourceLinked="0"/>
+            <c:txPr>
+              <a:bodyPr/>
+              <a:lstStyle/>
+              <a:p>
+                <a:pPr>
+                  <a:defRPr b="0" i="0" strike="noStrike" sz="900" u="none">
+                    <a:solidFill>
+                      <a:srgbClr val="FFFFFF"/>
+                    </a:solidFill>
+                    <a:latin typeface="Arial"/>
+                  </a:defRPr>
+                </a:pPr>
+              </a:p>
+            </c:txPr>
+            <c:showLegendKey val="0"/>
+            <c:showVal val="1"/>
+            <c:showCatName val="0"/>
+            <c:showSerName val="0"/>
+            <c:showPercent val="0"/>
+            <c:showBubbleSize val="0"/>
+            <c:showLeaderLines val="0"/>
+          </c:dLbls>
+          <c:cat>
+            <c:multiLvlStrRef>
+              <c:f>Sheet1!$A$2:$A$3</c:f>
+              <c:multiLvlStrCache>
+                <c:ptCount val="2"/>
+                <c:lvl>
+                  <c:pt idx="0">
+                    <c:v>dGPU 앱 FPS</c:v>
+                  </c:pt>
+                  <c:pt idx="1">
+                    <c:v>iGPU 앱 FPS</c:v>
+                  </c:pt>
+                </c:lvl>
+              </c:multiLvlStrCache>
+            </c:multiLvlStrRef>
+          </c:cat>
+          <c:val>
+            <c:numRef>
+              <c:f>Sheet1!$C$2:$C$3</c:f>
+              <c:numCache>
+                <c:formatCode>General</c:formatCode>
+                <c:ptCount val="2"/>
+                <c:pt idx="0">
+                  <c:v>59.41</c:v>
                 </c:pt>
-                <c:pt idx="4">
-                  <c:v>85.72</c:v>
-                </c:pt>
-                <c:pt idx="5">
-                  <c:v>83.45</c:v>
+                <c:pt idx="1">
+                  <c:v>66.95</c:v>
                 </c:pt>
               </c:numCache>
             </c:numRef>
@@ -265,11 +318,11 @@
           <c:orientation val="minMax"/>
         </c:scaling>
         <c:delete val="0"/>
-        <c:axPos val="l"/>
+        <c:axPos val="b"/>
         <c:numFmt formatCode="General" sourceLinked="1"/>
         <c:majorTickMark val="out"/>
         <c:minorTickMark val="none"/>
-        <c:tickLblPos val="nextTo"/>
+        <c:tickLblPos val="low"/>
         <c:spPr>
           <a:ln w="12700" cap="flat">
             <a:noFill/>
@@ -302,11 +355,11 @@
         <c:axId val="2094734552"/>
         <c:scaling>
           <c:orientation val="minMax"/>
-          <c:max val="92"/>
-          <c:min val="50"/>
+          <c:max val="75"/>
+          <c:min val="45"/>
         </c:scaling>
         <c:delete val="0"/>
-        <c:axPos val="b"/>
+        <c:axPos val="l"/>
         <c:majorGridlines>
           <c:spPr>
             <a:ln w="12700" cap="flat">
@@ -321,7 +374,7 @@
         <c:numFmt formatCode="General" sourceLinked="0"/>
         <c:majorTickMark val="out"/>
         <c:minorTickMark val="none"/>
-        <c:tickLblPos val="low"/>
+        <c:tickLblPos val="nextTo"/>
         <c:spPr>
           <a:ln w="12700" cap="flat">
             <a:noFill/>
@@ -356,6 +409,20 @@
         <a:effectLst/>
       </c:spPr>
     </c:plotArea>
+    <c:legend>
+      <c:legendPos val="r"/>
+      <c:overlay val="0"/>
+      <c:txPr>
+        <a:bodyPr/>
+        <a:lstStyle/>
+        <a:p>
+          <a:pPr>
+            <a:defRPr sz="900">      </a:defRPr>
+          </a:pPr>
+          <a:endParaRPr lang="en-US"/>
+        </a:p>
+      </c:txPr>
+    </c:legend>
     <c:plotVisOnly val="1"/>
     <c:dispBlanksAs val="span"/>
   </c:chart>
@@ -1961,7 +2028,7 @@
         <p:spPr>
           <a:xfrm>
             <a:off x="640080" y="2697480"/>
-            <a:ext cx="8229600" cy="320040"/>
+            <a:ext cx="9144000" cy="320040"/>
           </a:xfrm>
           <a:prstGeom prst="rect">
             <a:avLst/>
@@ -1985,7 +2052,7 @@
                 <a:ea typeface="Malgun Gothic" pitchFamily="34" charset="-122"/>
                 <a:cs typeface="Malgun Gothic" pitchFamily="34" charset="-120"/>
               </a:rPr>
-              <a:t>BACKEND DEVELOPER  ·  SYSTEM THINKER</a:t>
+              <a:t>BACKEND DEVELOPER  ·  SPRING BOOT  ·  C++</a:t>
             </a:r>
             <a:endParaRPr lang="en-US" sz="1100" dirty="0"/>
           </a:p>
@@ -1999,8 +2066,8 @@
         </p:nvSpPr>
         <p:spPr>
           <a:xfrm>
-            <a:off x="640080" y="3108960"/>
-            <a:ext cx="8686800" cy="1417320"/>
+            <a:off x="640080" y="3017520"/>
+            <a:ext cx="9601200" cy="1828800"/>
           </a:xfrm>
           <a:prstGeom prst="rect">
             <a:avLst/>
@@ -2014,12 +2081,12 @@
           <a:p>
             <a:pPr indent="0" marL="0">
               <a:lnSpc>
-                <a:spcPct val="110000"/>
+                <a:spcPct val="115000"/>
               </a:lnSpc>
               <a:buNone/>
             </a:pPr>
             <a:r>
-              <a:rPr lang="en-US" sz="5200" b="1" spc="-100" kern="0" dirty="0">
+              <a:rPr lang="en-US" sz="4000" b="1" spc="-100" kern="0" dirty="0">
                 <a:solidFill>
                   <a:srgbClr val="FFFFFF"/>
                 </a:solidFill>
@@ -2027,19 +2094,19 @@
                 <a:ea typeface="Malgun Gothic" pitchFamily="34" charset="-122"/>
                 <a:cs typeface="Malgun Gothic" pitchFamily="34" charset="-120"/>
               </a:rPr>
-              <a:t>문제를 구조로</a:t>
-            </a:r>
-            <a:endParaRPr lang="en-US" sz="5200" dirty="0"/>
+              <a:t>상태 정합성과</a:t>
+            </a:r>
+            <a:endParaRPr lang="en-US" sz="4000" dirty="0"/>
           </a:p>
           <a:p>
             <a:pPr indent="0" marL="0">
               <a:lnSpc>
-                <a:spcPct val="110000"/>
+                <a:spcPct val="115000"/>
               </a:lnSpc>
               <a:buNone/>
             </a:pPr>
             <a:r>
-              <a:rPr lang="en-US" sz="5200" b="1" spc="-100" kern="0" dirty="0">
+              <a:rPr lang="en-US" sz="4000" b="1" spc="-100" kern="0" dirty="0">
                 <a:solidFill>
                   <a:srgbClr val="FFFFFF"/>
                 </a:solidFill>
@@ -2047,9 +2114,29 @@
                 <a:ea typeface="Malgun Gothic" pitchFamily="34" charset="-122"/>
                 <a:cs typeface="Malgun Gothic" pitchFamily="34" charset="-120"/>
               </a:rPr>
-              <a:t>풀어온 개발자</a:t>
-            </a:r>
-            <a:endParaRPr lang="en-US" sz="5200" dirty="0"/>
+              <a:t>운영 안정성을 먼저 생각하는</a:t>
+            </a:r>
+            <a:endParaRPr lang="en-US" sz="4000" dirty="0"/>
+          </a:p>
+          <a:p>
+            <a:pPr indent="0" marL="0">
+              <a:lnSpc>
+                <a:spcPct val="115000"/>
+              </a:lnSpc>
+              <a:buNone/>
+            </a:pPr>
+            <a:r>
+              <a:rPr lang="en-US" sz="4000" b="1" spc="-100" kern="0" dirty="0">
+                <a:solidFill>
+                  <a:srgbClr val="FFFFFF"/>
+                </a:solidFill>
+                <a:latin typeface="Malgun Gothic" pitchFamily="34" charset="0"/>
+                <a:ea typeface="Malgun Gothic" pitchFamily="34" charset="-122"/>
+                <a:cs typeface="Malgun Gothic" pitchFamily="34" charset="-120"/>
+              </a:rPr>
+              <a:t>백엔드 개발자</a:t>
+            </a:r>
+            <a:endParaRPr lang="en-US" sz="4000" dirty="0"/>
           </a:p>
         </p:txBody>
       </p:sp>
@@ -2061,7 +2148,7 @@
         </p:nvSpPr>
         <p:spPr>
           <a:xfrm>
-            <a:off x="640080" y="4663440"/>
+            <a:off x="640080" y="4937760"/>
             <a:ext cx="9144000" cy="365760"/>
           </a:xfrm>
           <a:prstGeom prst="rect">
@@ -2192,8 +2279,8 @@
         </p:nvSpPr>
         <p:spPr>
           <a:xfrm>
-            <a:off x="640080" y="1645920"/>
-            <a:ext cx="10058400" cy="1828800"/>
+            <a:off x="640080" y="1463040"/>
+            <a:ext cx="10058400" cy="2011680"/>
           </a:xfrm>
           <a:prstGeom prst="rect">
             <a:avLst/>
@@ -2207,12 +2294,12 @@
           <a:p>
             <a:pPr algn="ctr" indent="0" marL="0">
               <a:lnSpc>
-                <a:spcPct val="110000"/>
+                <a:spcPct val="115000"/>
               </a:lnSpc>
               <a:buNone/>
             </a:pPr>
             <a:r>
-              <a:rPr lang="en-US" sz="5200" b="1" spc="-100" kern="0" dirty="0">
+              <a:rPr lang="en-US" sz="4000" b="1" spc="-100" kern="0" dirty="0">
                 <a:solidFill>
                   <a:srgbClr val="FFFFFF"/>
                 </a:solidFill>
@@ -2220,19 +2307,19 @@
                 <a:ea typeface="Malgun Gothic" pitchFamily="34" charset="-122"/>
                 <a:cs typeface="Malgun Gothic" pitchFamily="34" charset="-120"/>
               </a:rPr>
-              <a:t>구조가 명확하면</a:t>
-            </a:r>
-            <a:endParaRPr lang="en-US" sz="5200" dirty="0"/>
+              <a:t>상태 정합성과</a:t>
+            </a:r>
+            <a:endParaRPr lang="en-US" sz="4000" dirty="0"/>
           </a:p>
           <a:p>
             <a:pPr algn="ctr" indent="0" marL="0">
               <a:lnSpc>
-                <a:spcPct val="110000"/>
+                <a:spcPct val="115000"/>
               </a:lnSpc>
               <a:buNone/>
             </a:pPr>
             <a:r>
-              <a:rPr lang="en-US" sz="5200" b="1" spc="-100" kern="0" dirty="0">
+              <a:rPr lang="en-US" sz="4000" b="1" spc="-100" kern="0" dirty="0">
                 <a:solidFill>
                   <a:srgbClr val="FFFFFF"/>
                 </a:solidFill>
@@ -2240,9 +2327,29 @@
                 <a:ea typeface="Malgun Gothic" pitchFamily="34" charset="-122"/>
                 <a:cs typeface="Malgun Gothic" pitchFamily="34" charset="-120"/>
               </a:rPr>
-              <a:t>기능은 따라온다</a:t>
-            </a:r>
-            <a:endParaRPr lang="en-US" sz="5200" dirty="0"/>
+              <a:t>운영 안정성을 먼저 생각하는</a:t>
+            </a:r>
+            <a:endParaRPr lang="en-US" sz="4000" dirty="0"/>
+          </a:p>
+          <a:p>
+            <a:pPr algn="ctr" indent="0" marL="0">
+              <a:lnSpc>
+                <a:spcPct val="115000"/>
+              </a:lnSpc>
+              <a:buNone/>
+            </a:pPr>
+            <a:r>
+              <a:rPr lang="en-US" sz="4000" b="1" spc="-100" kern="0" dirty="0">
+                <a:solidFill>
+                  <a:srgbClr val="FFFFFF"/>
+                </a:solidFill>
+                <a:latin typeface="Malgun Gothic" pitchFamily="34" charset="0"/>
+                <a:ea typeface="Malgun Gothic" pitchFamily="34" charset="-122"/>
+                <a:cs typeface="Malgun Gothic" pitchFamily="34" charset="-120"/>
+              </a:rPr>
+              <a:t>백엔드 개발자</a:t>
+            </a:r>
+            <a:endParaRPr lang="en-US" sz="4000" dirty="0"/>
           </a:p>
         </p:txBody>
       </p:sp>
@@ -2254,12 +2361,12 @@
         </p:nvSpPr>
         <p:spPr>
           <a:xfrm>
-            <a:off x="1097280" y="3611880"/>
-            <a:ext cx="3017520" cy="914400"/>
+            <a:off x="914400" y="3611880"/>
+            <a:ext cx="3017520" cy="1005840"/>
           </a:xfrm>
           <a:prstGeom prst="roundRect">
             <a:avLst>
-              <a:gd name="adj" fmla="val 12000"/>
+              <a:gd name="adj" fmla="val 10909"/>
             </a:avLst>
           </a:prstGeom>
           <a:solidFill>
@@ -2283,7 +2390,46 @@
         </p:nvSpPr>
         <p:spPr>
           <a:xfrm>
-            <a:off x="1097280" y="3703320"/>
+            <a:off x="914400" y="3703320"/>
+            <a:ext cx="3017520" cy="365760"/>
+          </a:xfrm>
+          <a:prstGeom prst="rect">
+            <a:avLst/>
+          </a:prstGeom>
+          <a:noFill/>
+          <a:ln/>
+        </p:spPr>
+        <p:txBody>
+          <a:bodyPr wrap="square" rtlCol="0" anchor="ctr"/>
+          <a:lstStyle/>
+          <a:p>
+            <a:pPr algn="ctr" indent="0" marL="0">
+              <a:buNone/>
+            </a:pPr>
+            <a:r>
+              <a:rPr lang="en-US" sz="1500" b="1" dirty="0">
+                <a:solidFill>
+                  <a:srgbClr val="FFFFFF"/>
+                </a:solidFill>
+                <a:latin typeface="Malgun Gothic" pitchFamily="34" charset="0"/>
+                <a:ea typeface="Malgun Gothic" pitchFamily="34" charset="-122"/>
+                <a:cs typeface="Malgun Gothic" pitchFamily="34" charset="-120"/>
+              </a:rPr>
+              <a:t>계측한다</a:t>
+            </a:r>
+            <a:endParaRPr lang="en-US" sz="1500" dirty="0"/>
+          </a:p>
+        </p:txBody>
+      </p:sp>
+      <p:sp>
+        <p:nvSpPr>
+          <p:cNvPr id="6" name="Text 4"/>
+          <p:cNvSpPr/>
+          <p:nvPr/>
+        </p:nvSpPr>
+        <p:spPr>
+          <a:xfrm>
+            <a:off x="914400" y="4114800"/>
             <a:ext cx="3017520" cy="347472"/>
           </a:xfrm>
           <a:prstGeom prst="rect">
@@ -2300,46 +2446,7 @@
               <a:buNone/>
             </a:pPr>
             <a:r>
-              <a:rPr lang="en-US" sz="1600" b="1" dirty="0">
-                <a:solidFill>
-                  <a:srgbClr val="FFFFFF"/>
-                </a:solidFill>
-                <a:latin typeface="Malgun Gothic" pitchFamily="34" charset="0"/>
-                <a:ea typeface="Malgun Gothic" pitchFamily="34" charset="-122"/>
-                <a:cs typeface="Malgun Gothic" pitchFamily="34" charset="-120"/>
-              </a:rPr>
-              <a:t>분석한다</a:t>
-            </a:r>
-            <a:endParaRPr lang="en-US" sz="1600" dirty="0"/>
-          </a:p>
-        </p:txBody>
-      </p:sp>
-      <p:sp>
-        <p:nvSpPr>
-          <p:cNvPr id="6" name="Text 4"/>
-          <p:cNvSpPr/>
-          <p:nvPr/>
-        </p:nvSpPr>
-        <p:spPr>
-          <a:xfrm>
-            <a:off x="1097280" y="4069080"/>
-            <a:ext cx="3017520" cy="274320"/>
-          </a:xfrm>
-          <a:prstGeom prst="rect">
-            <a:avLst/>
-          </a:prstGeom>
-          <a:noFill/>
-          <a:ln/>
-        </p:spPr>
-        <p:txBody>
-          <a:bodyPr wrap="square" rtlCol="0" anchor="ctr"/>
-          <a:lstStyle/>
-          <a:p>
-            <a:pPr algn="ctr" indent="0" marL="0">
-              <a:buNone/>
-            </a:pPr>
-            <a:r>
-              <a:rPr lang="en-US" sz="1000" dirty="0">
+              <a:rPr lang="en-US" sz="950" dirty="0">
                 <a:solidFill>
                   <a:srgbClr val="A8B7F8"/>
                 </a:solidFill>
@@ -2347,9 +2454,9 @@
                 <a:ea typeface="Malgun Gothic" pitchFamily="34" charset="-122"/>
                 <a:cs typeface="Malgun Gothic" pitchFamily="34" charset="-120"/>
               </a:rPr>
-              <a:t>왜 시스템이 깨지는가</a:t>
-            </a:r>
-            <a:endParaRPr lang="en-US" sz="1000" dirty="0"/>
+              <a:t>어느 레이어가 얼마나 걸리는가</a:t>
+            </a:r>
+            <a:endParaRPr lang="en-US" sz="950" dirty="0"/>
           </a:p>
         </p:txBody>
       </p:sp>
@@ -2361,12 +2468,12 @@
         </p:nvSpPr>
         <p:spPr>
           <a:xfrm>
-            <a:off x="4617720" y="3611880"/>
-            <a:ext cx="3017520" cy="914400"/>
+            <a:off x="4434840" y="3611880"/>
+            <a:ext cx="3017520" cy="1005840"/>
           </a:xfrm>
           <a:prstGeom prst="roundRect">
             <a:avLst>
-              <a:gd name="adj" fmla="val 12000"/>
+              <a:gd name="adj" fmla="val 10909"/>
             </a:avLst>
           </a:prstGeom>
           <a:solidFill>
@@ -2390,7 +2497,46 @@
         </p:nvSpPr>
         <p:spPr>
           <a:xfrm>
-            <a:off x="4617720" y="3703320"/>
+            <a:off x="4434840" y="3703320"/>
+            <a:ext cx="3017520" cy="365760"/>
+          </a:xfrm>
+          <a:prstGeom prst="rect">
+            <a:avLst/>
+          </a:prstGeom>
+          <a:noFill/>
+          <a:ln/>
+        </p:spPr>
+        <p:txBody>
+          <a:bodyPr wrap="square" rtlCol="0" anchor="ctr"/>
+          <a:lstStyle/>
+          <a:p>
+            <a:pPr algn="ctr" indent="0" marL="0">
+              <a:buNone/>
+            </a:pPr>
+            <a:r>
+              <a:rPr lang="en-US" sz="1500" b="1" dirty="0">
+                <a:solidFill>
+                  <a:srgbClr val="FFFFFF"/>
+                </a:solidFill>
+                <a:latin typeface="Malgun Gothic" pitchFamily="34" charset="0"/>
+                <a:ea typeface="Malgun Gothic" pitchFamily="34" charset="-122"/>
+                <a:cs typeface="Malgun Gothic" pitchFamily="34" charset="-120"/>
+              </a:rPr>
+              <a:t>단계를 나눈다</a:t>
+            </a:r>
+            <a:endParaRPr lang="en-US" sz="1500" dirty="0"/>
+          </a:p>
+        </p:txBody>
+      </p:sp>
+      <p:sp>
+        <p:nvSpPr>
+          <p:cNvPr id="9" name="Text 7"/>
+          <p:cNvSpPr/>
+          <p:nvPr/>
+        </p:nvSpPr>
+        <p:spPr>
+          <a:xfrm>
+            <a:off x="4434840" y="4114800"/>
             <a:ext cx="3017520" cy="347472"/>
           </a:xfrm>
           <a:prstGeom prst="rect">
@@ -2407,46 +2553,7 @@
               <a:buNone/>
             </a:pPr>
             <a:r>
-              <a:rPr lang="en-US" sz="1600" b="1" dirty="0">
-                <a:solidFill>
-                  <a:srgbClr val="FFFFFF"/>
-                </a:solidFill>
-                <a:latin typeface="Malgun Gothic" pitchFamily="34" charset="0"/>
-                <a:ea typeface="Malgun Gothic" pitchFamily="34" charset="-122"/>
-                <a:cs typeface="Malgun Gothic" pitchFamily="34" charset="-120"/>
-              </a:rPr>
-              <a:t>설계한다</a:t>
-            </a:r>
-            <a:endParaRPr lang="en-US" sz="1600" dirty="0"/>
-          </a:p>
-        </p:txBody>
-      </p:sp>
-      <p:sp>
-        <p:nvSpPr>
-          <p:cNvPr id="9" name="Text 7"/>
-          <p:cNvSpPr/>
-          <p:nvPr/>
-        </p:nvSpPr>
-        <p:spPr>
-          <a:xfrm>
-            <a:off x="4617720" y="4069080"/>
-            <a:ext cx="3017520" cy="274320"/>
-          </a:xfrm>
-          <a:prstGeom prst="rect">
-            <a:avLst/>
-          </a:prstGeom>
-          <a:noFill/>
-          <a:ln/>
-        </p:spPr>
-        <p:txBody>
-          <a:bodyPr wrap="square" rtlCol="0" anchor="ctr"/>
-          <a:lstStyle/>
-          <a:p>
-            <a:pPr algn="ctr" indent="0" marL="0">
-              <a:buNone/>
-            </a:pPr>
-            <a:r>
-              <a:rPr lang="en-US" sz="1000" dirty="0">
+              <a:rPr lang="en-US" sz="950" dirty="0">
                 <a:solidFill>
                   <a:srgbClr val="A8B7F8"/>
                 </a:solidFill>
@@ -2454,9 +2561,9 @@
                 <a:ea typeface="Malgun Gothic" pitchFamily="34" charset="-122"/>
                 <a:cs typeface="Malgun Gothic" pitchFamily="34" charset="-120"/>
               </a:rPr>
-              <a:t>인터페이스 경계부터</a:t>
-            </a:r>
-            <a:endParaRPr lang="en-US" sz="1000" dirty="0"/>
+              <a:t>처리·전파·저장 순서부터</a:t>
+            </a:r>
+            <a:endParaRPr lang="en-US" sz="950" dirty="0"/>
           </a:p>
         </p:txBody>
       </p:sp>
@@ -2468,12 +2575,12 @@
         </p:nvSpPr>
         <p:spPr>
           <a:xfrm>
-            <a:off x="8138160" y="3611880"/>
-            <a:ext cx="3017520" cy="914400"/>
+            <a:off x="7955280" y="3611880"/>
+            <a:ext cx="3017520" cy="1005840"/>
           </a:xfrm>
           <a:prstGeom prst="roundRect">
             <a:avLst>
-              <a:gd name="adj" fmla="val 12000"/>
+              <a:gd name="adj" fmla="val 10909"/>
             </a:avLst>
           </a:prstGeom>
           <a:solidFill>
@@ -2497,7 +2604,46 @@
         </p:nvSpPr>
         <p:spPr>
           <a:xfrm>
-            <a:off x="8138160" y="3703320"/>
+            <a:off x="7955280" y="3703320"/>
+            <a:ext cx="3017520" cy="365760"/>
+          </a:xfrm>
+          <a:prstGeom prst="rect">
+            <a:avLst/>
+          </a:prstGeom>
+          <a:noFill/>
+          <a:ln/>
+        </p:spPr>
+        <p:txBody>
+          <a:bodyPr wrap="square" rtlCol="0" anchor="ctr"/>
+          <a:lstStyle/>
+          <a:p>
+            <a:pPr algn="ctr" indent="0" marL="0">
+              <a:buNone/>
+            </a:pPr>
+            <a:r>
+              <a:rPr lang="en-US" sz="1500" b="1" dirty="0">
+                <a:solidFill>
+                  <a:srgbClr val="FFFFFF"/>
+                </a:solidFill>
+                <a:latin typeface="Malgun Gothic" pitchFamily="34" charset="0"/>
+                <a:ea typeface="Malgun Gothic" pitchFamily="34" charset="-122"/>
+                <a:cs typeface="Malgun Gothic" pitchFamily="34" charset="-120"/>
+              </a:rPr>
+              <a:t>신뢰성을 높인다</a:t>
+            </a:r>
+            <a:endParaRPr lang="en-US" sz="1500" dirty="0"/>
+          </a:p>
+        </p:txBody>
+      </p:sp>
+      <p:sp>
+        <p:nvSpPr>
+          <p:cNvPr id="12" name="Text 10"/>
+          <p:cNvSpPr/>
+          <p:nvPr/>
+        </p:nvSpPr>
+        <p:spPr>
+          <a:xfrm>
+            <a:off x="7955280" y="4114800"/>
             <a:ext cx="3017520" cy="347472"/>
           </a:xfrm>
           <a:prstGeom prst="rect">
@@ -2514,30 +2660,30 @@
               <a:buNone/>
             </a:pPr>
             <a:r>
-              <a:rPr lang="en-US" sz="1600" b="1" dirty="0">
-                <a:solidFill>
-                  <a:srgbClr val="FFFFFF"/>
-                </a:solidFill>
-                <a:latin typeface="Malgun Gothic" pitchFamily="34" charset="0"/>
-                <a:ea typeface="Malgun Gothic" pitchFamily="34" charset="-122"/>
-                <a:cs typeface="Malgun Gothic" pitchFamily="34" charset="-120"/>
-              </a:rPr>
-              <a:t>검증한다</a:t>
-            </a:r>
-            <a:endParaRPr lang="en-US" sz="1600" dirty="0"/>
-          </a:p>
-        </p:txBody>
-      </p:sp>
-      <p:sp>
-        <p:nvSpPr>
-          <p:cNvPr id="12" name="Text 10"/>
-          <p:cNvSpPr/>
-          <p:nvPr/>
-        </p:nvSpPr>
-        <p:spPr>
-          <a:xfrm>
-            <a:off x="8138160" y="4069080"/>
-            <a:ext cx="3017520" cy="274320"/>
+              <a:rPr lang="en-US" sz="950" dirty="0">
+                <a:solidFill>
+                  <a:srgbClr val="A8B7F8"/>
+                </a:solidFill>
+                <a:latin typeface="Malgun Gothic" pitchFamily="34" charset="0"/>
+                <a:ea typeface="Malgun Gothic" pitchFamily="34" charset="-122"/>
+                <a:cs typeface="Malgun Gothic" pitchFamily="34" charset="-120"/>
+              </a:rPr>
+              <a:t>순서 고정, 중복 방지, 안전 종료</a:t>
+            </a:r>
+            <a:endParaRPr lang="en-US" sz="950" dirty="0"/>
+          </a:p>
+        </p:txBody>
+      </p:sp>
+      <p:sp>
+        <p:nvSpPr>
+          <p:cNvPr id="13" name="Text 11"/>
+          <p:cNvSpPr/>
+          <p:nvPr/>
+        </p:nvSpPr>
+        <p:spPr>
+          <a:xfrm>
+            <a:off x="640080" y="5349240"/>
+            <a:ext cx="10972800" cy="320040"/>
           </a:xfrm>
           <a:prstGeom prst="rect">
             <a:avLst/>
@@ -2561,46 +2707,7 @@
                 <a:ea typeface="Malgun Gothic" pitchFamily="34" charset="-122"/>
                 <a:cs typeface="Malgun Gothic" pitchFamily="34" charset="-120"/>
               </a:rPr>
-              <a:t>데이터로, 숫자로</a:t>
-            </a:r>
-            <a:endParaRPr lang="en-US" sz="1000" dirty="0"/>
-          </a:p>
-        </p:txBody>
-      </p:sp>
-      <p:sp>
-        <p:nvSpPr>
-          <p:cNvPr id="13" name="Text 11"/>
-          <p:cNvSpPr/>
-          <p:nvPr/>
-        </p:nvSpPr>
-        <p:spPr>
-          <a:xfrm>
-            <a:off x="640080" y="5303520"/>
-            <a:ext cx="10972800" cy="320040"/>
-          </a:xfrm>
-          <a:prstGeom prst="rect">
-            <a:avLst/>
-          </a:prstGeom>
-          <a:noFill/>
-          <a:ln/>
-        </p:spPr>
-        <p:txBody>
-          <a:bodyPr wrap="square" rtlCol="0" anchor="ctr"/>
-          <a:lstStyle/>
-          <a:p>
-            <a:pPr algn="ctr" indent="0" marL="0">
-              <a:buNone/>
-            </a:pPr>
-            <a:r>
-              <a:rPr lang="en-US" sz="1000" dirty="0">
-                <a:solidFill>
-                  <a:srgbClr val="A8B7F8"/>
-                </a:solidFill>
-                <a:latin typeface="Malgun Gothic" pitchFamily="34" charset="0"/>
-                <a:ea typeface="Malgun Gothic" pitchFamily="34" charset="-122"/>
-                <a:cs typeface="Malgun Gothic" pitchFamily="34" charset="-120"/>
-              </a:rPr>
-              <a:t>yoonpyo  ·  cgantro@gmail.com  ·  GitLab: S14P11A402 / S14P21A302 / S14P31A408</a:t>
+              <a:t>yoonpyo  ·  cgantro@gmail.com  ·  광운대학교  ·  정보처리기사  ·  OPIc IH</a:t>
             </a:r>
             <a:endParaRPr lang="en-US" sz="1000" dirty="0"/>
           </a:p>
@@ -2686,7 +2793,7 @@
         <p:spPr>
           <a:xfrm>
             <a:off x="385877" y="279806"/>
-            <a:ext cx="5029200" cy="245974"/>
+            <a:ext cx="10972800" cy="245974"/>
           </a:xfrm>
           <a:prstGeom prst="rect">
             <a:avLst/>
@@ -2749,7 +2856,7 @@
                 <a:ea typeface="Malgun Gothic" pitchFamily="34" charset="-122"/>
                 <a:cs typeface="Malgun Gothic" pitchFamily="34" charset="-120"/>
               </a:rPr>
-              <a:t>기능 구현보다 왜 깨지는지를 먼저 파악하고 구조로 해결했다</a:t>
+              <a:t>비동기 실시간 환경에서 측정하고, 단계를 나누고, 구조로 해결했다</a:t>
             </a:r>
             <a:endParaRPr lang="en-US" sz="2400" dirty="0"/>
           </a:p>
@@ -2788,7 +2895,7 @@
                 <a:ea typeface="Malgun Gothic" pitchFamily="34" charset="-122"/>
                 <a:cs typeface="Malgun Gothic" pitchFamily="34" charset="-120"/>
               </a:rPr>
-              <a:t>AGV · RobotPal · 영묘 · STICKER — 도메인이 달라도 구조 문제는 같았다</a:t>
+              <a:t>Autowing_car · RobotPal · mausoleum · STICKER</a:t>
             </a:r>
             <a:endParaRPr lang="en-US" sz="1200" dirty="0"/>
           </a:p>
@@ -2966,7 +3073,7 @@
                 <a:ea typeface="Malgun Gothic" pitchFamily="34" charset="-122"/>
                 <a:cs typeface="Malgun Gothic" pitchFamily="34" charset="-120"/>
               </a:rPr>
-              <a:t>안전장치 2개로</a:t>
+              <a:t>관제 상태 불일치 원인을</a:t>
             </a:r>
             <a:endParaRPr lang="en-US" sz="1200" dirty="0"/>
           </a:p>
@@ -2986,7 +3093,7 @@
                 <a:ea typeface="Malgun Gothic" pitchFamily="34" charset="-122"/>
                 <a:cs typeface="Malgun Gothic" pitchFamily="34" charset="-120"/>
               </a:rPr>
-              <a:t>상태 롤백 버그를 막았다</a:t>
+              <a:t>찾아 전송량 90% 줄였다</a:t>
             </a:r>
             <a:endParaRPr lang="en-US" sz="1200" dirty="0"/>
           </a:p>
@@ -3001,7 +3108,7 @@
         <p:spPr>
           <a:xfrm>
             <a:off x="568757" y="2944368"/>
-            <a:ext cx="3331159" cy="1417320"/>
+            <a:ext cx="3331159" cy="1828800"/>
           </a:xfrm>
           <a:prstGeom prst="rect">
             <a:avLst/>
@@ -3020,7 +3127,7 @@
               <a:buNone/>
             </a:pPr>
             <a:r>
-              <a:rPr lang="en-US" sz="1050" dirty="0">
+              <a:rPr lang="en-US" sz="1000" dirty="0">
                 <a:solidFill>
                   <a:srgbClr val="222222"/>
                 </a:solidFill>
@@ -3028,9 +3135,9 @@
                 <a:ea typeface="Malgun Gothic" pitchFamily="34" charset="-122"/>
                 <a:cs typeface="Malgun Gothic" pitchFamily="34" charset="-120"/>
               </a:rPr>
-              <a:t>실물 토잉카와 MQTT 통신,</a:t>
-            </a:r>
-            <a:endParaRPr lang="en-US" sz="1050" dirty="0"/>
+              <a:t>MQTT 발행이 DB 커밋 전에</a:t>
+            </a:r>
+            <a:endParaRPr lang="en-US" sz="1000" dirty="0"/>
           </a:p>
           <a:p>
             <a:pPr indent="0" marL="0">
@@ -3040,7 +3147,7 @@
               <a:buNone/>
             </a:pPr>
             <a:r>
-              <a:rPr lang="en-US" sz="1050" dirty="0">
+              <a:rPr lang="en-US" sz="1000" dirty="0">
                 <a:solidFill>
                   <a:srgbClr val="222222"/>
                 </a:solidFill>
@@ -3048,9 +3155,9 @@
                 <a:ea typeface="Malgun Gothic" pitchFamily="34" charset="-122"/>
                 <a:cs typeface="Malgun Gothic" pitchFamily="34" charset="-120"/>
               </a:rPr>
-              <a:t>WebSocket 인증 설계 단독 구현.</a:t>
-            </a:r>
-            <a:endParaRPr lang="en-US" sz="1050" dirty="0"/>
+              <a:t>나가면서 관제 상태가 오염됨.</a:t>
+            </a:r>
+            <a:endParaRPr lang="en-US" sz="1000" dirty="0"/>
           </a:p>
           <a:p>
             <a:pPr indent="0" marL="0">
@@ -3060,7 +3167,7 @@
               <a:buNone/>
             </a:pPr>
             <a:r>
-              <a:rPr lang="en-US" sz="1050" dirty="0">
+              <a:rPr lang="en-US" sz="1000" dirty="0">
                 <a:solidFill>
                   <a:srgbClr val="222222"/>
                 </a:solidFill>
@@ -3068,9 +3175,9 @@
                 <a:ea typeface="Malgun Gothic" pitchFamily="34" charset="-122"/>
                 <a:cs typeface="Malgun Gothic" pitchFamily="34" charset="-120"/>
               </a:rPr>
-              <a:t>뒤늦게 도착한 메시지가</a:t>
-            </a:r>
-            <a:endParaRPr lang="en-US" sz="1050" dirty="0"/>
+              <a:t>afterCommit() 훅으로 순서 고정</a:t>
+            </a:r>
+            <a:endParaRPr lang="en-US" sz="1000" dirty="0"/>
           </a:p>
           <a:p>
             <a:pPr indent="0" marL="0">
@@ -3080,7 +3187,7 @@
               <a:buNone/>
             </a:pPr>
             <a:r>
-              <a:rPr lang="en-US" sz="1050" dirty="0">
+              <a:rPr lang="en-US" sz="1000" dirty="0">
                 <a:solidFill>
                   <a:srgbClr val="222222"/>
                 </a:solidFill>
@@ -3088,9 +3195,9 @@
                 <a:ea typeface="Malgun Gothic" pitchFamily="34" charset="-122"/>
                 <a:cs typeface="Malgun Gothic" pitchFamily="34" charset="-120"/>
               </a:rPr>
-              <a:t>DB 상태를 덮어쓰는 버그를</a:t>
-            </a:r>
-            <a:endParaRPr lang="en-US" sz="1050" dirty="0"/>
+              <a:t>→ write points 90% 감소 (Redis</a:t>
+            </a:r>
+            <a:endParaRPr lang="en-US" sz="1000" dirty="0"/>
           </a:p>
           <a:p>
             <a:pPr indent="0" marL="0">
@@ -3100,7 +3207,7 @@
               <a:buNone/>
             </a:pPr>
             <a:r>
-              <a:rPr lang="en-US" sz="1050" dirty="0">
+              <a:rPr lang="en-US" sz="1000" dirty="0">
                 <a:solidFill>
                   <a:srgbClr val="222222"/>
                 </a:solidFill>
@@ -3108,9 +3215,29 @@
                 <a:ea typeface="Malgun Gothic" pitchFamily="34" charset="-122"/>
                 <a:cs typeface="Malgun Gothic" pitchFamily="34" charset="-120"/>
               </a:rPr>
-              <a:t>상태 검증 2단계로 차단.</a:t>
-            </a:r>
-            <a:endParaRPr lang="en-US" sz="1050" dirty="0"/>
+              <a:t>배치화), payload 90.36% 감소</a:t>
+            </a:r>
+            <a:endParaRPr lang="en-US" sz="1000" dirty="0"/>
+          </a:p>
+          <a:p>
+            <a:pPr indent="0" marL="0">
+              <a:lnSpc>
+                <a:spcPct val="150000"/>
+              </a:lnSpc>
+              <a:buNone/>
+            </a:pPr>
+            <a:r>
+              <a:rPr lang="en-US" sz="1000" dirty="0">
+                <a:solidFill>
+                  <a:srgbClr val="222222"/>
+                </a:solidFill>
+                <a:latin typeface="Malgun Gothic" pitchFamily="34" charset="0"/>
+                <a:ea typeface="Malgun Gothic" pitchFamily="34" charset="-122"/>
+                <a:cs typeface="Malgun Gothic" pitchFamily="34" charset="-120"/>
+              </a:rPr>
+              <a:t>(RDP 압축).</a:t>
+            </a:r>
+            <a:endParaRPr lang="en-US" sz="1000" dirty="0"/>
           </a:p>
         </p:txBody>
       </p:sp>
@@ -3147,7 +3274,7 @@
                 <a:ea typeface="Malgun Gothic" pitchFamily="34" charset="-122"/>
                 <a:cs typeface="Malgun Gothic" pitchFamily="34" charset="-120"/>
               </a:rPr>
-              <a:t>AGV  ·  영묘</a:t>
+              <a:t>Autowing_car · STICKER</a:t>
             </a:r>
             <a:endParaRPr lang="en-US" sz="900" dirty="0"/>
           </a:p>
@@ -3189,7 +3316,7 @@
                 <a:ea typeface="Malgun Gothic" pitchFamily="34" charset="-122"/>
                 <a:cs typeface="Malgun Gothic" pitchFamily="34" charset="-120"/>
               </a:rPr>
-              <a:t>10단계 실측으로</a:t>
+              <a:t>처리·전파·저장 단계를 나누자</a:t>
             </a:r>
             <a:endParaRPr lang="en-US" sz="1200" dirty="0"/>
           </a:p>
@@ -3209,7 +3336,7 @@
                 <a:ea typeface="Malgun Gothic" pitchFamily="34" charset="-122"/>
                 <a:cs typeface="Malgun Gothic" pitchFamily="34" charset="-120"/>
               </a:rPr>
-              <a:t>+27% FPS 향상을 확보했다</a:t>
+              <a:t>부하와 지연이 함께 줄었다</a:t>
             </a:r>
             <a:endParaRPr lang="en-US" sz="1200" dirty="0"/>
           </a:p>
@@ -3224,7 +3351,7 @@
         <p:spPr>
           <a:xfrm>
             <a:off x="4411980" y="2944368"/>
-            <a:ext cx="3331159" cy="1417320"/>
+            <a:ext cx="3331159" cy="1828800"/>
           </a:xfrm>
           <a:prstGeom prst="rect">
             <a:avLst/>
@@ -3243,7 +3370,7 @@
               <a:buNone/>
             </a:pPr>
             <a:r>
-              <a:rPr lang="en-US" sz="1050" dirty="0">
+              <a:rPr lang="en-US" sz="1000" dirty="0">
                 <a:solidFill>
                   <a:srgbClr val="222222"/>
                 </a:solidFill>
@@ -3251,9 +3378,9 @@
                 <a:ea typeface="Malgun Gothic" pitchFamily="34" charset="-122"/>
                 <a:cs typeface="Malgun Gothic" pitchFamily="34" charset="-120"/>
               </a:rPr>
-              <a:t>워커 수 1→12 실측 후</a:t>
-            </a:r>
-            <a:endParaRPr lang="en-US" sz="1050" dirty="0"/>
+              <a:t>렌더 루프와 인코딩 루프가</a:t>
+            </a:r>
+            <a:endParaRPr lang="en-US" sz="1000" dirty="0"/>
           </a:p>
           <a:p>
             <a:pPr indent="0" marL="0">
@@ -3263,7 +3390,7 @@
               <a:buNone/>
             </a:pPr>
             <a:r>
-              <a:rPr lang="en-US" sz="1050" dirty="0">
+              <a:rPr lang="en-US" sz="1000" dirty="0">
                 <a:solidFill>
                   <a:srgbClr val="222222"/>
                 </a:solidFill>
@@ -3271,9 +3398,9 @@
                 <a:ea typeface="Malgun Gothic" pitchFamily="34" charset="-122"/>
                 <a:cs typeface="Malgun Gothic" pitchFamily="34" charset="-120"/>
               </a:rPr>
-              <a:t>W12에서 67→85.7 FPS 확인.</a:t>
-            </a:r>
-            <a:endParaRPr lang="en-US" sz="1050" dirty="0"/>
+              <a:t>같은 스레드에서 경쟁했었음.</a:t>
+            </a:r>
+            <a:endParaRPr lang="en-US" sz="1000" dirty="0"/>
           </a:p>
           <a:p>
             <a:pPr indent="0" marL="0">
@@ -3283,7 +3410,7 @@
               <a:buNone/>
             </a:pPr>
             <a:r>
-              <a:rPr lang="en-US" sz="1050" dirty="0">
+              <a:rPr lang="en-US" sz="1000" dirty="0">
                 <a:solidFill>
                   <a:srgbClr val="222222"/>
                 </a:solidFill>
@@ -3291,9 +3418,9 @@
                 <a:ea typeface="Malgun Gothic" pitchFamily="34" charset="-122"/>
                 <a:cs typeface="Malgun Gothic" pitchFamily="34" charset="-120"/>
               </a:rPr>
-              <a:t>AOP 메트릭으로 코드 변경 없이</a:t>
-            </a:r>
-            <a:endParaRPr lang="en-US" sz="1050" dirty="0"/>
+              <a:t>생산자-소비자로 분리 후</a:t>
+            </a:r>
+            <a:endParaRPr lang="en-US" sz="1000" dirty="0"/>
           </a:p>
           <a:p>
             <a:pPr indent="0" marL="0">
@@ -3303,7 +3430,7 @@
               <a:buNone/>
             </a:pPr>
             <a:r>
-              <a:rPr lang="en-US" sz="1050" dirty="0">
+              <a:rPr lang="en-US" sz="1000" dirty="0">
                 <a:solidFill>
                   <a:srgbClr val="222222"/>
                 </a:solidFill>
@@ -3311,9 +3438,9 @@
                 <a:ea typeface="Malgun Gothic" pitchFamily="34" charset="-122"/>
                 <a:cs typeface="Malgun Gothic" pitchFamily="34" charset="-120"/>
               </a:rPr>
-              <a:t>병목 레이어를 정확히 찾아내고</a:t>
-            </a:r>
-            <a:endParaRPr lang="en-US" sz="1050" dirty="0"/>
+              <a:t>GPU 환경에 따라 +6~15%</a:t>
+            </a:r>
+            <a:endParaRPr lang="en-US" sz="1000" dirty="0"/>
           </a:p>
           <a:p>
             <a:pPr indent="0" marL="0">
@@ -3323,7 +3450,7 @@
               <a:buNone/>
             </a:pPr>
             <a:r>
-              <a:rPr lang="en-US" sz="1050" dirty="0">
+              <a:rPr lang="en-US" sz="1000" dirty="0">
                 <a:solidFill>
                   <a:srgbClr val="222222"/>
                 </a:solidFill>
@@ -3331,9 +3458,9 @@
                 <a:ea typeface="Malgun Gothic" pitchFamily="34" charset="-122"/>
                 <a:cs typeface="Malgun Gothic" pitchFamily="34" charset="-120"/>
               </a:rPr>
-              <a:t>인덱스·캐시·가상 스레드 적용.</a:t>
-            </a:r>
-            <a:endParaRPr lang="en-US" sz="1050" dirty="0"/>
+              <a:t>FPS 개선을 수치로 확인.</a:t>
+            </a:r>
+            <a:endParaRPr lang="en-US" sz="1000" dirty="0"/>
           </a:p>
         </p:txBody>
       </p:sp>
@@ -3370,7 +3497,7 @@
                 <a:ea typeface="Malgun Gothic" pitchFamily="34" charset="-122"/>
                 <a:cs typeface="Malgun Gothic" pitchFamily="34" charset="-120"/>
               </a:rPr>
-              <a:t>RobotPal  ·  STICKER</a:t>
+              <a:t>RobotPal · Autowing_car</a:t>
             </a:r>
             <a:endParaRPr lang="en-US" sz="900" dirty="0"/>
           </a:p>
@@ -3412,7 +3539,7 @@
                 <a:ea typeface="Malgun Gothic" pitchFamily="34" charset="-122"/>
                 <a:cs typeface="Malgun Gothic" pitchFamily="34" charset="-120"/>
               </a:rPr>
-              <a:t>매번 같은 결론:</a:t>
+              <a:t>코드를 건드리지 않고</a:t>
             </a:r>
             <a:endParaRPr lang="en-US" sz="1200" dirty="0"/>
           </a:p>
@@ -3432,7 +3559,7 @@
                 <a:ea typeface="Malgun Gothic" pitchFamily="34" charset="-122"/>
                 <a:cs typeface="Malgun Gothic" pitchFamily="34" charset="-120"/>
               </a:rPr>
-              <a:t>인터페이스 경계는 처음부터</a:t>
+              <a:t>어느 레이어가 느린지 찾아냈다</a:t>
             </a:r>
             <a:endParaRPr lang="en-US" sz="1200" dirty="0"/>
           </a:p>
@@ -3447,7 +3574,7 @@
         <p:spPr>
           <a:xfrm>
             <a:off x="8273491" y="2944368"/>
-            <a:ext cx="3331159" cy="1417320"/>
+            <a:ext cx="3331159" cy="1828800"/>
           </a:xfrm>
           <a:prstGeom prst="rect">
             <a:avLst/>
@@ -3466,7 +3593,7 @@
               <a:buNone/>
             </a:pPr>
             <a:r>
-              <a:rPr lang="en-US" sz="1050" dirty="0">
+              <a:rPr lang="en-US" sz="1000" dirty="0">
                 <a:solidFill>
                   <a:srgbClr val="222222"/>
                 </a:solidFill>
@@ -3474,9 +3601,9 @@
                 <a:ea typeface="Malgun Gothic" pitchFamily="34" charset="-122"/>
                 <a:cs typeface="Malgun Gothic" pitchFamily="34" charset="-120"/>
               </a:rPr>
-              <a:t>TxUtil, INetworkEventLoop,</a:t>
-            </a:r>
-            <a:endParaRPr lang="en-US" sz="1050" dirty="0"/>
+              <a:t>AOP로 Service / Repository /</a:t>
+            </a:r>
+            <a:endParaRPr lang="en-US" sz="1000" dirty="0"/>
           </a:p>
           <a:p>
             <a:pPr indent="0" marL="0">
@@ -3486,7 +3613,7 @@
               <a:buNone/>
             </a:pPr>
             <a:r>
-              <a:rPr lang="en-US" sz="1050" dirty="0">
+              <a:rPr lang="en-US" sz="1000" dirty="0">
                 <a:solidFill>
                   <a:srgbClr val="222222"/>
                 </a:solidFill>
@@ -3494,9 +3621,9 @@
                 <a:ea typeface="Malgun Gothic" pitchFamily="34" charset="-122"/>
                 <a:cs typeface="Malgun Gothic" pitchFamily="34" charset="-120"/>
               </a:rPr>
-              <a:t>SmartLifecycle — 프로젝트마다</a:t>
-            </a:r>
-            <a:endParaRPr lang="en-US" sz="1050" dirty="0"/>
+              <a:t>External 레이어별 응답 시간을</a:t>
+            </a:r>
+            <a:endParaRPr lang="en-US" sz="1000" dirty="0"/>
           </a:p>
           <a:p>
             <a:pPr indent="0" marL="0">
@@ -3506,7 +3633,7 @@
               <a:buNone/>
             </a:pPr>
             <a:r>
-              <a:rPr lang="en-US" sz="1050" dirty="0">
+              <a:rPr lang="en-US" sz="1000" dirty="0">
                 <a:solidFill>
                   <a:srgbClr val="222222"/>
                 </a:solidFill>
@@ -3514,9 +3641,9 @@
                 <a:ea typeface="Malgun Gothic" pitchFamily="34" charset="-122"/>
                 <a:cs typeface="Malgun Gothic" pitchFamily="34" charset="-120"/>
               </a:rPr>
-              <a:t>리팩토링을 거쳤고, 결론은</a:t>
-            </a:r>
-            <a:endParaRPr lang="en-US" sz="1050" dirty="0"/>
+              <a:t>자동 수집. 코드 수정 없이</a:t>
+            </a:r>
+            <a:endParaRPr lang="en-US" sz="1000" dirty="0"/>
           </a:p>
           <a:p>
             <a:pPr indent="0" marL="0">
@@ -3526,7 +3653,7 @@
               <a:buNone/>
             </a:pPr>
             <a:r>
-              <a:rPr lang="en-US" sz="1050" dirty="0">
+              <a:rPr lang="en-US" sz="1000" dirty="0">
                 <a:solidFill>
                   <a:srgbClr val="222222"/>
                 </a:solidFill>
@@ -3534,9 +3661,9 @@
                 <a:ea typeface="Malgun Gothic" pitchFamily="34" charset="-122"/>
                 <a:cs typeface="Malgun Gothic" pitchFamily="34" charset="-120"/>
               </a:rPr>
-              <a:t>동일했다: 경계를 늦게 잡을수록</a:t>
-            </a:r>
-            <a:endParaRPr lang="en-US" sz="1050" dirty="0"/>
+              <a:t>어느 구간이 느린지 Grafana</a:t>
+            </a:r>
+            <a:endParaRPr lang="en-US" sz="1000" dirty="0"/>
           </a:p>
           <a:p>
             <a:pPr indent="0" marL="0">
@@ -3546,7 +3673,7 @@
               <a:buNone/>
             </a:pPr>
             <a:r>
-              <a:rPr lang="en-US" sz="1050" dirty="0">
+              <a:rPr lang="en-US" sz="1000" dirty="0">
                 <a:solidFill>
                   <a:srgbClr val="222222"/>
                 </a:solidFill>
@@ -3554,9 +3681,9 @@
                 <a:ea typeface="Malgun Gothic" pitchFamily="34" charset="-122"/>
                 <a:cs typeface="Malgun Gothic" pitchFamily="34" charset="-120"/>
               </a:rPr>
-              <a:t>부채가 배로 늘어난다.</a:t>
-            </a:r>
-            <a:endParaRPr lang="en-US" sz="1050" dirty="0"/>
+              <a:t>p95·p99로 확인했다.</a:t>
+            </a:r>
+            <a:endParaRPr lang="en-US" sz="1000" dirty="0"/>
           </a:p>
         </p:txBody>
       </p:sp>
@@ -3593,7 +3720,7 @@
                 <a:ea typeface="Malgun Gothic" pitchFamily="34" charset="-122"/>
                 <a:cs typeface="Malgun Gothic" pitchFamily="34" charset="-120"/>
               </a:rPr>
-              <a:t>AGV  ·  영묘  ·  STICKER</a:t>
+              <a:t>STICKER</a:t>
             </a:r>
             <a:endParaRPr lang="en-US" sz="900" dirty="0"/>
           </a:p>
@@ -3654,7 +3781,7 @@
                 <a:ea typeface="Malgun Gothic" pitchFamily="34" charset="-122"/>
                 <a:cs typeface="Malgun Gothic" pitchFamily="34" charset="-120"/>
               </a:rPr>
-              <a:t>구조적 사고 → 실물 연동 → 데이터 검증 — 이 세 축이 반복됩니다.</a:t>
+              <a:t>도메인이 달라도 같은 문제가 돌아왔습니다 — 상태 정합성, 처리 단계 분리, 병목 계측.</a:t>
             </a:r>
             <a:endParaRPr lang="en-US" sz="900" dirty="0"/>
           </a:p>
@@ -3740,7 +3867,7 @@
         <p:spPr>
           <a:xfrm>
             <a:off x="385877" y="279806"/>
-            <a:ext cx="5029200" cy="245974"/>
+            <a:ext cx="10972800" cy="245974"/>
           </a:xfrm>
           <a:prstGeom prst="rect">
             <a:avLst/>
@@ -3764,7 +3891,7 @@
                 <a:ea typeface="Malgun Gothic" pitchFamily="34" charset="-122"/>
                 <a:cs typeface="Malgun Gothic" pitchFamily="34" charset="-120"/>
               </a:rPr>
-              <a:t>SITUATION · TIMELINE</a:t>
+              <a:t>주요 프로젝트 01 · Autowing_car</a:t>
             </a:r>
             <a:endParaRPr lang="en-US" sz="1000" dirty="0"/>
           </a:p>
@@ -3803,7 +3930,7 @@
                 <a:ea typeface="Malgun Gothic" pitchFamily="34" charset="-122"/>
                 <a:cs typeface="Malgun Gothic" pitchFamily="34" charset="-120"/>
               </a:rPr>
-              <a:t>6개월, 매번 같은 패턴의 문제를 마주쳤다</a:t>
+              <a:t>DB 커밋 전 MQTT 발행이 관제 상태를 오염시켰다 — 순서 고정으로 해결했다</a:t>
             </a:r>
             <a:endParaRPr lang="en-US" sz="2400" dirty="0"/>
           </a:p>
@@ -3842,7 +3969,7 @@
                 <a:ea typeface="Malgun Gothic" pitchFamily="34" charset="-122"/>
                 <a:cs typeface="Malgun Gothic" pitchFamily="34" charset="-120"/>
               </a:rPr>
-              <a:t>실물 하드웨어 → 게임 서버 → 모니터링 인프라 — 도메인이 달라도 구조 문제는 같았다</a:t>
+              <a:t>Spring Boot · MQTT · STOMP · Redis · PostgreSQL · Docker · GitLab CI</a:t>
             </a:r>
             <a:endParaRPr lang="en-US" sz="1200" dirty="0"/>
           </a:p>
@@ -3857,7 +3984,7 @@
         <p:spPr>
           <a:xfrm>
             <a:off x="385877" y="2011680"/>
-            <a:ext cx="11420856" cy="3520440"/>
+            <a:ext cx="4526280" cy="3520440"/>
           </a:xfrm>
           <a:prstGeom prst="roundRect">
             <a:avLst>
@@ -3890,67 +4017,495 @@
         </p:nvSpPr>
         <p:spPr>
           <a:xfrm>
-            <a:off x="660197" y="3566160"/>
-            <a:ext cx="10872216" cy="9144"/>
-          </a:xfrm>
-          <a:prstGeom prst="line">
-            <a:avLst/>
-          </a:prstGeom>
-          <a:noFill/>
-          <a:ln w="19050">
+            <a:off x="5095037" y="2011680"/>
+            <a:ext cx="6711696" cy="3520440"/>
+          </a:xfrm>
+          <a:prstGeom prst="roundRect">
+            <a:avLst>
+              <a:gd name="adj" fmla="val 4675"/>
+            </a:avLst>
+          </a:prstGeom>
+          <a:solidFill>
+            <a:srgbClr val="FFFFFF"/>
+          </a:solidFill>
+          <a:ln w="12700">
             <a:solidFill>
               <a:srgbClr val="EDEEF0"/>
             </a:solidFill>
             <a:prstDash val="solid"/>
           </a:ln>
-        </p:spPr>
-      </p:sp>
-      <p:sp>
-        <p:nvSpPr>
-          <p:cNvPr id="7" name="Shape 5"/>
-          <p:cNvSpPr/>
-          <p:nvPr/>
-        </p:nvSpPr>
-        <p:spPr>
-          <a:xfrm>
-            <a:off x="1645920" y="3493008"/>
-            <a:ext cx="219456" cy="219456"/>
-          </a:xfrm>
-          <a:prstGeom prst="ellipse">
-            <a:avLst/>
+          <a:effectLst>
+            <a:outerShdw sx="100000" sy="100000" kx="0" ky="0" algn="bl" rotWithShape="0" blurRad="152400" dist="25400" dir="5400000">
+              <a:srgbClr val="000000">
+                <a:alpha val="5000"/>
+              </a:srgbClr>
+            </a:outerShdw>
+          </a:effectLst>
+        </p:spPr>
+      </p:sp>
+      <p:sp>
+        <p:nvSpPr>
+          <p:cNvPr id="7" name="Text 5"/>
+          <p:cNvSpPr/>
+          <p:nvPr/>
+        </p:nvSpPr>
+        <p:spPr>
+          <a:xfrm>
+            <a:off x="568757" y="2240280"/>
+            <a:ext cx="4160520" cy="256032"/>
+          </a:xfrm>
+          <a:prstGeom prst="rect">
+            <a:avLst/>
+          </a:prstGeom>
+          <a:noFill/>
+          <a:ln/>
+        </p:spPr>
+        <p:txBody>
+          <a:bodyPr wrap="square" rtlCol="0" anchor="ctr"/>
+          <a:lstStyle/>
+          <a:p>
+            <a:pPr indent="0" marL="0">
+              <a:buNone/>
+            </a:pPr>
+            <a:r>
+              <a:rPr lang="en-US" sz="1000" b="1" dirty="0">
+                <a:solidFill>
+                  <a:srgbClr val="4F6EF1"/>
+                </a:solidFill>
+                <a:latin typeface="Malgun Gothic" pitchFamily="34" charset="0"/>
+                <a:ea typeface="Malgun Gothic" pitchFamily="34" charset="-122"/>
+                <a:cs typeface="Malgun Gothic" pitchFamily="34" charset="-120"/>
+              </a:rPr>
+              <a:t>문제</a:t>
+            </a:r>
+            <a:endParaRPr lang="en-US" sz="1000" dirty="0"/>
+          </a:p>
+        </p:txBody>
+      </p:sp>
+      <p:sp>
+        <p:nvSpPr>
+          <p:cNvPr id="8" name="Text 6"/>
+          <p:cNvSpPr/>
+          <p:nvPr/>
+        </p:nvSpPr>
+        <p:spPr>
+          <a:xfrm>
+            <a:off x="568757" y="2542032"/>
+            <a:ext cx="4160520" cy="1097280"/>
+          </a:xfrm>
+          <a:prstGeom prst="rect">
+            <a:avLst/>
+          </a:prstGeom>
+          <a:noFill/>
+          <a:ln/>
+        </p:spPr>
+        <p:txBody>
+          <a:bodyPr wrap="square" rtlCol="0" anchor="ctr"/>
+          <a:lstStyle/>
+          <a:p>
+            <a:pPr indent="0" marL="0">
+              <a:lnSpc>
+                <a:spcPct val="150000"/>
+              </a:lnSpc>
+              <a:buNone/>
+            </a:pPr>
+            <a:r>
+              <a:rPr lang="en-US" sz="1100" dirty="0">
+                <a:solidFill>
+                  <a:srgbClr val="222222"/>
+                </a:solidFill>
+                <a:latin typeface="Malgun Gothic" pitchFamily="34" charset="0"/>
+                <a:ea typeface="Malgun Gothic" pitchFamily="34" charset="-122"/>
+                <a:cs typeface="Malgun Gothic" pitchFamily="34" charset="-120"/>
+              </a:rPr>
+              <a:t>DB 저장과 MQTT/WebSocket 이벤트</a:t>
+            </a:r>
+            <a:endParaRPr lang="en-US" sz="1100" dirty="0"/>
+          </a:p>
+          <a:p>
+            <a:pPr indent="0" marL="0">
+              <a:lnSpc>
+                <a:spcPct val="150000"/>
+              </a:lnSpc>
+              <a:buNone/>
+            </a:pPr>
+            <a:r>
+              <a:rPr lang="en-US" sz="1100" dirty="0">
+                <a:solidFill>
+                  <a:srgbClr val="222222"/>
+                </a:solidFill>
+                <a:latin typeface="Malgun Gothic" pitchFamily="34" charset="0"/>
+                <a:ea typeface="Malgun Gothic" pitchFamily="34" charset="-122"/>
+                <a:cs typeface="Malgun Gothic" pitchFamily="34" charset="-120"/>
+              </a:rPr>
+              <a:t>전파가 같은 흐름에 묶여 있어</a:t>
+            </a:r>
+            <a:endParaRPr lang="en-US" sz="1100" dirty="0"/>
+          </a:p>
+          <a:p>
+            <a:pPr indent="0" marL="0">
+              <a:lnSpc>
+                <a:spcPct val="150000"/>
+              </a:lnSpc>
+              <a:buNone/>
+            </a:pPr>
+            <a:r>
+              <a:rPr lang="en-US" sz="1100" dirty="0">
+                <a:solidFill>
+                  <a:srgbClr val="222222"/>
+                </a:solidFill>
+                <a:latin typeface="Malgun Gothic" pitchFamily="34" charset="0"/>
+                <a:ea typeface="Malgun Gothic" pitchFamily="34" charset="-122"/>
+                <a:cs typeface="Malgun Gothic" pitchFamily="34" charset="-120"/>
+              </a:rPr>
+              <a:t>관제 화면과 DB 상태가 달라지는</a:t>
+            </a:r>
+            <a:endParaRPr lang="en-US" sz="1100" dirty="0"/>
+          </a:p>
+          <a:p>
+            <a:pPr indent="0" marL="0">
+              <a:lnSpc>
+                <a:spcPct val="150000"/>
+              </a:lnSpc>
+              <a:buNone/>
+            </a:pPr>
+            <a:r>
+              <a:rPr lang="en-US" sz="1100" dirty="0">
+                <a:solidFill>
+                  <a:srgbClr val="222222"/>
+                </a:solidFill>
+                <a:latin typeface="Malgun Gothic" pitchFamily="34" charset="0"/>
+                <a:ea typeface="Malgun Gothic" pitchFamily="34" charset="-122"/>
+                <a:cs typeface="Malgun Gothic" pitchFamily="34" charset="-120"/>
+              </a:rPr>
+              <a:t>불일치 발생.</a:t>
+            </a:r>
+            <a:endParaRPr lang="en-US" sz="1100" dirty="0"/>
+          </a:p>
+        </p:txBody>
+      </p:sp>
+      <p:sp>
+        <p:nvSpPr>
+          <p:cNvPr id="9" name="Text 7"/>
+          <p:cNvSpPr/>
+          <p:nvPr/>
+        </p:nvSpPr>
+        <p:spPr>
+          <a:xfrm>
+            <a:off x="1280160" y="3611880"/>
+            <a:ext cx="1371600" cy="320040"/>
+          </a:xfrm>
+          <a:prstGeom prst="rect">
+            <a:avLst/>
+          </a:prstGeom>
+          <a:noFill/>
+          <a:ln/>
+        </p:spPr>
+        <p:txBody>
+          <a:bodyPr wrap="square" rtlCol="0" anchor="ctr"/>
+          <a:lstStyle/>
+          <a:p>
+            <a:pPr algn="ctr" indent="0" marL="0">
+              <a:buNone/>
+            </a:pPr>
+            <a:r>
+              <a:rPr lang="en-US" sz="1800" dirty="0">
+                <a:solidFill>
+                  <a:srgbClr val="A8B7F8"/>
+                </a:solidFill>
+                <a:latin typeface="Malgun Gothic" pitchFamily="34" charset="0"/>
+                <a:ea typeface="Malgun Gothic" pitchFamily="34" charset="-122"/>
+                <a:cs typeface="Malgun Gothic" pitchFamily="34" charset="-120"/>
+              </a:rPr>
+              <a:t>↓</a:t>
+            </a:r>
+            <a:endParaRPr lang="en-US" sz="1800" dirty="0"/>
+          </a:p>
+        </p:txBody>
+      </p:sp>
+      <p:sp>
+        <p:nvSpPr>
+          <p:cNvPr id="10" name="Text 8"/>
+          <p:cNvSpPr/>
+          <p:nvPr/>
+        </p:nvSpPr>
+        <p:spPr>
+          <a:xfrm>
+            <a:off x="568757" y="3767328"/>
+            <a:ext cx="4160520" cy="256032"/>
+          </a:xfrm>
+          <a:prstGeom prst="rect">
+            <a:avLst/>
+          </a:prstGeom>
+          <a:noFill/>
+          <a:ln/>
+        </p:spPr>
+        <p:txBody>
+          <a:bodyPr wrap="square" rtlCol="0" anchor="ctr"/>
+          <a:lstStyle/>
+          <a:p>
+            <a:pPr indent="0" marL="0">
+              <a:buNone/>
+            </a:pPr>
+            <a:r>
+              <a:rPr lang="en-US" sz="1000" b="1" dirty="0">
+                <a:solidFill>
+                  <a:srgbClr val="45515E"/>
+                </a:solidFill>
+                <a:latin typeface="Malgun Gothic" pitchFamily="34" charset="0"/>
+                <a:ea typeface="Malgun Gothic" pitchFamily="34" charset="-122"/>
+                <a:cs typeface="Malgun Gothic" pitchFamily="34" charset="-120"/>
+              </a:rPr>
+              <a:t>원인</a:t>
+            </a:r>
+            <a:endParaRPr lang="en-US" sz="1000" dirty="0"/>
+          </a:p>
+        </p:txBody>
+      </p:sp>
+      <p:sp>
+        <p:nvSpPr>
+          <p:cNvPr id="11" name="Text 9"/>
+          <p:cNvSpPr/>
+          <p:nvPr/>
+        </p:nvSpPr>
+        <p:spPr>
+          <a:xfrm>
+            <a:off x="568757" y="4069080"/>
+            <a:ext cx="4160520" cy="1325880"/>
+          </a:xfrm>
+          <a:prstGeom prst="rect">
+            <a:avLst/>
+          </a:prstGeom>
+          <a:noFill/>
+          <a:ln/>
+        </p:spPr>
+        <p:txBody>
+          <a:bodyPr wrap="square" rtlCol="0" anchor="ctr"/>
+          <a:lstStyle/>
+          <a:p>
+            <a:pPr indent="0" marL="0">
+              <a:lnSpc>
+                <a:spcPct val="150000"/>
+              </a:lnSpc>
+              <a:buNone/>
+            </a:pPr>
+            <a:r>
+              <a:rPr lang="en-US" sz="1050" dirty="0">
+                <a:solidFill>
+                  <a:srgbClr val="222222"/>
+                </a:solidFill>
+                <a:latin typeface="Malgun Gothic" pitchFamily="34" charset="0"/>
+                <a:ea typeface="Malgun Gothic" pitchFamily="34" charset="-122"/>
+                <a:cs typeface="Malgun Gothic" pitchFamily="34" charset="-120"/>
+              </a:rPr>
+              <a:t>커밋 완료 전에 이벤트가 전파됨.</a:t>
+            </a:r>
+            <a:endParaRPr lang="en-US" sz="1050" dirty="0"/>
+          </a:p>
+          <a:p>
+            <a:pPr indent="0" marL="0">
+              <a:lnSpc>
+                <a:spcPct val="150000"/>
+              </a:lnSpc>
+              <a:buNone/>
+            </a:pPr>
+            <a:r>
+              <a:rPr lang="en-US" sz="1050" dirty="0">
+                <a:solidFill>
+                  <a:srgbClr val="222222"/>
+                </a:solidFill>
+                <a:latin typeface="Malgun Gothic" pitchFamily="34" charset="0"/>
+                <a:ea typeface="Malgun Gothic" pitchFamily="34" charset="-122"/>
+                <a:cs typeface="Malgun Gothic" pitchFamily="34" charset="-120"/>
+              </a:rPr>
+              <a:t>DB 롤백 시에도 메시지는 이미</a:t>
+            </a:r>
+            <a:endParaRPr lang="en-US" sz="1050" dirty="0"/>
+          </a:p>
+          <a:p>
+            <a:pPr indent="0" marL="0">
+              <a:lnSpc>
+                <a:spcPct val="150000"/>
+              </a:lnSpc>
+              <a:buNone/>
+            </a:pPr>
+            <a:r>
+              <a:rPr lang="en-US" sz="1050" dirty="0">
+                <a:solidFill>
+                  <a:srgbClr val="222222"/>
+                </a:solidFill>
+                <a:latin typeface="Malgun Gothic" pitchFamily="34" charset="0"/>
+                <a:ea typeface="Malgun Gothic" pitchFamily="34" charset="-122"/>
+                <a:cs typeface="Malgun Gothic" pitchFamily="34" charset="-120"/>
+              </a:rPr>
+              <a:t>나간 상태 → 상태 역전.</a:t>
+            </a:r>
+            <a:endParaRPr lang="en-US" sz="1050" dirty="0"/>
+          </a:p>
+          <a:p>
+            <a:pPr indent="0" marL="0">
+              <a:lnSpc>
+                <a:spcPct val="150000"/>
+              </a:lnSpc>
+              <a:buNone/>
+            </a:pPr>
+            <a:r>
+              <a:rPr lang="en-US" sz="1050" dirty="0">
+                <a:solidFill>
+                  <a:srgbClr val="222222"/>
+                </a:solidFill>
+                <a:latin typeface="Malgun Gothic" pitchFamily="34" charset="0"/>
+                <a:ea typeface="Malgun Gothic" pitchFamily="34" charset="-122"/>
+                <a:cs typeface="Malgun Gothic" pitchFamily="34" charset="-120"/>
+              </a:rPr>
+              <a:t>매 수신마다 DB에 쓰면 쓰기</a:t>
+            </a:r>
+            <a:endParaRPr lang="en-US" sz="1050" dirty="0"/>
+          </a:p>
+          <a:p>
+            <a:pPr indent="0" marL="0">
+              <a:lnSpc>
+                <a:spcPct val="150000"/>
+              </a:lnSpc>
+              <a:buNone/>
+            </a:pPr>
+            <a:r>
+              <a:rPr lang="en-US" sz="1050" dirty="0">
+                <a:solidFill>
+                  <a:srgbClr val="222222"/>
+                </a:solidFill>
+                <a:latin typeface="Malgun Gothic" pitchFamily="34" charset="0"/>
+                <a:ea typeface="Malgun Gothic" pitchFamily="34" charset="-122"/>
+                <a:cs typeface="Malgun Gothic" pitchFamily="34" charset="-120"/>
+              </a:rPr>
+              <a:t>요청이 텔레메트리 빈도만큼</a:t>
+            </a:r>
+            <a:endParaRPr lang="en-US" sz="1050" dirty="0"/>
+          </a:p>
+          <a:p>
+            <a:pPr indent="0" marL="0">
+              <a:lnSpc>
+                <a:spcPct val="150000"/>
+              </a:lnSpc>
+              <a:buNone/>
+            </a:pPr>
+            <a:r>
+              <a:rPr lang="en-US" sz="1050" dirty="0">
+                <a:solidFill>
+                  <a:srgbClr val="222222"/>
+                </a:solidFill>
+                <a:latin typeface="Malgun Gothic" pitchFamily="34" charset="0"/>
+                <a:ea typeface="Malgun Gothic" pitchFamily="34" charset="-122"/>
+                <a:cs typeface="Malgun Gothic" pitchFamily="34" charset="-120"/>
+              </a:rPr>
+              <a:t>선형으로 증가.</a:t>
+            </a:r>
+            <a:endParaRPr lang="en-US" sz="1050" dirty="0"/>
+          </a:p>
+        </p:txBody>
+      </p:sp>
+      <p:sp>
+        <p:nvSpPr>
+          <p:cNvPr id="12" name="Shape 10"/>
+          <p:cNvSpPr/>
+          <p:nvPr/>
+        </p:nvSpPr>
+        <p:spPr>
+          <a:xfrm>
+            <a:off x="5113325" y="2029968"/>
+            <a:ext cx="6675120" cy="1508760"/>
+          </a:xfrm>
+          <a:prstGeom prst="roundRect">
+            <a:avLst>
+              <a:gd name="adj" fmla="val 8485"/>
+            </a:avLst>
           </a:prstGeom>
           <a:solidFill>
-            <a:srgbClr val="A8B7F8"/>
+            <a:srgbClr val="F8F9FF"/>
           </a:solidFill>
-          <a:ln/>
-        </p:spPr>
-      </p:sp>
-      <p:sp>
-        <p:nvSpPr>
-          <p:cNvPr id="8" name="Text 6"/>
-          <p:cNvSpPr/>
-          <p:nvPr/>
-        </p:nvSpPr>
-        <p:spPr>
-          <a:xfrm>
-            <a:off x="658368" y="2286000"/>
-            <a:ext cx="2377440" cy="292608"/>
-          </a:xfrm>
-          <a:prstGeom prst="rect">
-            <a:avLst/>
-          </a:prstGeom>
-          <a:noFill/>
-          <a:ln/>
-        </p:spPr>
-        <p:txBody>
-          <a:bodyPr wrap="square" rtlCol="0" anchor="ctr"/>
-          <a:lstStyle/>
-          <a:p>
-            <a:pPr algn="ctr" indent="0" marL="0">
-              <a:buNone/>
-            </a:pPr>
-            <a:r>
-              <a:rPr lang="en-US" sz="1300" b="1" dirty="0">
+          <a:ln w="17780">
+            <a:solidFill>
+              <a:srgbClr val="A8B7F8"/>
+            </a:solidFill>
+            <a:prstDash val="solid"/>
+          </a:ln>
+          <a:effectLst>
+            <a:outerShdw sx="100000" sy="100000" kx="0" ky="0" algn="bl" rotWithShape="0" blurRad="190500" dist="50800" dir="5400000">
+              <a:srgbClr val="4F6EF1">
+                <a:alpha val="20000"/>
+              </a:srgbClr>
+            </a:outerShdw>
+          </a:effectLst>
+        </p:spPr>
+      </p:sp>
+      <p:sp>
+        <p:nvSpPr>
+          <p:cNvPr id="13" name="Text 11"/>
+          <p:cNvSpPr/>
+          <p:nvPr/>
+        </p:nvSpPr>
+        <p:spPr>
+          <a:xfrm>
+            <a:off x="5277917" y="2121408"/>
+            <a:ext cx="6400800" cy="256032"/>
+          </a:xfrm>
+          <a:prstGeom prst="rect">
+            <a:avLst/>
+          </a:prstGeom>
+          <a:noFill/>
+          <a:ln/>
+        </p:spPr>
+        <p:txBody>
+          <a:bodyPr wrap="square" rtlCol="0" anchor="ctr"/>
+          <a:lstStyle/>
+          <a:p>
+            <a:pPr indent="0" marL="0">
+              <a:buNone/>
+            </a:pPr>
+            <a:r>
+              <a:rPr lang="en-US" sz="1000" b="1" dirty="0">
+                <a:solidFill>
+                  <a:srgbClr val="4F6EF1"/>
+                </a:solidFill>
+                <a:latin typeface="Malgun Gothic" pitchFamily="34" charset="0"/>
+                <a:ea typeface="Malgun Gothic" pitchFamily="34" charset="-122"/>
+                <a:cs typeface="Malgun Gothic" pitchFamily="34" charset="-120"/>
+              </a:rPr>
+              <a:t>해결 1 — 전파 순서 고정</a:t>
+            </a:r>
+            <a:endParaRPr lang="en-US" sz="1000" dirty="0"/>
+          </a:p>
+        </p:txBody>
+      </p:sp>
+      <p:sp>
+        <p:nvSpPr>
+          <p:cNvPr id="14" name="Text 12"/>
+          <p:cNvSpPr/>
+          <p:nvPr/>
+        </p:nvSpPr>
+        <p:spPr>
+          <a:xfrm>
+            <a:off x="5277917" y="2404872"/>
+            <a:ext cx="6309360" cy="822960"/>
+          </a:xfrm>
+          <a:prstGeom prst="rect">
+            <a:avLst/>
+          </a:prstGeom>
+          <a:noFill/>
+          <a:ln/>
+        </p:spPr>
+        <p:txBody>
+          <a:bodyPr wrap="square" rtlCol="0" anchor="ctr"/>
+          <a:lstStyle/>
+          <a:p>
+            <a:pPr indent="0" marL="0">
+              <a:lnSpc>
+                <a:spcPct val="150000"/>
+              </a:lnSpc>
+              <a:buNone/>
+            </a:pPr>
+            <a:r>
+              <a:rPr lang="en-US" sz="1100" dirty="0">
                 <a:solidFill>
                   <a:srgbClr val="222222"/>
                 </a:solidFill>
@@ -3958,66 +4513,192 @@
                 <a:ea typeface="Malgun Gothic" pitchFamily="34" charset="-122"/>
                 <a:cs typeface="Malgun Gothic" pitchFamily="34" charset="-120"/>
               </a:rPr>
-              <a:t>RobotPal</a:t>
-            </a:r>
-            <a:endParaRPr lang="en-US" sz="1300" dirty="0"/>
-          </a:p>
-        </p:txBody>
-      </p:sp>
-      <p:sp>
-        <p:nvSpPr>
-          <p:cNvPr id="9" name="Text 7"/>
-          <p:cNvSpPr/>
-          <p:nvPr/>
-        </p:nvSpPr>
-        <p:spPr>
-          <a:xfrm>
-            <a:off x="658368" y="2596896"/>
-            <a:ext cx="2377440" cy="228600"/>
-          </a:xfrm>
-          <a:prstGeom prst="rect">
-            <a:avLst/>
-          </a:prstGeom>
-          <a:noFill/>
-          <a:ln/>
-        </p:spPr>
-        <p:txBody>
-          <a:bodyPr wrap="square" rtlCol="0" anchor="ctr"/>
-          <a:lstStyle/>
-          <a:p>
-            <a:pPr algn="ctr" indent="0" marL="0">
-              <a:buNone/>
-            </a:pPr>
-            <a:r>
-              <a:rPr lang="en-US" sz="900" dirty="0">
-                <a:solidFill>
-                  <a:srgbClr val="8E8E93"/>
-                </a:solidFill>
-                <a:latin typeface="Malgun Gothic" pitchFamily="34" charset="0"/>
-                <a:ea typeface="Malgun Gothic" pitchFamily="34" charset="-122"/>
-                <a:cs typeface="Malgun Gothic" pitchFamily="34" charset="-120"/>
-              </a:rPr>
-              <a:t>2025.11–2026.04</a:t>
-            </a:r>
-            <a:endParaRPr lang="en-US" sz="900" dirty="0"/>
-          </a:p>
-        </p:txBody>
-      </p:sp>
-      <p:sp>
-        <p:nvSpPr>
-          <p:cNvPr id="10" name="Shape 8"/>
-          <p:cNvSpPr/>
-          <p:nvPr/>
-        </p:nvSpPr>
-        <p:spPr>
-          <a:xfrm>
-            <a:off x="1755648" y="3236976"/>
-            <a:ext cx="9144" cy="256032"/>
-          </a:xfrm>
-          <a:prstGeom prst="line">
-            <a:avLst/>
-          </a:prstGeom>
-          <a:noFill/>
+              <a:t>Spring Transaction afterCommit() 훅 적용.</a:t>
+            </a:r>
+            <a:endParaRPr lang="en-US" sz="1100" dirty="0"/>
+          </a:p>
+          <a:p>
+            <a:pPr indent="0" marL="0">
+              <a:lnSpc>
+                <a:spcPct val="150000"/>
+              </a:lnSpc>
+              <a:buNone/>
+            </a:pPr>
+            <a:r>
+              <a:rPr lang="en-US" sz="1100" dirty="0">
+                <a:solidFill>
+                  <a:srgbClr val="222222"/>
+                </a:solidFill>
+                <a:latin typeface="Malgun Gothic" pitchFamily="34" charset="0"/>
+                <a:ea typeface="Malgun Gothic" pitchFamily="34" charset="-122"/>
+                <a:cs typeface="Malgun Gothic" pitchFamily="34" charset="-120"/>
+              </a:rPr>
+              <a:t>DB 커밋이 확정된 이후에만</a:t>
+            </a:r>
+            <a:endParaRPr lang="en-US" sz="1100" dirty="0"/>
+          </a:p>
+          <a:p>
+            <a:pPr indent="0" marL="0">
+              <a:lnSpc>
+                <a:spcPct val="150000"/>
+              </a:lnSpc>
+              <a:buNone/>
+            </a:pPr>
+            <a:r>
+              <a:rPr lang="en-US" sz="1100" dirty="0">
+                <a:solidFill>
+                  <a:srgbClr val="222222"/>
+                </a:solidFill>
+                <a:latin typeface="Malgun Gothic" pitchFamily="34" charset="0"/>
+                <a:ea typeface="Malgun Gothic" pitchFamily="34" charset="-122"/>
+                <a:cs typeface="Malgun Gothic" pitchFamily="34" charset="-120"/>
+              </a:rPr>
+              <a:t>MQTT/WebSocket으로 이벤트 발행.</a:t>
+            </a:r>
+            <a:endParaRPr lang="en-US" sz="1100" dirty="0"/>
+          </a:p>
+        </p:txBody>
+      </p:sp>
+      <p:sp>
+        <p:nvSpPr>
+          <p:cNvPr id="15" name="Text 13"/>
+          <p:cNvSpPr/>
+          <p:nvPr/>
+        </p:nvSpPr>
+        <p:spPr>
+          <a:xfrm>
+            <a:off x="5277917" y="3657600"/>
+            <a:ext cx="6400800" cy="256032"/>
+          </a:xfrm>
+          <a:prstGeom prst="rect">
+            <a:avLst/>
+          </a:prstGeom>
+          <a:noFill/>
+          <a:ln/>
+        </p:spPr>
+        <p:txBody>
+          <a:bodyPr wrap="square" rtlCol="0" anchor="ctr"/>
+          <a:lstStyle/>
+          <a:p>
+            <a:pPr indent="0" marL="0">
+              <a:buNone/>
+            </a:pPr>
+            <a:r>
+              <a:rPr lang="en-US" sz="1000" b="1" dirty="0">
+                <a:solidFill>
+                  <a:srgbClr val="45515E"/>
+                </a:solidFill>
+                <a:latin typeface="Malgun Gothic" pitchFamily="34" charset="0"/>
+                <a:ea typeface="Malgun Gothic" pitchFamily="34" charset="-122"/>
+                <a:cs typeface="Malgun Gothic" pitchFamily="34" charset="-120"/>
+              </a:rPr>
+              <a:t>해결 2 — 쓰기 부하 감소</a:t>
+            </a:r>
+            <a:endParaRPr lang="en-US" sz="1000" dirty="0"/>
+          </a:p>
+        </p:txBody>
+      </p:sp>
+      <p:sp>
+        <p:nvSpPr>
+          <p:cNvPr id="16" name="Text 14"/>
+          <p:cNvSpPr/>
+          <p:nvPr/>
+        </p:nvSpPr>
+        <p:spPr>
+          <a:xfrm>
+            <a:off x="5277917" y="3931920"/>
+            <a:ext cx="6309360" cy="731520"/>
+          </a:xfrm>
+          <a:prstGeom prst="rect">
+            <a:avLst/>
+          </a:prstGeom>
+          <a:noFill/>
+          <a:ln/>
+        </p:spPr>
+        <p:txBody>
+          <a:bodyPr wrap="square" rtlCol="0" anchor="ctr"/>
+          <a:lstStyle/>
+          <a:p>
+            <a:pPr indent="0" marL="0">
+              <a:lnSpc>
+                <a:spcPct val="150000"/>
+              </a:lnSpc>
+              <a:buNone/>
+            </a:pPr>
+            <a:r>
+              <a:rPr lang="en-US" sz="1100" dirty="0">
+                <a:solidFill>
+                  <a:srgbClr val="222222"/>
+                </a:solidFill>
+                <a:latin typeface="Malgun Gothic" pitchFamily="34" charset="0"/>
+                <a:ea typeface="Malgun Gothic" pitchFamily="34" charset="-122"/>
+                <a:cs typeface="Malgun Gothic" pitchFamily="34" charset="-120"/>
+              </a:rPr>
+              <a:t>Redis를 쓰기 버퍼로 사용해 DB</a:t>
+            </a:r>
+            <a:endParaRPr lang="en-US" sz="1100" dirty="0"/>
+          </a:p>
+          <a:p>
+            <a:pPr indent="0" marL="0">
+              <a:lnSpc>
+                <a:spcPct val="150000"/>
+              </a:lnSpc>
+              <a:buNone/>
+            </a:pPr>
+            <a:r>
+              <a:rPr lang="en-US" sz="1100" dirty="0">
+                <a:solidFill>
+                  <a:srgbClr val="222222"/>
+                </a:solidFill>
+                <a:latin typeface="Malgun Gothic" pitchFamily="34" charset="0"/>
+                <a:ea typeface="Malgun Gothic" pitchFamily="34" charset="-122"/>
+                <a:cs typeface="Malgun Gothic" pitchFamily="34" charset="-120"/>
+              </a:rPr>
+              <a:t>저장을 배치화. RDP 알고리즘(경로</a:t>
+            </a:r>
+            <a:endParaRPr lang="en-US" sz="1100" dirty="0"/>
+          </a:p>
+          <a:p>
+            <a:pPr indent="0" marL="0">
+              <a:lnSpc>
+                <a:spcPct val="150000"/>
+              </a:lnSpc>
+              <a:buNone/>
+            </a:pPr>
+            <a:r>
+              <a:rPr lang="en-US" sz="1100" dirty="0">
+                <a:solidFill>
+                  <a:srgbClr val="222222"/>
+                </a:solidFill>
+                <a:latin typeface="Malgun Gothic" pitchFamily="34" charset="0"/>
+                <a:ea typeface="Malgun Gothic" pitchFamily="34" charset="-122"/>
+                <a:cs typeface="Malgun Gothic" pitchFamily="34" charset="-120"/>
+              </a:rPr>
+              <a:t>단순화)으로 텔레메트리 포인트 수 압축.</a:t>
+            </a:r>
+            <a:endParaRPr lang="en-US" sz="1100" dirty="0"/>
+          </a:p>
+        </p:txBody>
+      </p:sp>
+      <p:sp>
+        <p:nvSpPr>
+          <p:cNvPr id="17" name="Shape 15"/>
+          <p:cNvSpPr/>
+          <p:nvPr/>
+        </p:nvSpPr>
+        <p:spPr>
+          <a:xfrm>
+            <a:off x="5277917" y="4773168"/>
+            <a:ext cx="3017520" cy="512064"/>
+          </a:xfrm>
+          <a:prstGeom prst="roundRect">
+            <a:avLst>
+              <a:gd name="adj" fmla="val 14286"/>
+            </a:avLst>
+          </a:prstGeom>
+          <a:solidFill>
+            <a:srgbClr val="F8F9FF"/>
+          </a:solidFill>
           <a:ln w="12700">
             <a:solidFill>
               <a:srgbClr val="A8B7F8"/>
@@ -4028,30 +4709,30 @@
       </p:sp>
       <p:sp>
         <p:nvSpPr>
-          <p:cNvPr id="11" name="Text 9"/>
-          <p:cNvSpPr/>
-          <p:nvPr/>
-        </p:nvSpPr>
-        <p:spPr>
-          <a:xfrm>
-            <a:off x="658368" y="3794760"/>
-            <a:ext cx="2377440" cy="256032"/>
-          </a:xfrm>
-          <a:prstGeom prst="rect">
-            <a:avLst/>
-          </a:prstGeom>
-          <a:noFill/>
-          <a:ln/>
-        </p:spPr>
-        <p:txBody>
-          <a:bodyPr wrap="square" rtlCol="0" anchor="ctr"/>
+          <p:cNvPr id="18" name="Text 16"/>
+          <p:cNvSpPr/>
+          <p:nvPr/>
+        </p:nvSpPr>
+        <p:spPr>
+          <a:xfrm>
+            <a:off x="5277917" y="4773168"/>
+            <a:ext cx="3017520" cy="256032"/>
+          </a:xfrm>
+          <a:prstGeom prst="rect">
+            <a:avLst/>
+          </a:prstGeom>
+          <a:noFill/>
+          <a:ln/>
+        </p:spPr>
+        <p:txBody>
+          <a:bodyPr wrap="square" rtlCol="0" anchor="b"/>
           <a:lstStyle/>
           <a:p>
             <a:pPr algn="ctr" indent="0" marL="0">
               <a:buNone/>
             </a:pPr>
             <a:r>
-              <a:rPr lang="en-US" sz="1000" b="1" dirty="0">
+              <a:rPr lang="en-US" sz="850" dirty="0">
                 <a:solidFill>
                   <a:srgbClr val="45515E"/>
                 </a:solidFill>
@@ -4059,363 +4740,70 @@
                 <a:ea typeface="Malgun Gothic" pitchFamily="34" charset="-122"/>
                 <a:cs typeface="Malgun Gothic" pitchFamily="34" charset="-120"/>
               </a:rPr>
-              <a:t>스트리밍 최적화</a:t>
-            </a:r>
-            <a:endParaRPr lang="en-US" sz="1000" dirty="0"/>
-          </a:p>
-        </p:txBody>
-      </p:sp>
-      <p:sp>
-        <p:nvSpPr>
-          <p:cNvPr id="12" name="Text 10"/>
-          <p:cNvSpPr/>
-          <p:nvPr/>
-        </p:nvSpPr>
-        <p:spPr>
-          <a:xfrm>
-            <a:off x="658368" y="4078224"/>
-            <a:ext cx="2377440" cy="274320"/>
-          </a:xfrm>
-          <a:prstGeom prst="rect">
-            <a:avLst/>
-          </a:prstGeom>
-          <a:noFill/>
-          <a:ln/>
-        </p:spPr>
-        <p:txBody>
-          <a:bodyPr wrap="square" rtlCol="0" anchor="ctr"/>
+              <a:t>Redis 배치화 후</a:t>
+            </a:r>
+            <a:endParaRPr lang="en-US" sz="850" dirty="0"/>
+          </a:p>
+        </p:txBody>
+      </p:sp>
+      <p:sp>
+        <p:nvSpPr>
+          <p:cNvPr id="19" name="Text 17"/>
+          <p:cNvSpPr/>
+          <p:nvPr/>
+        </p:nvSpPr>
+        <p:spPr>
+          <a:xfrm>
+            <a:off x="5277917" y="5029200"/>
+            <a:ext cx="3017520" cy="256032"/>
+          </a:xfrm>
+          <a:prstGeom prst="rect">
+            <a:avLst/>
+          </a:prstGeom>
+          <a:noFill/>
+          <a:ln/>
+        </p:spPr>
+        <p:txBody>
+          <a:bodyPr wrap="square" rtlCol="0" anchor="t"/>
           <a:lstStyle/>
           <a:p>
             <a:pPr algn="ctr" indent="0" marL="0">
               <a:buNone/>
             </a:pPr>
             <a:r>
-              <a:rPr lang="en-US" sz="850" dirty="0">
-                <a:solidFill>
-                  <a:srgbClr val="8E8E93"/>
-                </a:solidFill>
-                <a:latin typeface="Malgun Gothic" pitchFamily="34" charset="0"/>
-                <a:ea typeface="Malgun Gothic" pitchFamily="34" charset="-122"/>
-                <a:cs typeface="Malgun Gothic" pitchFamily="34" charset="-120"/>
-              </a:rPr>
-              <a:t>C++17 · OpenGL · PBO</a:t>
-            </a:r>
-            <a:endParaRPr lang="en-US" sz="850" dirty="0"/>
-          </a:p>
-        </p:txBody>
-      </p:sp>
-      <p:sp>
-        <p:nvSpPr>
-          <p:cNvPr id="13" name="Shape 11"/>
-          <p:cNvSpPr/>
-          <p:nvPr/>
-        </p:nvSpPr>
-        <p:spPr>
-          <a:xfrm>
-            <a:off x="4389120" y="3493008"/>
-            <a:ext cx="219456" cy="219456"/>
-          </a:xfrm>
-          <a:prstGeom prst="ellipse">
-            <a:avLst/>
+              <a:rPr lang="en-US" sz="1050" b="1" dirty="0">
+                <a:solidFill>
+                  <a:srgbClr val="4F6EF1"/>
+                </a:solidFill>
+                <a:latin typeface="Malgun Gothic" pitchFamily="34" charset="0"/>
+                <a:ea typeface="Malgun Gothic" pitchFamily="34" charset="-122"/>
+                <a:cs typeface="Malgun Gothic" pitchFamily="34" charset="-120"/>
+              </a:rPr>
+              <a:t>write points  −90%</a:t>
+            </a:r>
+            <a:endParaRPr lang="en-US" sz="1050" dirty="0"/>
+          </a:p>
+        </p:txBody>
+      </p:sp>
+      <p:sp>
+        <p:nvSpPr>
+          <p:cNvPr id="20" name="Shape 18"/>
+          <p:cNvSpPr/>
+          <p:nvPr/>
+        </p:nvSpPr>
+        <p:spPr>
+          <a:xfrm>
+            <a:off x="8569757" y="4773168"/>
+            <a:ext cx="3017520" cy="512064"/>
+          </a:xfrm>
+          <a:prstGeom prst="roundRect">
+            <a:avLst>
+              <a:gd name="adj" fmla="val 14286"/>
+            </a:avLst>
           </a:prstGeom>
           <a:solidFill>
-            <a:srgbClr val="4F6EF1"/>
+            <a:srgbClr val="F8F9FF"/>
           </a:solidFill>
-          <a:ln/>
-        </p:spPr>
-      </p:sp>
-      <p:sp>
-        <p:nvSpPr>
-          <p:cNvPr id="14" name="Text 12"/>
-          <p:cNvSpPr/>
-          <p:nvPr/>
-        </p:nvSpPr>
-        <p:spPr>
-          <a:xfrm>
-            <a:off x="3401568" y="2286000"/>
-            <a:ext cx="2377440" cy="292608"/>
-          </a:xfrm>
-          <a:prstGeom prst="rect">
-            <a:avLst/>
-          </a:prstGeom>
-          <a:noFill/>
-          <a:ln/>
-        </p:spPr>
-        <p:txBody>
-          <a:bodyPr wrap="square" rtlCol="0" anchor="ctr"/>
-          <a:lstStyle/>
-          <a:p>
-            <a:pPr algn="ctr" indent="0" marL="0">
-              <a:buNone/>
-            </a:pPr>
-            <a:r>
-              <a:rPr lang="en-US" sz="1300" b="1" dirty="0">
-                <a:solidFill>
-                  <a:srgbClr val="4F6EF1"/>
-                </a:solidFill>
-                <a:latin typeface="Malgun Gothic" pitchFamily="34" charset="0"/>
-                <a:ea typeface="Malgun Gothic" pitchFamily="34" charset="-122"/>
-                <a:cs typeface="Malgun Gothic" pitchFamily="34" charset="-120"/>
-              </a:rPr>
-              <a:t>AGV</a:t>
-            </a:r>
-            <a:endParaRPr lang="en-US" sz="1300" dirty="0"/>
-          </a:p>
-        </p:txBody>
-      </p:sp>
-      <p:sp>
-        <p:nvSpPr>
-          <p:cNvPr id="15" name="Text 13"/>
-          <p:cNvSpPr/>
-          <p:nvPr/>
-        </p:nvSpPr>
-        <p:spPr>
-          <a:xfrm>
-            <a:off x="3401568" y="2596896"/>
-            <a:ext cx="2377440" cy="228600"/>
-          </a:xfrm>
-          <a:prstGeom prst="rect">
-            <a:avLst/>
-          </a:prstGeom>
-          <a:noFill/>
-          <a:ln/>
-        </p:spPr>
-        <p:txBody>
-          <a:bodyPr wrap="square" rtlCol="0" anchor="ctr"/>
-          <a:lstStyle/>
-          <a:p>
-            <a:pPr algn="ctr" indent="0" marL="0">
-              <a:buNone/>
-            </a:pPr>
-            <a:r>
-              <a:rPr lang="en-US" sz="900" dirty="0">
-                <a:solidFill>
-                  <a:srgbClr val="8E8E93"/>
-                </a:solidFill>
-                <a:latin typeface="Malgun Gothic" pitchFamily="34" charset="0"/>
-                <a:ea typeface="Malgun Gothic" pitchFamily="34" charset="-122"/>
-                <a:cs typeface="Malgun Gothic" pitchFamily="34" charset="-120"/>
-              </a:rPr>
-              <a:t>2026.01–02</a:t>
-            </a:r>
-            <a:endParaRPr lang="en-US" sz="900" dirty="0"/>
-          </a:p>
-        </p:txBody>
-      </p:sp>
-      <p:sp>
-        <p:nvSpPr>
-          <p:cNvPr id="16" name="Shape 14"/>
-          <p:cNvSpPr/>
-          <p:nvPr/>
-        </p:nvSpPr>
-        <p:spPr>
-          <a:xfrm>
-            <a:off x="4498848" y="3236976"/>
-            <a:ext cx="9144" cy="256032"/>
-          </a:xfrm>
-          <a:prstGeom prst="line">
-            <a:avLst/>
-          </a:prstGeom>
-          <a:noFill/>
-          <a:ln w="12700">
-            <a:solidFill>
-              <a:srgbClr val="4F6EF1"/>
-            </a:solidFill>
-            <a:prstDash val="solid"/>
-          </a:ln>
-        </p:spPr>
-      </p:sp>
-      <p:sp>
-        <p:nvSpPr>
-          <p:cNvPr id="17" name="Text 15"/>
-          <p:cNvSpPr/>
-          <p:nvPr/>
-        </p:nvSpPr>
-        <p:spPr>
-          <a:xfrm>
-            <a:off x="3401568" y="3794760"/>
-            <a:ext cx="2377440" cy="256032"/>
-          </a:xfrm>
-          <a:prstGeom prst="rect">
-            <a:avLst/>
-          </a:prstGeom>
-          <a:noFill/>
-          <a:ln/>
-        </p:spPr>
-        <p:txBody>
-          <a:bodyPr wrap="square" rtlCol="0" anchor="ctr"/>
-          <a:lstStyle/>
-          <a:p>
-            <a:pPr algn="ctr" indent="0" marL="0">
-              <a:buNone/>
-            </a:pPr>
-            <a:r>
-              <a:rPr lang="en-US" sz="1000" b="1" dirty="0">
-                <a:solidFill>
-                  <a:srgbClr val="4F6EF1"/>
-                </a:solidFill>
-                <a:latin typeface="Malgun Gothic" pitchFamily="34" charset="0"/>
-                <a:ea typeface="Malgun Gothic" pitchFamily="34" charset="-122"/>
-                <a:cs typeface="Malgun Gothic" pitchFamily="34" charset="-120"/>
-              </a:rPr>
-              <a:t>백엔드 단독</a:t>
-            </a:r>
-            <a:endParaRPr lang="en-US" sz="1000" dirty="0"/>
-          </a:p>
-        </p:txBody>
-      </p:sp>
-      <p:sp>
-        <p:nvSpPr>
-          <p:cNvPr id="18" name="Text 16"/>
-          <p:cNvSpPr/>
-          <p:nvPr/>
-        </p:nvSpPr>
-        <p:spPr>
-          <a:xfrm>
-            <a:off x="3401568" y="4078224"/>
-            <a:ext cx="2377440" cy="274320"/>
-          </a:xfrm>
-          <a:prstGeom prst="rect">
-            <a:avLst/>
-          </a:prstGeom>
-          <a:noFill/>
-          <a:ln/>
-        </p:spPr>
-        <p:txBody>
-          <a:bodyPr wrap="square" rtlCol="0" anchor="ctr"/>
-          <a:lstStyle/>
-          <a:p>
-            <a:pPr algn="ctr" indent="0" marL="0">
-              <a:buNone/>
-            </a:pPr>
-            <a:r>
-              <a:rPr lang="en-US" sz="850" dirty="0">
-                <a:solidFill>
-                  <a:srgbClr val="8E8E93"/>
-                </a:solidFill>
-                <a:latin typeface="Malgun Gothic" pitchFamily="34" charset="0"/>
-                <a:ea typeface="Malgun Gothic" pitchFamily="34" charset="-122"/>
-                <a:cs typeface="Malgun Gothic" pitchFamily="34" charset="-120"/>
-              </a:rPr>
-              <a:t>Spring · MQTT · A*</a:t>
-            </a:r>
-            <a:endParaRPr lang="en-US" sz="850" dirty="0"/>
-          </a:p>
-        </p:txBody>
-      </p:sp>
-      <p:sp>
-        <p:nvSpPr>
-          <p:cNvPr id="19" name="Shape 17"/>
-          <p:cNvSpPr/>
-          <p:nvPr/>
-        </p:nvSpPr>
-        <p:spPr>
-          <a:xfrm>
-            <a:off x="7132320" y="3493008"/>
-            <a:ext cx="219456" cy="219456"/>
-          </a:xfrm>
-          <a:prstGeom prst="ellipse">
-            <a:avLst/>
-          </a:prstGeom>
-          <a:solidFill>
-            <a:srgbClr val="A8B7F8"/>
-          </a:solidFill>
-          <a:ln/>
-        </p:spPr>
-      </p:sp>
-      <p:sp>
-        <p:nvSpPr>
-          <p:cNvPr id="20" name="Text 18"/>
-          <p:cNvSpPr/>
-          <p:nvPr/>
-        </p:nvSpPr>
-        <p:spPr>
-          <a:xfrm>
-            <a:off x="6144768" y="2286000"/>
-            <a:ext cx="2377440" cy="292608"/>
-          </a:xfrm>
-          <a:prstGeom prst="rect">
-            <a:avLst/>
-          </a:prstGeom>
-          <a:noFill/>
-          <a:ln/>
-        </p:spPr>
-        <p:txBody>
-          <a:bodyPr wrap="square" rtlCol="0" anchor="ctr"/>
-          <a:lstStyle/>
-          <a:p>
-            <a:pPr algn="ctr" indent="0" marL="0">
-              <a:buNone/>
-            </a:pPr>
-            <a:r>
-              <a:rPr lang="en-US" sz="1300" b="1" dirty="0">
-                <a:solidFill>
-                  <a:srgbClr val="222222"/>
-                </a:solidFill>
-                <a:latin typeface="Malgun Gothic" pitchFamily="34" charset="0"/>
-                <a:ea typeface="Malgun Gothic" pitchFamily="34" charset="-122"/>
-                <a:cs typeface="Malgun Gothic" pitchFamily="34" charset="-120"/>
-              </a:rPr>
-              <a:t>영묘</a:t>
-            </a:r>
-            <a:endParaRPr lang="en-US" sz="1300" dirty="0"/>
-          </a:p>
-        </p:txBody>
-      </p:sp>
-      <p:sp>
-        <p:nvSpPr>
-          <p:cNvPr id="21" name="Text 19"/>
-          <p:cNvSpPr/>
-          <p:nvPr/>
-        </p:nvSpPr>
-        <p:spPr>
-          <a:xfrm>
-            <a:off x="6144768" y="2596896"/>
-            <a:ext cx="2377440" cy="228600"/>
-          </a:xfrm>
-          <a:prstGeom prst="rect">
-            <a:avLst/>
-          </a:prstGeom>
-          <a:noFill/>
-          <a:ln/>
-        </p:spPr>
-        <p:txBody>
-          <a:bodyPr wrap="square" rtlCol="0" anchor="ctr"/>
-          <a:lstStyle/>
-          <a:p>
-            <a:pPr algn="ctr" indent="0" marL="0">
-              <a:buNone/>
-            </a:pPr>
-            <a:r>
-              <a:rPr lang="en-US" sz="900" dirty="0">
-                <a:solidFill>
-                  <a:srgbClr val="8E8E93"/>
-                </a:solidFill>
-                <a:latin typeface="Malgun Gothic" pitchFamily="34" charset="0"/>
-                <a:ea typeface="Malgun Gothic" pitchFamily="34" charset="-122"/>
-                <a:cs typeface="Malgun Gothic" pitchFamily="34" charset="-120"/>
-              </a:rPr>
-              <a:t>2026.02–03</a:t>
-            </a:r>
-            <a:endParaRPr lang="en-US" sz="900" dirty="0"/>
-          </a:p>
-        </p:txBody>
-      </p:sp>
-      <p:sp>
-        <p:nvSpPr>
-          <p:cNvPr id="22" name="Shape 20"/>
-          <p:cNvSpPr/>
-          <p:nvPr/>
-        </p:nvSpPr>
-        <p:spPr>
-          <a:xfrm>
-            <a:off x="7242048" y="3236976"/>
-            <a:ext cx="9144" cy="256032"/>
-          </a:xfrm>
-          <a:prstGeom prst="line">
-            <a:avLst/>
-          </a:prstGeom>
-          <a:noFill/>
           <a:ln w="12700">
             <a:solidFill>
               <a:srgbClr val="A8B7F8"/>
@@ -4426,30 +4814,30 @@
       </p:sp>
       <p:sp>
         <p:nvSpPr>
-          <p:cNvPr id="23" name="Text 21"/>
-          <p:cNvSpPr/>
-          <p:nvPr/>
-        </p:nvSpPr>
-        <p:spPr>
-          <a:xfrm>
-            <a:off x="6144768" y="3794760"/>
-            <a:ext cx="2377440" cy="256032"/>
-          </a:xfrm>
-          <a:prstGeom prst="rect">
-            <a:avLst/>
-          </a:prstGeom>
-          <a:noFill/>
-          <a:ln/>
-        </p:spPr>
-        <p:txBody>
-          <a:bodyPr wrap="square" rtlCol="0" anchor="ctr"/>
+          <p:cNvPr id="21" name="Text 19"/>
+          <p:cNvSpPr/>
+          <p:nvPr/>
+        </p:nvSpPr>
+        <p:spPr>
+          <a:xfrm>
+            <a:off x="8569757" y="4773168"/>
+            <a:ext cx="3017520" cy="256032"/>
+          </a:xfrm>
+          <a:prstGeom prst="rect">
+            <a:avLst/>
+          </a:prstGeom>
+          <a:noFill/>
+          <a:ln/>
+        </p:spPr>
+        <p:txBody>
+          <a:bodyPr wrap="square" rtlCol="0" anchor="b"/>
           <a:lstStyle/>
           <a:p>
             <a:pPr algn="ctr" indent="0" marL="0">
               <a:buNone/>
             </a:pPr>
             <a:r>
-              <a:rPr lang="en-US" sz="1000" b="1" dirty="0">
+              <a:rPr lang="en-US" sz="850" dirty="0">
                 <a:solidFill>
                   <a:srgbClr val="45515E"/>
                 </a:solidFill>
@@ -4457,292 +4845,54 @@
                 <a:ea typeface="Malgun Gothic" pitchFamily="34" charset="-122"/>
                 <a:cs typeface="Malgun Gothic" pitchFamily="34" charset="-120"/>
               </a:rPr>
-              <a:t>보이스·게임서버</a:t>
-            </a:r>
-            <a:endParaRPr lang="en-US" sz="1000" dirty="0"/>
-          </a:p>
-        </p:txBody>
-      </p:sp>
-      <p:sp>
-        <p:nvSpPr>
-          <p:cNvPr id="24" name="Text 22"/>
-          <p:cNvSpPr/>
-          <p:nvPr/>
-        </p:nvSpPr>
-        <p:spPr>
-          <a:xfrm>
-            <a:off x="6144768" y="4078224"/>
-            <a:ext cx="2377440" cy="274320"/>
-          </a:xfrm>
-          <a:prstGeom prst="rect">
-            <a:avLst/>
-          </a:prstGeom>
-          <a:noFill/>
-          <a:ln/>
-        </p:spPr>
-        <p:txBody>
-          <a:bodyPr wrap="square" rtlCol="0" anchor="ctr"/>
+              <a:t>RDP 압축 후</a:t>
+            </a:r>
+            <a:endParaRPr lang="en-US" sz="850" dirty="0"/>
+          </a:p>
+        </p:txBody>
+      </p:sp>
+      <p:sp>
+        <p:nvSpPr>
+          <p:cNvPr id="22" name="Text 20"/>
+          <p:cNvSpPr/>
+          <p:nvPr/>
+        </p:nvSpPr>
+        <p:spPr>
+          <a:xfrm>
+            <a:off x="8569757" y="5029200"/>
+            <a:ext cx="3017520" cy="256032"/>
+          </a:xfrm>
+          <a:prstGeom prst="rect">
+            <a:avLst/>
+          </a:prstGeom>
+          <a:noFill/>
+          <a:ln/>
+        </p:spPr>
+        <p:txBody>
+          <a:bodyPr wrap="square" rtlCol="0" anchor="t"/>
           <a:lstStyle/>
           <a:p>
             <a:pPr algn="ctr" indent="0" marL="0">
               <a:buNone/>
             </a:pPr>
             <a:r>
-              <a:rPr lang="en-US" sz="850" dirty="0">
-                <a:solidFill>
-                  <a:srgbClr val="8E8E93"/>
-                </a:solidFill>
-                <a:latin typeface="Malgun Gothic" pitchFamily="34" charset="0"/>
-                <a:ea typeface="Malgun Gothic" pitchFamily="34" charset="-122"/>
-                <a:cs typeface="Malgun Gothic" pitchFamily="34" charset="-120"/>
-              </a:rPr>
-              <a:t>UE5 · Opus · C++</a:t>
-            </a:r>
-            <a:endParaRPr lang="en-US" sz="850" dirty="0"/>
-          </a:p>
-        </p:txBody>
-      </p:sp>
-      <p:sp>
-        <p:nvSpPr>
-          <p:cNvPr id="25" name="Shape 23"/>
-          <p:cNvSpPr/>
-          <p:nvPr/>
-        </p:nvSpPr>
-        <p:spPr>
-          <a:xfrm>
-            <a:off x="9875520" y="3493008"/>
-            <a:ext cx="219456" cy="219456"/>
-          </a:xfrm>
-          <a:prstGeom prst="ellipse">
-            <a:avLst/>
-          </a:prstGeom>
-          <a:solidFill>
-            <a:srgbClr val="A8B7F8"/>
-          </a:solidFill>
-          <a:ln/>
-        </p:spPr>
-      </p:sp>
-      <p:sp>
-        <p:nvSpPr>
-          <p:cNvPr id="26" name="Text 24"/>
-          <p:cNvSpPr/>
-          <p:nvPr/>
-        </p:nvSpPr>
-        <p:spPr>
-          <a:xfrm>
-            <a:off x="8887968" y="2286000"/>
-            <a:ext cx="2377440" cy="292608"/>
-          </a:xfrm>
-          <a:prstGeom prst="rect">
-            <a:avLst/>
-          </a:prstGeom>
-          <a:noFill/>
-          <a:ln/>
-        </p:spPr>
-        <p:txBody>
-          <a:bodyPr wrap="square" rtlCol="0" anchor="ctr"/>
-          <a:lstStyle/>
-          <a:p>
-            <a:pPr algn="ctr" indent="0" marL="0">
-              <a:buNone/>
-            </a:pPr>
-            <a:r>
-              <a:rPr lang="en-US" sz="1300" b="1" dirty="0">
-                <a:solidFill>
-                  <a:srgbClr val="222222"/>
-                </a:solidFill>
-                <a:latin typeface="Malgun Gothic" pitchFamily="34" charset="0"/>
-                <a:ea typeface="Malgun Gothic" pitchFamily="34" charset="-122"/>
-                <a:cs typeface="Malgun Gothic" pitchFamily="34" charset="-120"/>
-              </a:rPr>
-              <a:t>STICKER</a:t>
-            </a:r>
-            <a:endParaRPr lang="en-US" sz="1300" dirty="0"/>
-          </a:p>
-        </p:txBody>
-      </p:sp>
-      <p:sp>
-        <p:nvSpPr>
-          <p:cNvPr id="27" name="Text 25"/>
-          <p:cNvSpPr/>
-          <p:nvPr/>
-        </p:nvSpPr>
-        <p:spPr>
-          <a:xfrm>
-            <a:off x="8887968" y="2596896"/>
-            <a:ext cx="2377440" cy="228600"/>
-          </a:xfrm>
-          <a:prstGeom prst="rect">
-            <a:avLst/>
-          </a:prstGeom>
-          <a:noFill/>
-          <a:ln/>
-        </p:spPr>
-        <p:txBody>
-          <a:bodyPr wrap="square" rtlCol="0" anchor="ctr"/>
-          <a:lstStyle/>
-          <a:p>
-            <a:pPr algn="ctr" indent="0" marL="0">
-              <a:buNone/>
-            </a:pPr>
-            <a:r>
-              <a:rPr lang="en-US" sz="900" dirty="0">
-                <a:solidFill>
-                  <a:srgbClr val="8E8E93"/>
-                </a:solidFill>
-                <a:latin typeface="Malgun Gothic" pitchFamily="34" charset="0"/>
-                <a:ea typeface="Malgun Gothic" pitchFamily="34" charset="-122"/>
-                <a:cs typeface="Malgun Gothic" pitchFamily="34" charset="-120"/>
-              </a:rPr>
-              <a:t>2026.04–05</a:t>
-            </a:r>
-            <a:endParaRPr lang="en-US" sz="900" dirty="0"/>
-          </a:p>
-        </p:txBody>
-      </p:sp>
-      <p:sp>
-        <p:nvSpPr>
-          <p:cNvPr id="28" name="Shape 26"/>
-          <p:cNvSpPr/>
-          <p:nvPr/>
-        </p:nvSpPr>
-        <p:spPr>
-          <a:xfrm>
-            <a:off x="9985248" y="3236976"/>
-            <a:ext cx="9144" cy="256032"/>
-          </a:xfrm>
-          <a:prstGeom prst="line">
-            <a:avLst/>
-          </a:prstGeom>
-          <a:noFill/>
-          <a:ln w="12700">
-            <a:solidFill>
-              <a:srgbClr val="A8B7F8"/>
-            </a:solidFill>
-            <a:prstDash val="solid"/>
-          </a:ln>
-        </p:spPr>
-      </p:sp>
-      <p:sp>
-        <p:nvSpPr>
-          <p:cNvPr id="29" name="Text 27"/>
-          <p:cNvSpPr/>
-          <p:nvPr/>
-        </p:nvSpPr>
-        <p:spPr>
-          <a:xfrm>
-            <a:off x="8887968" y="3794760"/>
-            <a:ext cx="2377440" cy="256032"/>
-          </a:xfrm>
-          <a:prstGeom prst="rect">
-            <a:avLst/>
-          </a:prstGeom>
-          <a:noFill/>
-          <a:ln/>
-        </p:spPr>
-        <p:txBody>
-          <a:bodyPr wrap="square" rtlCol="0" anchor="ctr"/>
-          <a:lstStyle/>
-          <a:p>
-            <a:pPr algn="ctr" indent="0" marL="0">
-              <a:buNone/>
-            </a:pPr>
-            <a:r>
-              <a:rPr lang="en-US" sz="1000" b="1" dirty="0">
-                <a:solidFill>
-                  <a:srgbClr val="45515E"/>
-                </a:solidFill>
-                <a:latin typeface="Malgun Gothic" pitchFamily="34" charset="0"/>
-                <a:ea typeface="Malgun Gothic" pitchFamily="34" charset="-122"/>
-                <a:cs typeface="Malgun Gothic" pitchFamily="34" charset="-120"/>
-              </a:rPr>
-              <a:t>백엔드·인프라</a:t>
-            </a:r>
-            <a:endParaRPr lang="en-US" sz="1000" dirty="0"/>
-          </a:p>
-        </p:txBody>
-      </p:sp>
-      <p:sp>
-        <p:nvSpPr>
-          <p:cNvPr id="30" name="Text 28"/>
-          <p:cNvSpPr/>
-          <p:nvPr/>
-        </p:nvSpPr>
-        <p:spPr>
-          <a:xfrm>
-            <a:off x="8887968" y="4078224"/>
-            <a:ext cx="2377440" cy="274320"/>
-          </a:xfrm>
-          <a:prstGeom prst="rect">
-            <a:avLst/>
-          </a:prstGeom>
-          <a:noFill/>
-          <a:ln/>
-        </p:spPr>
-        <p:txBody>
-          <a:bodyPr wrap="square" rtlCol="0" anchor="ctr"/>
-          <a:lstStyle/>
-          <a:p>
-            <a:pPr algn="ctr" indent="0" marL="0">
-              <a:buNone/>
-            </a:pPr>
-            <a:r>
-              <a:rPr lang="en-US" sz="850" dirty="0">
-                <a:solidFill>
-                  <a:srgbClr val="8E8E93"/>
-                </a:solidFill>
-                <a:latin typeface="Malgun Gothic" pitchFamily="34" charset="0"/>
-                <a:ea typeface="Malgun Gothic" pitchFamily="34" charset="-122"/>
-                <a:cs typeface="Malgun Gothic" pitchFamily="34" charset="-120"/>
-              </a:rPr>
-              <a:t>Spring · SQS · Grafana</a:t>
-            </a:r>
-            <a:endParaRPr lang="en-US" sz="850" dirty="0"/>
-          </a:p>
-        </p:txBody>
-      </p:sp>
-      <p:sp>
-        <p:nvSpPr>
-          <p:cNvPr id="31" name="Text 29"/>
-          <p:cNvSpPr/>
-          <p:nvPr/>
-        </p:nvSpPr>
-        <p:spPr>
-          <a:xfrm>
-            <a:off x="660197" y="4709160"/>
-            <a:ext cx="10872216" cy="274320"/>
-          </a:xfrm>
-          <a:prstGeom prst="rect">
-            <a:avLst/>
-          </a:prstGeom>
-          <a:noFill/>
-          <a:ln/>
-        </p:spPr>
-        <p:txBody>
-          <a:bodyPr wrap="square" rtlCol="0" anchor="ctr"/>
-          <a:lstStyle/>
-          <a:p>
-            <a:pPr algn="ctr" indent="0" marL="0">
-              <a:buNone/>
-            </a:pPr>
-            <a:r>
-              <a:rPr lang="en-US" sz="1000" dirty="0">
-                <a:solidFill>
-                  <a:srgbClr val="45515E"/>
-                </a:solidFill>
-                <a:latin typeface="Malgun Gothic" pitchFamily="34" charset="0"/>
-                <a:ea typeface="Malgun Gothic" pitchFamily="34" charset="-122"/>
-                <a:cs typeface="Malgun Gothic" pitchFamily="34" charset="-120"/>
-              </a:rPr>
-              <a:t>공통 패턴: 상태 관리 / 비동기 통신 / 책임 분리 인터페이스</a:t>
-            </a:r>
-            <a:endParaRPr lang="en-US" sz="1000" dirty="0"/>
-          </a:p>
-        </p:txBody>
-      </p:sp>
-      <p:sp>
-        <p:nvSpPr>
-          <p:cNvPr id="32" name="Shape 30"/>
+              <a:rPr lang="en-US" sz="1050" b="1" dirty="0">
+                <a:solidFill>
+                  <a:srgbClr val="4F6EF1"/>
+                </a:solidFill>
+                <a:latin typeface="Malgun Gothic" pitchFamily="34" charset="0"/>
+                <a:ea typeface="Malgun Gothic" pitchFamily="34" charset="-122"/>
+                <a:cs typeface="Malgun Gothic" pitchFamily="34" charset="-120"/>
+              </a:rPr>
+              <a:t>payload bytes  −90.36%</a:t>
+            </a:r>
+            <a:endParaRPr lang="en-US" sz="1050" dirty="0"/>
+          </a:p>
+        </p:txBody>
+      </p:sp>
+      <p:sp>
+        <p:nvSpPr>
+          <p:cNvPr id="23" name="Shape 21"/>
           <p:cNvSpPr/>
           <p:nvPr/>
         </p:nvSpPr>
@@ -4764,7 +4914,7 @@
       </p:sp>
       <p:sp>
         <p:nvSpPr>
-          <p:cNvPr id="33" name="Text 31"/>
+          <p:cNvPr id="24" name="Text 22"/>
           <p:cNvSpPr/>
           <p:nvPr/>
         </p:nvSpPr>
@@ -4795,7 +4945,7 @@
                 <a:ea typeface="Malgun Gothic" pitchFamily="34" charset="-122"/>
                 <a:cs typeface="Malgun Gothic" pitchFamily="34" charset="-120"/>
               </a:rPr>
-              <a:t>도메인이 달라도 '상태가 꼬이는 이유'와 '구조 부채'는 동일했습니다.</a:t>
+              <a:t>커밋과 외부 이벤트 전파는 순서를 지켜야 합니다. DB가 롤백돼도 한 번 나간 메시지는 되돌아오지 않습니다.</a:t>
             </a:r>
             <a:endParaRPr lang="en-US" sz="900" dirty="0"/>
           </a:p>
@@ -4803,7 +4953,46 @@
       </p:sp>
       <p:sp>
         <p:nvSpPr>
-          <p:cNvPr id="34" name="Text 32"/>
+          <p:cNvPr id="25" name="Text 23"/>
+          <p:cNvSpPr/>
+          <p:nvPr/>
+        </p:nvSpPr>
+        <p:spPr>
+          <a:xfrm>
+            <a:off x="489204" y="6263640"/>
+            <a:ext cx="10058400" cy="274320"/>
+          </a:xfrm>
+          <a:prstGeom prst="rect">
+            <a:avLst/>
+          </a:prstGeom>
+          <a:noFill/>
+          <a:ln/>
+        </p:spPr>
+        <p:txBody>
+          <a:bodyPr wrap="square" rtlCol="0" anchor="ctr"/>
+          <a:lstStyle/>
+          <a:p>
+            <a:pPr algn="l" indent="0" marL="0">
+              <a:buNone/>
+            </a:pPr>
+            <a:r>
+              <a:rPr lang="en-US" sz="800" dirty="0">
+                <a:solidFill>
+                  <a:srgbClr val="8E8E93"/>
+                </a:solidFill>
+                <a:latin typeface="Malgun Gothic" pitchFamily="34" charset="0"/>
+                <a:ea typeface="Malgun Gothic" pitchFamily="34" charset="-122"/>
+                <a:cs typeface="Malgun Gothic" pitchFamily="34" charset="-120"/>
+              </a:rPr>
+              <a:t>Source: Autowing_car — afterCommit() 적용 커밋 (2026-02)</a:t>
+            </a:r>
+            <a:endParaRPr lang="en-US" sz="800" dirty="0"/>
+          </a:p>
+        </p:txBody>
+      </p:sp>
+      <p:sp>
+        <p:nvSpPr>
+          <p:cNvPr id="26" name="Text 24"/>
           <p:cNvSpPr/>
           <p:nvPr/>
         </p:nvSpPr>
@@ -4881,7 +5070,7 @@
         <p:spPr>
           <a:xfrm>
             <a:off x="385877" y="279806"/>
-            <a:ext cx="5029200" cy="245974"/>
+            <a:ext cx="10972800" cy="245974"/>
           </a:xfrm>
           <a:prstGeom prst="rect">
             <a:avLst/>
@@ -4905,7 +5094,7 @@
                 <a:ea typeface="Malgun Gothic" pitchFamily="34" charset="-122"/>
                 <a:cs typeface="Malgun Gothic" pitchFamily="34" charset="-120"/>
               </a:rPr>
-              <a:t>KEY LINE 1 · AGV 오토잉카</a:t>
+              <a:t>주요 프로젝트 01 · Autowing_car — 인증 설계</a:t>
             </a:r>
             <a:endParaRPr lang="en-US" sz="1000" dirty="0"/>
           </a:p>
@@ -4944,7 +5133,7 @@
                 <a:ea typeface="Malgun Gothic" pitchFamily="34" charset="-122"/>
                 <a:cs typeface="Malgun Gothic" pitchFamily="34" charset="-120"/>
               </a:rPr>
-              <a:t>MQTT 지연으로 오래된 상태가 DB를 되돌리는 버그, 안전장치 2개로 막았다</a:t>
+              <a:t>WebSocket은 헤더를 못 써서 토큰이 URL에 드러난다 — 전용 1분 토큰으로 노출 시간을 줄였다</a:t>
             </a:r>
             <a:endParaRPr lang="en-US" sz="2400" dirty="0"/>
           </a:p>
@@ -4983,7 +5172,7 @@
                 <a:ea typeface="Malgun Gothic" pitchFamily="34" charset="-122"/>
                 <a:cs typeface="Malgun Gothic" pitchFamily="34" charset="-120"/>
               </a:rPr>
-              <a:t>MQTT 상태 머신 · 지연 페이로드 보호 · Spring Boot 백엔드 단독</a:t>
+              <a:t>JWT 3종 분리 · Spring Security · Redis Refresh Token Rotation</a:t>
             </a:r>
             <a:endParaRPr lang="en-US" sz="1200" dirty="0"/>
           </a:p>
@@ -4998,7 +5187,7 @@
         <p:spPr>
           <a:xfrm>
             <a:off x="385877" y="2011680"/>
-            <a:ext cx="4526280" cy="3520440"/>
+            <a:ext cx="11420856" cy="3520440"/>
           </a:xfrm>
           <a:prstGeom prst="roundRect">
             <a:avLst>
@@ -5025,22 +5214,61 @@
       </p:sp>
       <p:sp>
         <p:nvSpPr>
-          <p:cNvPr id="6" name="Shape 4"/>
-          <p:cNvSpPr/>
-          <p:nvPr/>
-        </p:nvSpPr>
-        <p:spPr>
-          <a:xfrm>
-            <a:off x="5095037" y="2011680"/>
-            <a:ext cx="6711696" cy="3520440"/>
+          <p:cNvPr id="6" name="Text 4"/>
+          <p:cNvSpPr/>
+          <p:nvPr/>
+        </p:nvSpPr>
+        <p:spPr>
+          <a:xfrm>
+            <a:off x="660197" y="2377440"/>
+            <a:ext cx="3429000" cy="292608"/>
+          </a:xfrm>
+          <a:prstGeom prst="rect">
+            <a:avLst/>
+          </a:prstGeom>
+          <a:noFill/>
+          <a:ln/>
+        </p:spPr>
+        <p:txBody>
+          <a:bodyPr wrap="square" rtlCol="0" anchor="ctr"/>
+          <a:lstStyle/>
+          <a:p>
+            <a:pPr indent="0" marL="0">
+              <a:buNone/>
+            </a:pPr>
+            <a:r>
+              <a:rPr lang="en-US" sz="1000" b="1" dirty="0">
+                <a:solidFill>
+                  <a:srgbClr val="4F6EF1"/>
+                </a:solidFill>
+                <a:latin typeface="Malgun Gothic" pitchFamily="34" charset="0"/>
+                <a:ea typeface="Malgun Gothic" pitchFamily="34" charset="-122"/>
+                <a:cs typeface="Malgun Gothic" pitchFamily="34" charset="-120"/>
+              </a:rPr>
+              <a:t>ACCESS TOKEN</a:t>
+            </a:r>
+            <a:endParaRPr lang="en-US" sz="1000" dirty="0"/>
+          </a:p>
+        </p:txBody>
+      </p:sp>
+      <p:sp>
+        <p:nvSpPr>
+          <p:cNvPr id="7" name="Shape 5"/>
+          <p:cNvSpPr/>
+          <p:nvPr/>
+        </p:nvSpPr>
+        <p:spPr>
+          <a:xfrm>
+            <a:off x="660197" y="2743200"/>
+            <a:ext cx="777240" cy="256032"/>
           </a:xfrm>
           <a:prstGeom prst="roundRect">
             <a:avLst>
-              <a:gd name="adj" fmla="val 4675"/>
+              <a:gd name="adj" fmla="val 17857"/>
             </a:avLst>
           </a:prstGeom>
           <a:solidFill>
-            <a:srgbClr val="FFFFFF"/>
+            <a:srgbClr val="F0F0F0"/>
           </a:solidFill>
           <a:ln w="12700">
             <a:solidFill>
@@ -5048,41 +5276,34 @@
             </a:solidFill>
             <a:prstDash val="solid"/>
           </a:ln>
-          <a:effectLst>
-            <a:outerShdw sx="100000" sy="100000" kx="0" ky="0" algn="bl" rotWithShape="0" blurRad="152400" dist="25400" dir="5400000">
-              <a:srgbClr val="000000">
-                <a:alpha val="5000"/>
-              </a:srgbClr>
-            </a:outerShdw>
-          </a:effectLst>
-        </p:spPr>
-      </p:sp>
-      <p:sp>
-        <p:nvSpPr>
-          <p:cNvPr id="7" name="Text 5"/>
-          <p:cNvSpPr/>
-          <p:nvPr/>
-        </p:nvSpPr>
-        <p:spPr>
-          <a:xfrm>
-            <a:off x="568757" y="2240280"/>
-            <a:ext cx="4160520" cy="256032"/>
-          </a:xfrm>
-          <a:prstGeom prst="rect">
-            <a:avLst/>
-          </a:prstGeom>
-          <a:noFill/>
-          <a:ln/>
-        </p:spPr>
-        <p:txBody>
-          <a:bodyPr wrap="square" rtlCol="0" anchor="ctr"/>
-          <a:lstStyle/>
-          <a:p>
-            <a:pPr indent="0" marL="0">
-              <a:buNone/>
-            </a:pPr>
-            <a:r>
-              <a:rPr lang="en-US" sz="1000" b="1" dirty="0">
+        </p:spPr>
+      </p:sp>
+      <p:sp>
+        <p:nvSpPr>
+          <p:cNvPr id="8" name="Text 6"/>
+          <p:cNvSpPr/>
+          <p:nvPr/>
+        </p:nvSpPr>
+        <p:spPr>
+          <a:xfrm>
+            <a:off x="660197" y="2743200"/>
+            <a:ext cx="777240" cy="256032"/>
+          </a:xfrm>
+          <a:prstGeom prst="rect">
+            <a:avLst/>
+          </a:prstGeom>
+          <a:noFill/>
+          <a:ln/>
+        </p:spPr>
+        <p:txBody>
+          <a:bodyPr wrap="square" rtlCol="0" anchor="ctr"/>
+          <a:lstStyle/>
+          <a:p>
+            <a:pPr algn="ctr" indent="0" marL="0">
+              <a:buNone/>
+            </a:pPr>
+            <a:r>
+              <a:rPr lang="en-US" sz="900" b="1" dirty="0">
                 <a:solidFill>
                   <a:srgbClr val="4F6EF1"/>
                 </a:solidFill>
@@ -5090,7 +5311,46 @@
                 <a:ea typeface="Malgun Gothic" pitchFamily="34" charset="-122"/>
                 <a:cs typeface="Malgun Gothic" pitchFamily="34" charset="-120"/>
               </a:rPr>
-              <a:t>문제</a:t>
+              <a:t>15분</a:t>
+            </a:r>
+            <a:endParaRPr lang="en-US" sz="900" dirty="0"/>
+          </a:p>
+        </p:txBody>
+      </p:sp>
+      <p:sp>
+        <p:nvSpPr>
+          <p:cNvPr id="9" name="Text 7"/>
+          <p:cNvSpPr/>
+          <p:nvPr/>
+        </p:nvSpPr>
+        <p:spPr>
+          <a:xfrm>
+            <a:off x="660197" y="3063240"/>
+            <a:ext cx="3429000" cy="256032"/>
+          </a:xfrm>
+          <a:prstGeom prst="rect">
+            <a:avLst/>
+          </a:prstGeom>
+          <a:noFill/>
+          <a:ln/>
+        </p:spPr>
+        <p:txBody>
+          <a:bodyPr wrap="square" rtlCol="0" anchor="ctr"/>
+          <a:lstStyle/>
+          <a:p>
+            <a:pPr indent="0" marL="0">
+              <a:buNone/>
+            </a:pPr>
+            <a:r>
+              <a:rPr lang="en-US" sz="1000" dirty="0">
+                <a:solidFill>
+                  <a:srgbClr val="222222"/>
+                </a:solidFill>
+                <a:latin typeface="Malgun Gothic" pitchFamily="34" charset="0"/>
+                <a:ea typeface="Malgun Gothic" pitchFamily="34" charset="-122"/>
+                <a:cs typeface="Malgun Gothic" pitchFamily="34" charset="-120"/>
+              </a:rPr>
+              <a:t>일반 API 요청 인증</a:t>
             </a:r>
             <a:endParaRPr lang="en-US" sz="1000" dirty="0"/>
           </a:p>
@@ -5098,14 +5358,14 @@
       </p:sp>
       <p:sp>
         <p:nvSpPr>
-          <p:cNvPr id="8" name="Text 6"/>
-          <p:cNvSpPr/>
-          <p:nvPr/>
-        </p:nvSpPr>
-        <p:spPr>
-          <a:xfrm>
-            <a:off x="568757" y="2514600"/>
-            <a:ext cx="4160520" cy="1143000"/>
+          <p:cNvPr id="10" name="Text 8"/>
+          <p:cNvSpPr/>
+          <p:nvPr/>
+        </p:nvSpPr>
+        <p:spPr>
+          <a:xfrm>
+            <a:off x="660197" y="3401568"/>
+            <a:ext cx="3429000" cy="1280160"/>
           </a:xfrm>
           <a:prstGeom prst="rect">
             <a:avLst/>
@@ -5124,17 +5384,17 @@
               <a:buNone/>
             </a:pPr>
             <a:r>
-              <a:rPr lang="en-US" sz="1100" dirty="0">
-                <a:solidFill>
-                  <a:srgbClr val="222222"/>
-                </a:solidFill>
-                <a:latin typeface="Malgun Gothic" pitchFamily="34" charset="0"/>
-                <a:ea typeface="Malgun Gothic" pitchFamily="34" charset="-122"/>
-                <a:cs typeface="Malgun Gothic" pitchFamily="34" charset="-120"/>
-              </a:rPr>
-              <a:t>도킹 완료 후에도 계속</a:t>
-            </a:r>
-            <a:endParaRPr lang="en-US" sz="1100" dirty="0"/>
+              <a:rPr lang="en-US" sz="950" dirty="0">
+                <a:solidFill>
+                  <a:srgbClr val="45515E"/>
+                </a:solidFill>
+                <a:latin typeface="Malgun Gothic" pitchFamily="34" charset="0"/>
+                <a:ea typeface="Malgun Gothic" pitchFamily="34" charset="-122"/>
+                <a:cs typeface="Malgun Gothic" pitchFamily="34" charset="-120"/>
+              </a:rPr>
+              <a:t>REST API는 Authorization 헤더</a:t>
+            </a:r>
+            <a:endParaRPr lang="en-US" sz="950" dirty="0"/>
           </a:p>
           <a:p>
             <a:pPr indent="0" marL="0">
@@ -5144,125 +5404,7 @@
               <a:buNone/>
             </a:pPr>
             <a:r>
-              <a:rPr lang="en-US" sz="1100" dirty="0">
-                <a:solidFill>
-                  <a:srgbClr val="222222"/>
-                </a:solidFill>
-                <a:latin typeface="Malgun Gothic" pitchFamily="34" charset="0"/>
-                <a:ea typeface="Malgun Gothic" pitchFamily="34" charset="-122"/>
-                <a:cs typeface="Malgun Gothic" pitchFamily="34" charset="-120"/>
-              </a:rPr>
-              <a:t>이동 중으로 인식되어</a:t>
-            </a:r>
-            <a:endParaRPr lang="en-US" sz="1100" dirty="0"/>
-          </a:p>
-          <a:p>
-            <a:pPr indent="0" marL="0">
-              <a:lnSpc>
-                <a:spcPct val="150000"/>
-              </a:lnSpc>
-              <a:buNone/>
-            </a:pPr>
-            <a:r>
-              <a:rPr lang="en-US" sz="1100" dirty="0">
-                <a:solidFill>
-                  <a:srgbClr val="222222"/>
-                </a:solidFill>
-                <a:latin typeface="Malgun Gothic" pitchFamily="34" charset="0"/>
-                <a:ea typeface="Malgun Gothic" pitchFamily="34" charset="-122"/>
-                <a:cs typeface="Malgun Gothic" pitchFamily="34" charset="-120"/>
-              </a:rPr>
-              <a:t>같은 동작을 반복 실행하는</a:t>
-            </a:r>
-            <a:endParaRPr lang="en-US" sz="1100" dirty="0"/>
-          </a:p>
-          <a:p>
-            <a:pPr indent="0" marL="0">
-              <a:lnSpc>
-                <a:spcPct val="150000"/>
-              </a:lnSpc>
-              <a:buNone/>
-            </a:pPr>
-            <a:r>
-              <a:rPr lang="en-US" sz="1100" dirty="0">
-                <a:solidFill>
-                  <a:srgbClr val="222222"/>
-                </a:solidFill>
-                <a:latin typeface="Malgun Gothic" pitchFamily="34" charset="0"/>
-                <a:ea typeface="Malgun Gothic" pitchFamily="34" charset="-122"/>
-                <a:cs typeface="Malgun Gothic" pitchFamily="34" charset="-120"/>
-              </a:rPr>
-              <a:t>무한 루프 발생</a:t>
-            </a:r>
-            <a:endParaRPr lang="en-US" sz="1100" dirty="0"/>
-          </a:p>
-        </p:txBody>
-      </p:sp>
-      <p:sp>
-        <p:nvSpPr>
-          <p:cNvPr id="9" name="Text 7"/>
-          <p:cNvSpPr/>
-          <p:nvPr/>
-        </p:nvSpPr>
-        <p:spPr>
-          <a:xfrm>
-            <a:off x="1371600" y="3657600"/>
-            <a:ext cx="1371600" cy="320040"/>
-          </a:xfrm>
-          <a:prstGeom prst="rect">
-            <a:avLst/>
-          </a:prstGeom>
-          <a:noFill/>
-          <a:ln/>
-        </p:spPr>
-        <p:txBody>
-          <a:bodyPr wrap="square" rtlCol="0" anchor="ctr"/>
-          <a:lstStyle/>
-          <a:p>
-            <a:pPr algn="ctr" indent="0" marL="0">
-              <a:buNone/>
-            </a:pPr>
-            <a:r>
-              <a:rPr lang="en-US" sz="1800" dirty="0">
-                <a:solidFill>
-                  <a:srgbClr val="A8B7F8"/>
-                </a:solidFill>
-                <a:latin typeface="Malgun Gothic" pitchFamily="34" charset="0"/>
-                <a:ea typeface="Malgun Gothic" pitchFamily="34" charset="-122"/>
-                <a:cs typeface="Malgun Gothic" pitchFamily="34" charset="-120"/>
-              </a:rPr>
-              <a:t>↓</a:t>
-            </a:r>
-            <a:endParaRPr lang="en-US" sz="1800" dirty="0"/>
-          </a:p>
-        </p:txBody>
-      </p:sp>
-      <p:sp>
-        <p:nvSpPr>
-          <p:cNvPr id="10" name="Text 8"/>
-          <p:cNvSpPr/>
-          <p:nvPr/>
-        </p:nvSpPr>
-        <p:spPr>
-          <a:xfrm>
-            <a:off x="568757" y="3794760"/>
-            <a:ext cx="4160520" cy="256032"/>
-          </a:xfrm>
-          <a:prstGeom prst="rect">
-            <a:avLst/>
-          </a:prstGeom>
-          <a:noFill/>
-          <a:ln/>
-        </p:spPr>
-        <p:txBody>
-          <a:bodyPr wrap="square" rtlCol="0" anchor="ctr"/>
-          <a:lstStyle/>
-          <a:p>
-            <a:pPr indent="0" marL="0">
-              <a:buNone/>
-            </a:pPr>
-            <a:r>
-              <a:rPr lang="en-US" sz="1000" b="1" dirty="0">
+              <a:rPr lang="en-US" sz="950" dirty="0">
                 <a:solidFill>
                   <a:srgbClr val="45515E"/>
                 </a:solidFill>
@@ -5270,128 +5412,26 @@
                 <a:ea typeface="Malgun Gothic" pitchFamily="34" charset="-122"/>
                 <a:cs typeface="Malgun Gothic" pitchFamily="34" charset="-120"/>
               </a:rPr>
-              <a:t>원인</a:t>
-            </a:r>
-            <a:endParaRPr lang="en-US" sz="1000" dirty="0"/>
-          </a:p>
-        </p:txBody>
-      </p:sp>
-      <p:sp>
-        <p:nvSpPr>
-          <p:cNvPr id="11" name="Text 9"/>
-          <p:cNvSpPr/>
-          <p:nvPr/>
-        </p:nvSpPr>
-        <p:spPr>
-          <a:xfrm>
-            <a:off x="568757" y="4069080"/>
-            <a:ext cx="4160520" cy="1005840"/>
-          </a:xfrm>
-          <a:prstGeom prst="rect">
-            <a:avLst/>
-          </a:prstGeom>
-          <a:noFill/>
-          <a:ln/>
-        </p:spPr>
-        <p:txBody>
-          <a:bodyPr wrap="square" rtlCol="0" anchor="ctr"/>
-          <a:lstStyle/>
-          <a:p>
-            <a:pPr indent="0" marL="0">
-              <a:lnSpc>
-                <a:spcPct val="150000"/>
-              </a:lnSpc>
-              <a:buNone/>
-            </a:pPr>
-            <a:r>
-              <a:rPr lang="en-US" sz="1100" dirty="0">
-                <a:solidFill>
-                  <a:srgbClr val="222222"/>
-                </a:solidFill>
-                <a:latin typeface="Malgun Gothic" pitchFamily="34" charset="0"/>
-                <a:ea typeface="Malgun Gothic" pitchFamily="34" charset="-122"/>
-                <a:cs typeface="Malgun Gothic" pitchFamily="34" charset="-120"/>
-              </a:rPr>
-              <a:t>자동 액션이 DB 상태를</a:t>
-            </a:r>
-            <a:endParaRPr lang="en-US" sz="1100" dirty="0"/>
-          </a:p>
-          <a:p>
-            <a:pPr indent="0" marL="0">
-              <a:lnSpc>
-                <a:spcPct val="150000"/>
-              </a:lnSpc>
-              <a:buNone/>
-            </a:pPr>
-            <a:r>
-              <a:rPr lang="en-US" sz="1100" dirty="0">
-                <a:solidFill>
-                  <a:srgbClr val="222222"/>
-                </a:solidFill>
-                <a:latin typeface="Malgun Gothic" pitchFamily="34" charset="0"/>
-                <a:ea typeface="Malgun Gothic" pitchFamily="34" charset="-122"/>
-                <a:cs typeface="Malgun Gothic" pitchFamily="34" charset="-120"/>
-              </a:rPr>
-              <a:t>바꿨는데, 뒤늦게 도착한</a:t>
-            </a:r>
-            <a:endParaRPr lang="en-US" sz="1100" dirty="0"/>
-          </a:p>
-          <a:p>
-            <a:pPr indent="0" marL="0">
-              <a:lnSpc>
-                <a:spcPct val="150000"/>
-              </a:lnSpc>
-              <a:buNone/>
-            </a:pPr>
-            <a:r>
-              <a:rPr lang="en-US" sz="1100" dirty="0">
-                <a:solidFill>
-                  <a:srgbClr val="222222"/>
-                </a:solidFill>
-                <a:latin typeface="Malgun Gothic" pitchFamily="34" charset="0"/>
-                <a:ea typeface="Malgun Gothic" pitchFamily="34" charset="-122"/>
-                <a:cs typeface="Malgun Gothic" pitchFamily="34" charset="-120"/>
-              </a:rPr>
-              <a:t>이전 상태값이 DB를</a:t>
-            </a:r>
-            <a:endParaRPr lang="en-US" sz="1100" dirty="0"/>
-          </a:p>
-          <a:p>
-            <a:pPr indent="0" marL="0">
-              <a:lnSpc>
-                <a:spcPct val="150000"/>
-              </a:lnSpc>
-              <a:buNone/>
-            </a:pPr>
-            <a:r>
-              <a:rPr lang="en-US" sz="1100" dirty="0">
-                <a:solidFill>
-                  <a:srgbClr val="222222"/>
-                </a:solidFill>
-                <a:latin typeface="Malgun Gothic" pitchFamily="34" charset="0"/>
-                <a:ea typeface="Malgun Gothic" pitchFamily="34" charset="-122"/>
-                <a:cs typeface="Malgun Gothic" pitchFamily="34" charset="-120"/>
-              </a:rPr>
-              <a:t>다시 원래대로 덮어씀</a:t>
-            </a:r>
-            <a:endParaRPr lang="en-US" sz="1100" dirty="0"/>
-          </a:p>
-        </p:txBody>
-      </p:sp>
-      <p:sp>
-        <p:nvSpPr>
-          <p:cNvPr id="12" name="Shape 10"/>
-          <p:cNvSpPr/>
-          <p:nvPr/>
-        </p:nvSpPr>
-        <p:spPr>
-          <a:xfrm>
-            <a:off x="5113325" y="2029968"/>
-            <a:ext cx="6675120" cy="1417320"/>
+              <a:t>사용 가능 → 표준 방식으로 충분</a:t>
+            </a:r>
+            <a:endParaRPr lang="en-US" sz="950" dirty="0"/>
+          </a:p>
+        </p:txBody>
+      </p:sp>
+      <p:sp>
+        <p:nvSpPr>
+          <p:cNvPr id="11" name="Shape 9"/>
+          <p:cNvSpPr/>
+          <p:nvPr/>
+        </p:nvSpPr>
+        <p:spPr>
+          <a:xfrm>
+            <a:off x="4317797" y="2212848"/>
+            <a:ext cx="3611880" cy="3063240"/>
           </a:xfrm>
           <a:prstGeom prst="roundRect">
             <a:avLst>
-              <a:gd name="adj" fmla="val 9032"/>
+              <a:gd name="adj" fmla="val 4179"/>
             </a:avLst>
           </a:prstGeom>
           <a:solidFill>
@@ -5414,14 +5454,14 @@
       </p:sp>
       <p:sp>
         <p:nvSpPr>
-          <p:cNvPr id="13" name="Text 11"/>
-          <p:cNvSpPr/>
-          <p:nvPr/>
-        </p:nvSpPr>
-        <p:spPr>
-          <a:xfrm>
-            <a:off x="5277917" y="2121408"/>
-            <a:ext cx="6400800" cy="256032"/>
+          <p:cNvPr id="12" name="Text 10"/>
+          <p:cNvSpPr/>
+          <p:nvPr/>
+        </p:nvSpPr>
+        <p:spPr>
+          <a:xfrm>
+            <a:off x="4409237" y="2377440"/>
+            <a:ext cx="3429000" cy="292608"/>
           </a:xfrm>
           <a:prstGeom prst="rect">
             <a:avLst/>
@@ -5439,13 +5479,13 @@
             <a:r>
               <a:rPr lang="en-US" sz="1000" b="1" dirty="0">
                 <a:solidFill>
-                  <a:srgbClr val="4F6EF1"/>
-                </a:solidFill>
-                <a:latin typeface="Malgun Gothic" pitchFamily="34" charset="0"/>
-                <a:ea typeface="Malgun Gothic" pitchFamily="34" charset="-122"/>
-                <a:cs typeface="Malgun Gothic" pitchFamily="34" charset="-120"/>
-              </a:rPr>
-              <a:t>안전장치 1 — stale 상태 무시</a:t>
+                  <a:srgbClr val="0014D3"/>
+                </a:solidFill>
+                <a:latin typeface="Malgun Gothic" pitchFamily="34" charset="0"/>
+                <a:ea typeface="Malgun Gothic" pitchFamily="34" charset="-122"/>
+                <a:cs typeface="Malgun Gothic" pitchFamily="34" charset="-120"/>
+              </a:rPr>
+              <a:t>SOCKET TOKEN</a:t>
             </a:r>
             <a:endParaRPr lang="en-US" sz="1000" dirty="0"/>
           </a:p>
@@ -5453,14 +5493,119 @@
       </p:sp>
       <p:sp>
         <p:nvSpPr>
+          <p:cNvPr id="13" name="Shape 11"/>
+          <p:cNvSpPr/>
+          <p:nvPr/>
+        </p:nvSpPr>
+        <p:spPr>
+          <a:xfrm>
+            <a:off x="4409237" y="2743200"/>
+            <a:ext cx="777240" cy="256032"/>
+          </a:xfrm>
+          <a:prstGeom prst="roundRect">
+            <a:avLst>
+              <a:gd name="adj" fmla="val 17857"/>
+            </a:avLst>
+          </a:prstGeom>
+          <a:solidFill>
+            <a:srgbClr val="F8F9FF"/>
+          </a:solidFill>
+          <a:ln w="12700">
+            <a:solidFill>
+              <a:srgbClr val="A8B7F8"/>
+            </a:solidFill>
+            <a:prstDash val="solid"/>
+          </a:ln>
+        </p:spPr>
+      </p:sp>
+      <p:sp>
+        <p:nvSpPr>
           <p:cNvPr id="14" name="Text 12"/>
           <p:cNvSpPr/>
           <p:nvPr/>
         </p:nvSpPr>
         <p:spPr>
           <a:xfrm>
-            <a:off x="5277917" y="2395728"/>
-            <a:ext cx="6309360" cy="822960"/>
+            <a:off x="4409237" y="2743200"/>
+            <a:ext cx="777240" cy="256032"/>
+          </a:xfrm>
+          <a:prstGeom prst="rect">
+            <a:avLst/>
+          </a:prstGeom>
+          <a:noFill/>
+          <a:ln/>
+        </p:spPr>
+        <p:txBody>
+          <a:bodyPr wrap="square" rtlCol="0" anchor="ctr"/>
+          <a:lstStyle/>
+          <a:p>
+            <a:pPr algn="ctr" indent="0" marL="0">
+              <a:buNone/>
+            </a:pPr>
+            <a:r>
+              <a:rPr lang="en-US" sz="900" b="1" dirty="0">
+                <a:solidFill>
+                  <a:srgbClr val="0014D3"/>
+                </a:solidFill>
+                <a:latin typeface="Malgun Gothic" pitchFamily="34" charset="0"/>
+                <a:ea typeface="Malgun Gothic" pitchFamily="34" charset="-122"/>
+                <a:cs typeface="Malgun Gothic" pitchFamily="34" charset="-120"/>
+              </a:rPr>
+              <a:t>1분</a:t>
+            </a:r>
+            <a:endParaRPr lang="en-US" sz="900" dirty="0"/>
+          </a:p>
+        </p:txBody>
+      </p:sp>
+      <p:sp>
+        <p:nvSpPr>
+          <p:cNvPr id="15" name="Text 13"/>
+          <p:cNvSpPr/>
+          <p:nvPr/>
+        </p:nvSpPr>
+        <p:spPr>
+          <a:xfrm>
+            <a:off x="4409237" y="3063240"/>
+            <a:ext cx="3429000" cy="256032"/>
+          </a:xfrm>
+          <a:prstGeom prst="rect">
+            <a:avLst/>
+          </a:prstGeom>
+          <a:noFill/>
+          <a:ln/>
+        </p:spPr>
+        <p:txBody>
+          <a:bodyPr wrap="square" rtlCol="0" anchor="ctr"/>
+          <a:lstStyle/>
+          <a:p>
+            <a:pPr indent="0" marL="0">
+              <a:buNone/>
+            </a:pPr>
+            <a:r>
+              <a:rPr lang="en-US" sz="1000" dirty="0">
+                <a:solidFill>
+                  <a:srgbClr val="222222"/>
+                </a:solidFill>
+                <a:latin typeface="Malgun Gothic" pitchFamily="34" charset="0"/>
+                <a:ea typeface="Malgun Gothic" pitchFamily="34" charset="-122"/>
+                <a:cs typeface="Malgun Gothic" pitchFamily="34" charset="-120"/>
+              </a:rPr>
+              <a:t>WebSocket 연결 1회 전용</a:t>
+            </a:r>
+            <a:endParaRPr lang="en-US" sz="1000" dirty="0"/>
+          </a:p>
+        </p:txBody>
+      </p:sp>
+      <p:sp>
+        <p:nvSpPr>
+          <p:cNvPr id="16" name="Text 14"/>
+          <p:cNvSpPr/>
+          <p:nvPr/>
+        </p:nvSpPr>
+        <p:spPr>
+          <a:xfrm>
+            <a:off x="4409237" y="3401568"/>
+            <a:ext cx="3429000" cy="1280160"/>
           </a:xfrm>
           <a:prstGeom prst="rect">
             <a:avLst/>
@@ -5479,17 +5624,17 @@
               <a:buNone/>
             </a:pPr>
             <a:r>
-              <a:rPr lang="en-US" sz="1000" dirty="0">
-                <a:solidFill>
-                  <a:srgbClr val="222222"/>
-                </a:solidFill>
-                <a:latin typeface="Consolas" pitchFamily="34" charset="0"/>
-                <a:ea typeface="Consolas" pitchFamily="34" charset="-122"/>
-                <a:cs typeface="Consolas" pitchFamily="34" charset="-120"/>
-              </a:rPr>
-              <a:t>if (car.getStatus() == DOCKING</a:t>
-            </a:r>
-            <a:endParaRPr lang="en-US" sz="1000" dirty="0"/>
+              <a:rPr lang="en-US" sz="950" dirty="0">
+                <a:solidFill>
+                  <a:srgbClr val="45515E"/>
+                </a:solidFill>
+                <a:latin typeface="Malgun Gothic" pitchFamily="34" charset="0"/>
+                <a:ea typeface="Malgun Gothic" pitchFamily="34" charset="-122"/>
+                <a:cs typeface="Malgun Gothic" pitchFamily="34" charset="-120"/>
+              </a:rPr>
+              <a:t>WebSocket 핸드셰이크는 커스텀</a:t>
+            </a:r>
+            <a:endParaRPr lang="en-US" sz="950" dirty="0"/>
           </a:p>
           <a:p>
             <a:pPr indent="0" marL="0">
@@ -5499,17 +5644,17 @@
               <a:buNone/>
             </a:pPr>
             <a:r>
-              <a:rPr lang="en-US" sz="1000" dirty="0">
-                <a:solidFill>
-                  <a:srgbClr val="222222"/>
-                </a:solidFill>
-                <a:latin typeface="Consolas" pitchFamily="34" charset="0"/>
-                <a:ea typeface="Consolas" pitchFamily="34" charset="-122"/>
-                <a:cs typeface="Consolas" pitchFamily="34" charset="-120"/>
-              </a:rPr>
-              <a:t>    &amp;&amp; payload == MOVING_TO_GATE)</a:t>
-            </a:r>
-            <a:endParaRPr lang="en-US" sz="1000" dirty="0"/>
+              <a:rPr lang="en-US" sz="950" dirty="0">
+                <a:solidFill>
+                  <a:srgbClr val="45515E"/>
+                </a:solidFill>
+                <a:latin typeface="Malgun Gothic" pitchFamily="34" charset="0"/>
+                <a:ea typeface="Malgun Gothic" pitchFamily="34" charset="-122"/>
+                <a:cs typeface="Malgun Gothic" pitchFamily="34" charset="-120"/>
+              </a:rPr>
+              <a:t>헤더 불가 → 토큰을 URL 파라미터에</a:t>
+            </a:r>
+            <a:endParaRPr lang="en-US" sz="950" dirty="0"/>
           </a:p>
           <a:p>
             <a:pPr indent="0" marL="0">
@@ -5519,46 +5664,7 @@
               <a:buNone/>
             </a:pPr>
             <a:r>
-              <a:rPr lang="en-US" sz="1000" dirty="0">
-                <a:solidFill>
-                  <a:srgbClr val="222222"/>
-                </a:solidFill>
-                <a:latin typeface="Consolas" pitchFamily="34" charset="0"/>
-                <a:ea typeface="Consolas" pitchFamily="34" charset="-122"/>
-                <a:cs typeface="Consolas" pitchFamily="34" charset="-120"/>
-              </a:rPr>
-              <a:t>  → 강제 DOCKING 유지</a:t>
-            </a:r>
-            <a:endParaRPr lang="en-US" sz="1000" dirty="0"/>
-          </a:p>
-        </p:txBody>
-      </p:sp>
-      <p:sp>
-        <p:nvSpPr>
-          <p:cNvPr id="15" name="Text 13"/>
-          <p:cNvSpPr/>
-          <p:nvPr/>
-        </p:nvSpPr>
-        <p:spPr>
-          <a:xfrm>
-            <a:off x="5277917" y="3611880"/>
-            <a:ext cx="6400800" cy="256032"/>
-          </a:xfrm>
-          <a:prstGeom prst="rect">
-            <a:avLst/>
-          </a:prstGeom>
-          <a:noFill/>
-          <a:ln/>
-        </p:spPr>
-        <p:txBody>
-          <a:bodyPr wrap="square" rtlCol="0" anchor="ctr"/>
-          <a:lstStyle/>
-          <a:p>
-            <a:pPr indent="0" marL="0">
-              <a:buNone/>
-            </a:pPr>
-            <a:r>
-              <a:rPr lang="en-US" sz="1000" b="1" dirty="0">
+              <a:rPr lang="en-US" sz="950" dirty="0">
                 <a:solidFill>
                   <a:srgbClr val="45515E"/>
                 </a:solidFill>
@@ -5566,32 +5672,10 @@
                 <a:ea typeface="Malgun Gothic" pitchFamily="34" charset="-122"/>
                 <a:cs typeface="Malgun Gothic" pitchFamily="34" charset="-120"/>
               </a:rPr>
-              <a:t>안전장치 2 — 자동 액션 우선</a:t>
-            </a:r>
-            <a:endParaRPr lang="en-US" sz="1000" dirty="0"/>
-          </a:p>
-        </p:txBody>
-      </p:sp>
-      <p:sp>
-        <p:nvSpPr>
-          <p:cNvPr id="16" name="Text 14"/>
-          <p:cNvSpPr/>
-          <p:nvPr/>
-        </p:nvSpPr>
-        <p:spPr>
-          <a:xfrm>
-            <a:off x="5277917" y="3886200"/>
-            <a:ext cx="6309360" cy="960120"/>
-          </a:xfrm>
-          <a:prstGeom prst="rect">
-            <a:avLst/>
-          </a:prstGeom>
-          <a:noFill/>
-          <a:ln/>
-        </p:spPr>
-        <p:txBody>
-          <a:bodyPr wrap="square" rtlCol="0" anchor="ctr"/>
-          <a:lstStyle/>
+              <a:t>포함해야 함 → 노출 시간을 1분으로</a:t>
+            </a:r>
+            <a:endParaRPr lang="en-US" sz="950" dirty="0"/>
+          </a:p>
           <a:p>
             <a:pPr indent="0" marL="0">
               <a:lnSpc>
@@ -5600,18 +5684,184 @@
               <a:buNone/>
             </a:pPr>
             <a:r>
+              <a:rPr lang="en-US" sz="950" dirty="0">
+                <a:solidFill>
+                  <a:srgbClr val="45515E"/>
+                </a:solidFill>
+                <a:latin typeface="Malgun Gothic" pitchFamily="34" charset="0"/>
+                <a:ea typeface="Malgun Gothic" pitchFamily="34" charset="-122"/>
+                <a:cs typeface="Malgun Gothic" pitchFamily="34" charset="-120"/>
+              </a:rPr>
+              <a:t>제한해 탈취 피해 범위를 줄임</a:t>
+            </a:r>
+            <a:endParaRPr lang="en-US" sz="950" dirty="0"/>
+          </a:p>
+        </p:txBody>
+      </p:sp>
+      <p:sp>
+        <p:nvSpPr>
+          <p:cNvPr id="17" name="Text 15"/>
+          <p:cNvSpPr/>
+          <p:nvPr/>
+        </p:nvSpPr>
+        <p:spPr>
+          <a:xfrm>
+            <a:off x="8158277" y="2377440"/>
+            <a:ext cx="3429000" cy="292608"/>
+          </a:xfrm>
+          <a:prstGeom prst="rect">
+            <a:avLst/>
+          </a:prstGeom>
+          <a:noFill/>
+          <a:ln/>
+        </p:spPr>
+        <p:txBody>
+          <a:bodyPr wrap="square" rtlCol="0" anchor="ctr"/>
+          <a:lstStyle/>
+          <a:p>
+            <a:pPr indent="0" marL="0">
+              <a:buNone/>
+            </a:pPr>
+            <a:r>
+              <a:rPr lang="en-US" sz="1000" b="1" dirty="0">
+                <a:solidFill>
+                  <a:srgbClr val="45515E"/>
+                </a:solidFill>
+                <a:latin typeface="Malgun Gothic" pitchFamily="34" charset="0"/>
+                <a:ea typeface="Malgun Gothic" pitchFamily="34" charset="-122"/>
+                <a:cs typeface="Malgun Gothic" pitchFamily="34" charset="-120"/>
+              </a:rPr>
+              <a:t>REFRESH TOKEN</a:t>
+            </a:r>
+            <a:endParaRPr lang="en-US" sz="1000" dirty="0"/>
+          </a:p>
+        </p:txBody>
+      </p:sp>
+      <p:sp>
+        <p:nvSpPr>
+          <p:cNvPr id="18" name="Shape 16"/>
+          <p:cNvSpPr/>
+          <p:nvPr/>
+        </p:nvSpPr>
+        <p:spPr>
+          <a:xfrm>
+            <a:off x="8158277" y="2743200"/>
+            <a:ext cx="777240" cy="256032"/>
+          </a:xfrm>
+          <a:prstGeom prst="roundRect">
+            <a:avLst>
+              <a:gd name="adj" fmla="val 17857"/>
+            </a:avLst>
+          </a:prstGeom>
+          <a:solidFill>
+            <a:srgbClr val="F0F0F0"/>
+          </a:solidFill>
+          <a:ln w="12700">
+            <a:solidFill>
+              <a:srgbClr val="EDEEF0"/>
+            </a:solidFill>
+            <a:prstDash val="solid"/>
+          </a:ln>
+        </p:spPr>
+      </p:sp>
+      <p:sp>
+        <p:nvSpPr>
+          <p:cNvPr id="19" name="Text 17"/>
+          <p:cNvSpPr/>
+          <p:nvPr/>
+        </p:nvSpPr>
+        <p:spPr>
+          <a:xfrm>
+            <a:off x="8158277" y="2743200"/>
+            <a:ext cx="777240" cy="256032"/>
+          </a:xfrm>
+          <a:prstGeom prst="rect">
+            <a:avLst/>
+          </a:prstGeom>
+          <a:noFill/>
+          <a:ln/>
+        </p:spPr>
+        <p:txBody>
+          <a:bodyPr wrap="square" rtlCol="0" anchor="ctr"/>
+          <a:lstStyle/>
+          <a:p>
+            <a:pPr algn="ctr" indent="0" marL="0">
+              <a:buNone/>
+            </a:pPr>
+            <a:r>
+              <a:rPr lang="en-US" sz="900" b="1" dirty="0">
+                <a:solidFill>
+                  <a:srgbClr val="45515E"/>
+                </a:solidFill>
+                <a:latin typeface="Malgun Gothic" pitchFamily="34" charset="0"/>
+                <a:ea typeface="Malgun Gothic" pitchFamily="34" charset="-122"/>
+                <a:cs typeface="Malgun Gothic" pitchFamily="34" charset="-120"/>
+              </a:rPr>
+              <a:t>7일</a:t>
+            </a:r>
+            <a:endParaRPr lang="en-US" sz="900" dirty="0"/>
+          </a:p>
+        </p:txBody>
+      </p:sp>
+      <p:sp>
+        <p:nvSpPr>
+          <p:cNvPr id="20" name="Text 18"/>
+          <p:cNvSpPr/>
+          <p:nvPr/>
+        </p:nvSpPr>
+        <p:spPr>
+          <a:xfrm>
+            <a:off x="8158277" y="3063240"/>
+            <a:ext cx="3429000" cy="256032"/>
+          </a:xfrm>
+          <a:prstGeom prst="rect">
+            <a:avLst/>
+          </a:prstGeom>
+          <a:noFill/>
+          <a:ln/>
+        </p:spPr>
+        <p:txBody>
+          <a:bodyPr wrap="square" rtlCol="0" anchor="ctr"/>
+          <a:lstStyle/>
+          <a:p>
+            <a:pPr indent="0" marL="0">
+              <a:buNone/>
+            </a:pPr>
+            <a:r>
               <a:rPr lang="en-US" sz="1000" dirty="0">
                 <a:solidFill>
                   <a:srgbClr val="222222"/>
                 </a:solidFill>
-                <a:latin typeface="Consolas" pitchFamily="34" charset="0"/>
-                <a:ea typeface="Consolas" pitchFamily="34" charset="-122"/>
-                <a:cs typeface="Consolas" pitchFamily="34" charset="-120"/>
-              </a:rPr>
-              <a:t>preStatus = car.getStatus()</a:t>
+                <a:latin typeface="Malgun Gothic" pitchFamily="34" charset="0"/>
+                <a:ea typeface="Malgun Gothic" pitchFamily="34" charset="-122"/>
+                <a:cs typeface="Malgun Gothic" pitchFamily="34" charset="-120"/>
+              </a:rPr>
+              <a:t>토큰 갱신 전용</a:t>
             </a:r>
             <a:endParaRPr lang="en-US" sz="1000" dirty="0"/>
           </a:p>
+        </p:txBody>
+      </p:sp>
+      <p:sp>
+        <p:nvSpPr>
+          <p:cNvPr id="21" name="Text 19"/>
+          <p:cNvSpPr/>
+          <p:nvPr/>
+        </p:nvSpPr>
+        <p:spPr>
+          <a:xfrm>
+            <a:off x="8158277" y="3401568"/>
+            <a:ext cx="3429000" cy="1280160"/>
+          </a:xfrm>
+          <a:prstGeom prst="rect">
+            <a:avLst/>
+          </a:prstGeom>
+          <a:noFill/>
+          <a:ln/>
+        </p:spPr>
+        <p:txBody>
+          <a:bodyPr wrap="square" rtlCol="0" anchor="ctr"/>
+          <a:lstStyle/>
           <a:p>
             <a:pPr indent="0" marL="0">
               <a:lnSpc>
@@ -5620,17 +5870,17 @@
               <a:buNone/>
             </a:pPr>
             <a:r>
-              <a:rPr lang="en-US" sz="1000" dirty="0">
-                <a:solidFill>
-                  <a:srgbClr val="222222"/>
-                </a:solidFill>
-                <a:latin typeface="Consolas" pitchFamily="34" charset="0"/>
-                <a:ea typeface="Consolas" pitchFamily="34" charset="-122"/>
-                <a:cs typeface="Consolas" pitchFamily="34" charset="-120"/>
-              </a:rPr>
-              <a:t>checkAndTriggerAutoActions()</a:t>
-            </a:r>
-            <a:endParaRPr lang="en-US" sz="1000" dirty="0"/>
+              <a:rPr lang="en-US" sz="950" dirty="0">
+                <a:solidFill>
+                  <a:srgbClr val="45515E"/>
+                </a:solidFill>
+                <a:latin typeface="Malgun Gothic" pitchFamily="34" charset="0"/>
+                <a:ea typeface="Malgun Gothic" pitchFamily="34" charset="-122"/>
+                <a:cs typeface="Malgun Gothic" pitchFamily="34" charset="-120"/>
+              </a:rPr>
+              <a:t>장기 유효 → DB 대신 Redis에</a:t>
+            </a:r>
+            <a:endParaRPr lang="en-US" sz="950" dirty="0"/>
           </a:p>
           <a:p>
             <a:pPr indent="0" marL="0">
@@ -5640,17 +5890,17 @@
               <a:buNone/>
             </a:pPr>
             <a:r>
-              <a:rPr lang="en-US" sz="1000" dirty="0">
-                <a:solidFill>
-                  <a:srgbClr val="222222"/>
-                </a:solidFill>
-                <a:latin typeface="Consolas" pitchFamily="34" charset="0"/>
-                <a:ea typeface="Consolas" pitchFamily="34" charset="-122"/>
-                <a:cs typeface="Consolas" pitchFamily="34" charset="-120"/>
-              </a:rPr>
-              <a:t>if (car.getStatus() != preStatus)</a:t>
-            </a:r>
-            <a:endParaRPr lang="en-US" sz="1000" dirty="0"/>
+              <a:rPr lang="en-US" sz="950" dirty="0">
+                <a:solidFill>
+                  <a:srgbClr val="45515E"/>
+                </a:solidFill>
+                <a:latin typeface="Malgun Gothic" pitchFamily="34" charset="0"/>
+                <a:ea typeface="Malgun Gothic" pitchFamily="34" charset="-122"/>
+                <a:cs typeface="Malgun Gothic" pitchFamily="34" charset="-120"/>
+              </a:rPr>
+              <a:t>TTL로 저장. 이미 사용된 토큰이</a:t>
+            </a:r>
+            <a:endParaRPr lang="en-US" sz="950" dirty="0"/>
           </a:p>
           <a:p>
             <a:pPr indent="0" marL="0">
@@ -5660,46 +5910,7 @@
               <a:buNone/>
             </a:pPr>
             <a:r>
-              <a:rPr lang="en-US" sz="1000" dirty="0">
-                <a:solidFill>
-                  <a:srgbClr val="222222"/>
-                </a:solidFill>
-                <a:latin typeface="Consolas" pitchFamily="34" charset="0"/>
-                <a:ea typeface="Consolas" pitchFamily="34" charset="-122"/>
-                <a:cs typeface="Consolas" pitchFamily="34" charset="-120"/>
-              </a:rPr>
-              <a:t>  → payload 상태 대신 변경된 상태 사용</a:t>
-            </a:r>
-            <a:endParaRPr lang="en-US" sz="1000" dirty="0"/>
-          </a:p>
-        </p:txBody>
-      </p:sp>
-      <p:sp>
-        <p:nvSpPr>
-          <p:cNvPr id="17" name="Text 15"/>
-          <p:cNvSpPr/>
-          <p:nvPr/>
-        </p:nvSpPr>
-        <p:spPr>
-          <a:xfrm>
-            <a:off x="5277917" y="4956048"/>
-            <a:ext cx="6309360" cy="320040"/>
-          </a:xfrm>
-          <a:prstGeom prst="rect">
-            <a:avLst/>
-          </a:prstGeom>
-          <a:noFill/>
-          <a:ln/>
-        </p:spPr>
-        <p:txBody>
-          <a:bodyPr wrap="square" rtlCol="0" anchor="ctr"/>
-          <a:lstStyle/>
-          <a:p>
-            <a:pPr indent="0" marL="0">
-              <a:buNone/>
-            </a:pPr>
-            <a:r>
-              <a:rPr lang="en-US" sz="1000" b="1" dirty="0">
+              <a:rPr lang="en-US" sz="950" dirty="0">
                 <a:solidFill>
                   <a:srgbClr val="45515E"/>
                 </a:solidFill>
@@ -5707,15 +5918,74 @@
                 <a:ea typeface="Malgun Gothic" pitchFamily="34" charset="-122"/>
                 <a:cs typeface="Malgun Gothic" pitchFamily="34" charset="-120"/>
               </a:rPr>
-              <a:t>→ 결과: 늦게 온 메시지가 DB 상태를 되돌리는 버그 완전 차단</a:t>
-            </a:r>
-            <a:endParaRPr lang="en-US" sz="1000" dirty="0"/>
-          </a:p>
-        </p:txBody>
-      </p:sp>
-      <p:sp>
-        <p:nvSpPr>
-          <p:cNvPr id="18" name="Shape 16"/>
+              <a:t>다시 들어오면 해당 계정 전체</a:t>
+            </a:r>
+            <a:endParaRPr lang="en-US" sz="950" dirty="0"/>
+          </a:p>
+          <a:p>
+            <a:pPr indent="0" marL="0">
+              <a:lnSpc>
+                <a:spcPct val="150000"/>
+              </a:lnSpc>
+              <a:buNone/>
+            </a:pPr>
+            <a:r>
+              <a:rPr lang="en-US" sz="950" dirty="0">
+                <a:solidFill>
+                  <a:srgbClr val="45515E"/>
+                </a:solidFill>
+                <a:latin typeface="Malgun Gothic" pitchFamily="34" charset="0"/>
+                <a:ea typeface="Malgun Gothic" pitchFamily="34" charset="-122"/>
+                <a:cs typeface="Malgun Gothic" pitchFamily="34" charset="-120"/>
+              </a:rPr>
+              <a:t>세션을 무효화하는 로직 구현</a:t>
+            </a:r>
+            <a:endParaRPr lang="en-US" sz="950" dirty="0"/>
+          </a:p>
+        </p:txBody>
+      </p:sp>
+      <p:sp>
+        <p:nvSpPr>
+          <p:cNvPr id="22" name="Text 20"/>
+          <p:cNvSpPr/>
+          <p:nvPr/>
+        </p:nvSpPr>
+        <p:spPr>
+          <a:xfrm>
+            <a:off x="660197" y="4919472"/>
+            <a:ext cx="10872216" cy="274320"/>
+          </a:xfrm>
+          <a:prstGeom prst="rect">
+            <a:avLst/>
+          </a:prstGeom>
+          <a:noFill/>
+          <a:ln/>
+        </p:spPr>
+        <p:txBody>
+          <a:bodyPr wrap="square" rtlCol="0" anchor="ctr"/>
+          <a:lstStyle/>
+          <a:p>
+            <a:pPr algn="ctr" indent="0" marL="0">
+              <a:buNone/>
+            </a:pPr>
+            <a:r>
+              <a:rPr lang="en-US" sz="950" dirty="0">
+                <a:solidFill>
+                  <a:srgbClr val="45515E"/>
+                </a:solidFill>
+                <a:latin typeface="Malgun Gothic" pitchFamily="34" charset="0"/>
+                <a:ea typeface="Malgun Gothic" pitchFamily="34" charset="-122"/>
+                <a:cs typeface="Malgun Gothic" pitchFamily="34" charset="-120"/>
+              </a:rPr>
+              <a:t>로그인 시 3종 토큰 동시 발급  ·  SOCKET 토큰은 WebSocket 연결 1회에만 사용, 이후 폐기</a:t>
+            </a:r>
+            <a:endParaRPr lang="en-US" sz="950" dirty="0"/>
+          </a:p>
+        </p:txBody>
+      </p:sp>
+      <p:sp>
+        <p:nvSpPr>
+          <p:cNvPr id="23" name="Shape 21"/>
           <p:cNvSpPr/>
           <p:nvPr/>
         </p:nvSpPr>
@@ -5737,7 +6007,7 @@
       </p:sp>
       <p:sp>
         <p:nvSpPr>
-          <p:cNvPr id="19" name="Text 17"/>
+          <p:cNvPr id="24" name="Text 22"/>
           <p:cNvSpPr/>
           <p:nvPr/>
         </p:nvSpPr>
@@ -5768,7 +6038,7 @@
                 <a:ea typeface="Malgun Gothic" pitchFamily="34" charset="-122"/>
                 <a:cs typeface="Malgun Gothic" pitchFamily="34" charset="-120"/>
               </a:rPr>
-              <a:t>MQTT 메시지는 언제나 늦게 온 과거 값일 수 있습니다. DB에 저장된 현재 상태가 항상 우선입니다.</a:t>
+              <a:t>WebSocket은 토큰을 URL에 실어야 하는 구조입니다. 수명을 1분으로 제한해 탈취 시 피해 범위를 줄였습니다.</a:t>
             </a:r>
             <a:endParaRPr lang="en-US" sz="900" dirty="0"/>
           </a:p>
@@ -5776,7 +6046,7 @@
       </p:sp>
       <p:sp>
         <p:nvSpPr>
-          <p:cNvPr id="20" name="Text 18"/>
+          <p:cNvPr id="25" name="Text 23"/>
           <p:cNvSpPr/>
           <p:nvPr/>
         </p:nvSpPr>
@@ -5807,7 +6077,7 @@
                 <a:ea typeface="Malgun Gothic" pitchFamily="34" charset="-122"/>
                 <a:cs typeface="Malgun Gothic" pitchFamily="34" charset="-120"/>
               </a:rPr>
-              <a:t>Source: AGV 프로젝트 커밋 메시지 직접 인용 (2026-02-06)</a:t>
+              <a:t>Source: Autowing_car — JWT 토큰 설계 커밋 (2026-01)</a:t>
             </a:r>
             <a:endParaRPr lang="en-US" sz="800" dirty="0"/>
           </a:p>
@@ -5815,7 +6085,7 @@
       </p:sp>
       <p:sp>
         <p:nvSpPr>
-          <p:cNvPr id="21" name="Text 19"/>
+          <p:cNvPr id="26" name="Text 24"/>
           <p:cNvSpPr/>
           <p:nvPr/>
         </p:nvSpPr>
@@ -5893,7 +6163,7 @@
         <p:spPr>
           <a:xfrm>
             <a:off x="385877" y="279806"/>
-            <a:ext cx="5029200" cy="245974"/>
+            <a:ext cx="10972800" cy="245974"/>
           </a:xfrm>
           <a:prstGeom prst="rect">
             <a:avLst/>
@@ -5917,7 +6187,7 @@
                 <a:ea typeface="Malgun Gothic" pitchFamily="34" charset="-122"/>
                 <a:cs typeface="Malgun Gothic" pitchFamily="34" charset="-120"/>
               </a:rPr>
-              <a:t>KEY LINE 1 · AGV 인증 설계</a:t>
+              <a:t>주요 프로젝트 02 · RobotPal</a:t>
             </a:r>
             <a:endParaRPr lang="en-US" sz="1000" dirty="0"/>
           </a:p>
@@ -5956,7 +6226,7 @@
                 <a:ea typeface="Malgun Gothic" pitchFamily="34" charset="-122"/>
                 <a:cs typeface="Malgun Gothic" pitchFamily="34" charset="-120"/>
               </a:rPr>
-              <a:t>WebSocket 전용 토큰을 1분으로 제한해 URL 노출 위험을 최소화했다</a:t>
+              <a:t>렌더와 인코딩을 분리하자 GPU 환경에 따라 앱 FPS +6~15% 개선을 수치로 확인했다</a:t>
             </a:r>
             <a:endParaRPr lang="en-US" sz="2400" dirty="0"/>
           </a:p>
@@ -5995,7 +6265,7 @@
                 <a:ea typeface="Malgun Gothic" pitchFamily="34" charset="-122"/>
                 <a:cs typeface="Malgun Gothic" pitchFamily="34" charset="-120"/>
               </a:rPr>
-              <a:t>JWT 3종 토큰 분리 · Spring Security · Redis Refresh Token Rotation</a:t>
+              <a:t>C++17 · OpenGL · libjpeg · 생산자-소비자 패턴 · 벤치마킹</a:t>
             </a:r>
             <a:endParaRPr lang="en-US" sz="1200" dirty="0"/>
           </a:p>
@@ -6010,7 +6280,7 @@
         <p:spPr>
           <a:xfrm>
             <a:off x="385877" y="2011680"/>
-            <a:ext cx="11420856" cy="3520440"/>
+            <a:ext cx="6711696" cy="3520440"/>
           </a:xfrm>
           <a:prstGeom prst="roundRect">
             <a:avLst>
@@ -6037,61 +6307,22 @@
       </p:sp>
       <p:sp>
         <p:nvSpPr>
-          <p:cNvPr id="6" name="Text 4"/>
-          <p:cNvSpPr/>
-          <p:nvPr/>
-        </p:nvSpPr>
-        <p:spPr>
-          <a:xfrm>
-            <a:off x="660197" y="2377440"/>
-            <a:ext cx="3429000" cy="292608"/>
-          </a:xfrm>
-          <a:prstGeom prst="rect">
-            <a:avLst/>
-          </a:prstGeom>
-          <a:noFill/>
-          <a:ln/>
-        </p:spPr>
-        <p:txBody>
-          <a:bodyPr wrap="square" rtlCol="0" anchor="ctr"/>
-          <a:lstStyle/>
-          <a:p>
-            <a:pPr indent="0" marL="0">
-              <a:buNone/>
-            </a:pPr>
-            <a:r>
-              <a:rPr lang="en-US" sz="1000" b="1" dirty="0">
-                <a:solidFill>
-                  <a:srgbClr val="4F6EF1"/>
-                </a:solidFill>
-                <a:latin typeface="Malgun Gothic" pitchFamily="34" charset="0"/>
-                <a:ea typeface="Malgun Gothic" pitchFamily="34" charset="-122"/>
-                <a:cs typeface="Malgun Gothic" pitchFamily="34" charset="-120"/>
-              </a:rPr>
-              <a:t>ACCESS TOKEN</a:t>
-            </a:r>
-            <a:endParaRPr lang="en-US" sz="1000" dirty="0"/>
-          </a:p>
-        </p:txBody>
-      </p:sp>
-      <p:sp>
-        <p:nvSpPr>
-          <p:cNvPr id="7" name="Shape 5"/>
-          <p:cNvSpPr/>
-          <p:nvPr/>
-        </p:nvSpPr>
-        <p:spPr>
-          <a:xfrm>
-            <a:off x="660197" y="2743200"/>
-            <a:ext cx="777240" cy="256032"/>
+          <p:cNvPr id="6" name="Shape 4"/>
+          <p:cNvSpPr/>
+          <p:nvPr/>
+        </p:nvSpPr>
+        <p:spPr>
+          <a:xfrm>
+            <a:off x="7280453" y="2011680"/>
+            <a:ext cx="4526280" cy="3520440"/>
           </a:xfrm>
           <a:prstGeom prst="roundRect">
             <a:avLst>
-              <a:gd name="adj" fmla="val 17857"/>
+              <a:gd name="adj" fmla="val 4675"/>
             </a:avLst>
           </a:prstGeom>
           <a:solidFill>
-            <a:srgbClr val="F0F0F0"/>
+            <a:srgbClr val="FFFFFF"/>
           </a:solidFill>
           <a:ln w="12700">
             <a:solidFill>
@@ -6099,177 +6330,10 @@
             </a:solidFill>
             <a:prstDash val="solid"/>
           </a:ln>
-        </p:spPr>
-      </p:sp>
-      <p:sp>
-        <p:nvSpPr>
-          <p:cNvPr id="8" name="Text 6"/>
-          <p:cNvSpPr/>
-          <p:nvPr/>
-        </p:nvSpPr>
-        <p:spPr>
-          <a:xfrm>
-            <a:off x="660197" y="2743200"/>
-            <a:ext cx="777240" cy="256032"/>
-          </a:xfrm>
-          <a:prstGeom prst="rect">
-            <a:avLst/>
-          </a:prstGeom>
-          <a:noFill/>
-          <a:ln/>
-        </p:spPr>
-        <p:txBody>
-          <a:bodyPr wrap="square" rtlCol="0" anchor="ctr"/>
-          <a:lstStyle/>
-          <a:p>
-            <a:pPr algn="ctr" indent="0" marL="0">
-              <a:buNone/>
-            </a:pPr>
-            <a:r>
-              <a:rPr lang="en-US" sz="900" b="1" dirty="0">
-                <a:solidFill>
-                  <a:srgbClr val="4F6EF1"/>
-                </a:solidFill>
-                <a:latin typeface="Malgun Gothic" pitchFamily="34" charset="0"/>
-                <a:ea typeface="Malgun Gothic" pitchFamily="34" charset="-122"/>
-                <a:cs typeface="Malgun Gothic" pitchFamily="34" charset="-120"/>
-              </a:rPr>
-              <a:t>15분</a:t>
-            </a:r>
-            <a:endParaRPr lang="en-US" sz="900" dirty="0"/>
-          </a:p>
-        </p:txBody>
-      </p:sp>
-      <p:sp>
-        <p:nvSpPr>
-          <p:cNvPr id="9" name="Text 7"/>
-          <p:cNvSpPr/>
-          <p:nvPr/>
-        </p:nvSpPr>
-        <p:spPr>
-          <a:xfrm>
-            <a:off x="660197" y="3063240"/>
-            <a:ext cx="3429000" cy="274320"/>
-          </a:xfrm>
-          <a:prstGeom prst="rect">
-            <a:avLst/>
-          </a:prstGeom>
-          <a:noFill/>
-          <a:ln/>
-        </p:spPr>
-        <p:txBody>
-          <a:bodyPr wrap="square" rtlCol="0" anchor="ctr"/>
-          <a:lstStyle/>
-          <a:p>
-            <a:pPr indent="0" marL="0">
-              <a:buNone/>
-            </a:pPr>
-            <a:r>
-              <a:rPr lang="en-US" sz="1000" dirty="0">
-                <a:solidFill>
-                  <a:srgbClr val="222222"/>
-                </a:solidFill>
-                <a:latin typeface="Malgun Gothic" pitchFamily="34" charset="0"/>
-                <a:ea typeface="Malgun Gothic" pitchFamily="34" charset="-122"/>
-                <a:cs typeface="Malgun Gothic" pitchFamily="34" charset="-120"/>
-              </a:rPr>
-              <a:t>REST API 인증</a:t>
-            </a:r>
-            <a:endParaRPr lang="en-US" sz="1000" dirty="0"/>
-          </a:p>
-        </p:txBody>
-      </p:sp>
-      <p:sp>
-        <p:nvSpPr>
-          <p:cNvPr id="10" name="Text 8"/>
-          <p:cNvSpPr/>
-          <p:nvPr/>
-        </p:nvSpPr>
-        <p:spPr>
-          <a:xfrm>
-            <a:off x="660197" y="3429000"/>
-            <a:ext cx="3429000" cy="658368"/>
-          </a:xfrm>
-          <a:prstGeom prst="rect">
-            <a:avLst/>
-          </a:prstGeom>
-          <a:noFill/>
-          <a:ln/>
-        </p:spPr>
-        <p:txBody>
-          <a:bodyPr wrap="square" rtlCol="0" anchor="ctr"/>
-          <a:lstStyle/>
-          <a:p>
-            <a:pPr indent="0" marL="0">
-              <a:lnSpc>
-                <a:spcPct val="150000"/>
-              </a:lnSpc>
-              <a:buNone/>
-            </a:pPr>
-            <a:r>
-              <a:rPr lang="en-US" sz="1000" dirty="0">
-                <a:solidFill>
-                  <a:srgbClr val="45515E"/>
-                </a:solidFill>
-                <a:latin typeface="Malgun Gothic" pitchFamily="34" charset="0"/>
-                <a:ea typeface="Malgun Gothic" pitchFamily="34" charset="-122"/>
-                <a:cs typeface="Malgun Gothic" pitchFamily="34" charset="-120"/>
-              </a:rPr>
-              <a:t>Authorization 헤더</a:t>
-            </a:r>
-            <a:endParaRPr lang="en-US" sz="1000" dirty="0"/>
-          </a:p>
-          <a:p>
-            <a:pPr indent="0" marL="0">
-              <a:lnSpc>
-                <a:spcPct val="150000"/>
-              </a:lnSpc>
-              <a:buNone/>
-            </a:pPr>
-            <a:r>
-              <a:rPr lang="en-US" sz="1000" dirty="0">
-                <a:solidFill>
-                  <a:srgbClr val="45515E"/>
-                </a:solidFill>
-                <a:latin typeface="Malgun Gothic" pitchFamily="34" charset="0"/>
-                <a:ea typeface="Malgun Gothic" pitchFamily="34" charset="-122"/>
-                <a:cs typeface="Malgun Gothic" pitchFamily="34" charset="-120"/>
-              </a:rPr>
-              <a:t>일반 API 요청 전용</a:t>
-            </a:r>
-            <a:endParaRPr lang="en-US" sz="1000" dirty="0"/>
-          </a:p>
-        </p:txBody>
-      </p:sp>
-      <p:sp>
-        <p:nvSpPr>
-          <p:cNvPr id="11" name="Shape 9"/>
-          <p:cNvSpPr/>
-          <p:nvPr/>
-        </p:nvSpPr>
-        <p:spPr>
-          <a:xfrm>
-            <a:off x="4317797" y="2212848"/>
-            <a:ext cx="3611880" cy="3063240"/>
-          </a:xfrm>
-          <a:prstGeom prst="roundRect">
-            <a:avLst>
-              <a:gd name="adj" fmla="val 4179"/>
-            </a:avLst>
-          </a:prstGeom>
-          <a:solidFill>
-            <a:srgbClr val="F8F9FF"/>
-          </a:solidFill>
-          <a:ln w="17780">
-            <a:solidFill>
-              <a:srgbClr val="A8B7F8"/>
-            </a:solidFill>
-            <a:prstDash val="solid"/>
-          </a:ln>
           <a:effectLst>
-            <a:outerShdw sx="100000" sy="100000" kx="0" ky="0" algn="bl" rotWithShape="0" blurRad="190500" dist="50800" dir="5400000">
-              <a:srgbClr val="4F6EF1">
-                <a:alpha val="20000"/>
+            <a:outerShdw sx="100000" sy="100000" kx="0" ky="0" algn="bl" rotWithShape="0" blurRad="152400" dist="25400" dir="5400000">
+              <a:srgbClr val="000000">
+                <a:alpha val="5000"/>
               </a:srgbClr>
             </a:outerShdw>
           </a:effectLst>
@@ -6277,14 +6341,14 @@
       </p:sp>
       <p:sp>
         <p:nvSpPr>
-          <p:cNvPr id="12" name="Text 10"/>
-          <p:cNvSpPr/>
-          <p:nvPr/>
-        </p:nvSpPr>
-        <p:spPr>
-          <a:xfrm>
-            <a:off x="4409237" y="2377440"/>
-            <a:ext cx="3429000" cy="292608"/>
+          <p:cNvPr id="7" name="Text 5"/>
+          <p:cNvSpPr/>
+          <p:nvPr/>
+        </p:nvSpPr>
+        <p:spPr>
+          <a:xfrm>
+            <a:off x="568757" y="2194560"/>
+            <a:ext cx="6345936" cy="256032"/>
           </a:xfrm>
           <a:prstGeom prst="rect">
             <a:avLst/>
@@ -6302,79 +6366,205 @@
             <a:r>
               <a:rPr lang="en-US" sz="1000" b="1" dirty="0">
                 <a:solidFill>
-                  <a:srgbClr val="0014D3"/>
-                </a:solidFill>
-                <a:latin typeface="Malgun Gothic" pitchFamily="34" charset="0"/>
-                <a:ea typeface="Malgun Gothic" pitchFamily="34" charset="-122"/>
-                <a:cs typeface="Malgun Gothic" pitchFamily="34" charset="-120"/>
-              </a:rPr>
-              <a:t>SOCKET TOKEN</a:t>
+                  <a:srgbClr val="222222"/>
+                </a:solidFill>
+                <a:latin typeface="Malgun Gothic" pitchFamily="34" charset="0"/>
+                <a:ea typeface="Malgun Gothic" pitchFamily="34" charset="-122"/>
+                <a:cs typeface="Malgun Gothic" pitchFamily="34" charset="-120"/>
+              </a:rPr>
+              <a:t>싱글 vs 멀티 워커 FPS 비교 (816×616, JPEG Q70, 디버그 빌드)</a:t>
             </a:r>
             <a:endParaRPr lang="en-US" sz="1000" dirty="0"/>
           </a:p>
         </p:txBody>
       </p:sp>
-      <p:sp>
-        <p:nvSpPr>
-          <p:cNvPr id="13" name="Shape 11"/>
-          <p:cNvSpPr/>
-          <p:nvPr/>
-        </p:nvSpPr>
-        <p:spPr>
-          <a:xfrm>
-            <a:off x="4409237" y="2743200"/>
-            <a:ext cx="777240" cy="256032"/>
-          </a:xfrm>
-          <a:prstGeom prst="roundRect">
-            <a:avLst>
-              <a:gd name="adj" fmla="val 17857"/>
-            </a:avLst>
+      <p:graphicFrame>
+        <p:nvGraphicFramePr>
+          <p:cNvPr id="8" name="Chart 0" descr=""/>
+          <p:cNvGraphicFramePr/>
+          <p:nvPr/>
+        </p:nvGraphicFramePr>
+        <p:xfrm>
+          <a:off x="568757" y="2487168"/>
+          <a:ext cx="6345936" cy="2560320"/>
+        </p:xfrm>
+        <a:graphic xmlns:a="http://schemas.openxmlformats.org/drawingml/2006/main">
+          <a:graphicData uri="http://schemas.openxmlformats.org/drawingml/2006/chart">
+            <c:chart xmlns:c="http://schemas.openxmlformats.org/drawingml/2006/chart" r:id="rId1"/>
+          </a:graphicData>
+        </a:graphic>
+      </p:graphicFrame>
+      <p:sp>
+        <p:nvSpPr>
+          <p:cNvPr id="9" name="Text 6"/>
+          <p:cNvSpPr/>
+          <p:nvPr/>
+        </p:nvSpPr>
+        <p:spPr>
+          <a:xfrm>
+            <a:off x="568757" y="5120640"/>
+            <a:ext cx="6345936" cy="256032"/>
+          </a:xfrm>
+          <a:prstGeom prst="rect">
+            <a:avLst/>
+          </a:prstGeom>
+          <a:noFill/>
+          <a:ln/>
+        </p:spPr>
+        <p:txBody>
+          <a:bodyPr wrap="square" rtlCol="0" anchor="ctr"/>
+          <a:lstStyle/>
+          <a:p>
+            <a:pPr indent="0" marL="0">
+              <a:buNone/>
+            </a:pPr>
+            <a:r>
+              <a:rPr lang="en-US" sz="900" dirty="0">
+                <a:solidFill>
+                  <a:srgbClr val="45515E"/>
+                </a:solidFill>
+                <a:latin typeface="Malgun Gothic" pitchFamily="34" charset="0"/>
+                <a:ea typeface="Malgun Gothic" pitchFamily="34" charset="-122"/>
+                <a:cs typeface="Malgun Gothic" pitchFamily="34" charset="-120"/>
+              </a:rPr>
+              <a:t>dGPU: 55.94 → 59.41 (+6.20%)  ·  iGPU: 58.10 → 66.95 (+15.24%)  ·  릴리즈 빌드 별도 미측정</a:t>
+            </a:r>
+            <a:endParaRPr lang="en-US" sz="900" dirty="0"/>
+          </a:p>
+        </p:txBody>
+      </p:sp>
+      <p:sp>
+        <p:nvSpPr>
+          <p:cNvPr id="10" name="Text 7"/>
+          <p:cNvSpPr/>
+          <p:nvPr/>
+        </p:nvSpPr>
+        <p:spPr>
+          <a:xfrm>
+            <a:off x="7463333" y="2240280"/>
+            <a:ext cx="4160520" cy="256032"/>
+          </a:xfrm>
+          <a:prstGeom prst="rect">
+            <a:avLst/>
+          </a:prstGeom>
+          <a:noFill/>
+          <a:ln/>
+        </p:spPr>
+        <p:txBody>
+          <a:bodyPr wrap="square" rtlCol="0" anchor="ctr"/>
+          <a:lstStyle/>
+          <a:p>
+            <a:pPr indent="0" marL="0">
+              <a:buNone/>
+            </a:pPr>
+            <a:r>
+              <a:rPr lang="en-US" sz="1000" b="1" dirty="0">
+                <a:solidFill>
+                  <a:srgbClr val="45515E"/>
+                </a:solidFill>
+                <a:latin typeface="Malgun Gothic" pitchFamily="34" charset="0"/>
+                <a:ea typeface="Malgun Gothic" pitchFamily="34" charset="-122"/>
+                <a:cs typeface="Malgun Gothic" pitchFamily="34" charset="-120"/>
+              </a:rPr>
+              <a:t>문제 → 해결</a:t>
+            </a:r>
+            <a:endParaRPr lang="en-US" sz="1000" dirty="0"/>
+          </a:p>
+        </p:txBody>
+      </p:sp>
+      <p:sp>
+        <p:nvSpPr>
+          <p:cNvPr id="11" name="Shape 8"/>
+          <p:cNvSpPr/>
+          <p:nvPr/>
+        </p:nvSpPr>
+        <p:spPr>
+          <a:xfrm>
+            <a:off x="7463333" y="2688336"/>
+            <a:ext cx="118872" cy="118872"/>
+          </a:xfrm>
+          <a:prstGeom prst="ellipse">
+            <a:avLst/>
           </a:prstGeom>
           <a:solidFill>
-            <a:srgbClr val="F8F9FF"/>
+            <a:srgbClr val="45515E"/>
           </a:solidFill>
-          <a:ln w="12700">
-            <a:solidFill>
-              <a:srgbClr val="A8B7F8"/>
-            </a:solidFill>
-            <a:prstDash val="solid"/>
-          </a:ln>
-        </p:spPr>
-      </p:sp>
-      <p:sp>
-        <p:nvSpPr>
-          <p:cNvPr id="14" name="Text 12"/>
-          <p:cNvSpPr/>
-          <p:nvPr/>
-        </p:nvSpPr>
-        <p:spPr>
-          <a:xfrm>
-            <a:off x="4409237" y="2743200"/>
-            <a:ext cx="777240" cy="256032"/>
-          </a:xfrm>
-          <a:prstGeom prst="rect">
-            <a:avLst/>
-          </a:prstGeom>
-          <a:noFill/>
-          <a:ln/>
-        </p:spPr>
-        <p:txBody>
-          <a:bodyPr wrap="square" rtlCol="0" anchor="ctr"/>
-          <a:lstStyle/>
-          <a:p>
-            <a:pPr algn="ctr" indent="0" marL="0">
-              <a:buNone/>
-            </a:pPr>
-            <a:r>
-              <a:rPr lang="en-US" sz="900" b="1" dirty="0">
-                <a:solidFill>
-                  <a:srgbClr val="0014D3"/>
-                </a:solidFill>
-                <a:latin typeface="Malgun Gothic" pitchFamily="34" charset="0"/>
-                <a:ea typeface="Malgun Gothic" pitchFamily="34" charset="-122"/>
-                <a:cs typeface="Malgun Gothic" pitchFamily="34" charset="-120"/>
-              </a:rPr>
-              <a:t>1분</a:t>
+          <a:ln/>
+        </p:spPr>
+      </p:sp>
+      <p:sp>
+        <p:nvSpPr>
+          <p:cNvPr id="12" name="Text 9"/>
+          <p:cNvSpPr/>
+          <p:nvPr/>
+        </p:nvSpPr>
+        <p:spPr>
+          <a:xfrm>
+            <a:off x="7616952" y="2624328"/>
+            <a:ext cx="4023360" cy="256032"/>
+          </a:xfrm>
+          <a:prstGeom prst="rect">
+            <a:avLst/>
+          </a:prstGeom>
+          <a:noFill/>
+          <a:ln/>
+        </p:spPr>
+        <p:txBody>
+          <a:bodyPr wrap="square" rtlCol="0" anchor="ctr"/>
+          <a:lstStyle/>
+          <a:p>
+            <a:pPr indent="0" marL="0">
+              <a:buNone/>
+            </a:pPr>
+            <a:r>
+              <a:rPr lang="en-US" sz="1000" dirty="0">
+                <a:solidFill>
+                  <a:srgbClr val="45515E"/>
+                </a:solidFill>
+                <a:latin typeface="Malgun Gothic" pitchFamily="34" charset="0"/>
+                <a:ea typeface="Malgun Gothic" pitchFamily="34" charset="-122"/>
+                <a:cs typeface="Malgun Gothic" pitchFamily="34" charset="-120"/>
+              </a:rPr>
+              <a:t>렌더 루프와 인코딩이 경쟁</a:t>
+            </a:r>
+            <a:endParaRPr lang="en-US" sz="1000" dirty="0"/>
+          </a:p>
+        </p:txBody>
+      </p:sp>
+      <p:sp>
+        <p:nvSpPr>
+          <p:cNvPr id="13" name="Text 10"/>
+          <p:cNvSpPr/>
+          <p:nvPr/>
+        </p:nvSpPr>
+        <p:spPr>
+          <a:xfrm>
+            <a:off x="7616952" y="2880360"/>
+            <a:ext cx="4023360" cy="256032"/>
+          </a:xfrm>
+          <a:prstGeom prst="rect">
+            <a:avLst/>
+          </a:prstGeom>
+          <a:noFill/>
+          <a:ln/>
+        </p:spPr>
+        <p:txBody>
+          <a:bodyPr wrap="square" rtlCol="0" anchor="ctr"/>
+          <a:lstStyle/>
+          <a:p>
+            <a:pPr indent="0" marL="0">
+              <a:buNone/>
+            </a:pPr>
+            <a:r>
+              <a:rPr lang="en-US" sz="900" dirty="0">
+                <a:solidFill>
+                  <a:srgbClr val="8E8E93"/>
+                </a:solidFill>
+                <a:latin typeface="Malgun Gothic" pitchFamily="34" charset="0"/>
+                <a:ea typeface="Malgun Gothic" pitchFamily="34" charset="-122"/>
+                <a:cs typeface="Malgun Gothic" pitchFamily="34" charset="-120"/>
+              </a:rPr>
+              <a:t>압축 작업이 메인 루프 FPS를 점유</a:t>
             </a:r>
             <a:endParaRPr lang="en-US" sz="900" dirty="0"/>
           </a:p>
@@ -6382,38 +6572,58 @@
       </p:sp>
       <p:sp>
         <p:nvSpPr>
-          <p:cNvPr id="15" name="Text 13"/>
-          <p:cNvSpPr/>
-          <p:nvPr/>
-        </p:nvSpPr>
-        <p:spPr>
-          <a:xfrm>
-            <a:off x="4409237" y="3063240"/>
-            <a:ext cx="3429000" cy="274320"/>
-          </a:xfrm>
-          <a:prstGeom prst="rect">
-            <a:avLst/>
-          </a:prstGeom>
-          <a:noFill/>
-          <a:ln/>
-        </p:spPr>
-        <p:txBody>
-          <a:bodyPr wrap="square" rtlCol="0" anchor="ctr"/>
-          <a:lstStyle/>
-          <a:p>
-            <a:pPr indent="0" marL="0">
-              <a:buNone/>
-            </a:pPr>
-            <a:r>
-              <a:rPr lang="en-US" sz="1000" dirty="0">
-                <a:solidFill>
-                  <a:srgbClr val="222222"/>
-                </a:solidFill>
-                <a:latin typeface="Malgun Gothic" pitchFamily="34" charset="0"/>
-                <a:ea typeface="Malgun Gothic" pitchFamily="34" charset="-122"/>
-                <a:cs typeface="Malgun Gothic" pitchFamily="34" charset="-120"/>
-              </a:rPr>
-              <a:t>WebSocket 핸드셰이크</a:t>
+          <p:cNvPr id="14" name="Shape 11"/>
+          <p:cNvSpPr/>
+          <p:nvPr/>
+        </p:nvSpPr>
+        <p:spPr>
+          <a:xfrm>
+            <a:off x="7463333" y="3383280"/>
+            <a:ext cx="118872" cy="118872"/>
+          </a:xfrm>
+          <a:prstGeom prst="ellipse">
+            <a:avLst/>
+          </a:prstGeom>
+          <a:solidFill>
+            <a:srgbClr val="4F6EF1"/>
+          </a:solidFill>
+          <a:ln/>
+        </p:spPr>
+      </p:sp>
+      <p:sp>
+        <p:nvSpPr>
+          <p:cNvPr id="15" name="Text 12"/>
+          <p:cNvSpPr/>
+          <p:nvPr/>
+        </p:nvSpPr>
+        <p:spPr>
+          <a:xfrm>
+            <a:off x="7616952" y="3319272"/>
+            <a:ext cx="4023360" cy="256032"/>
+          </a:xfrm>
+          <a:prstGeom prst="rect">
+            <a:avLst/>
+          </a:prstGeom>
+          <a:noFill/>
+          <a:ln/>
+        </p:spPr>
+        <p:txBody>
+          <a:bodyPr wrap="square" rtlCol="0" anchor="ctr"/>
+          <a:lstStyle/>
+          <a:p>
+            <a:pPr indent="0" marL="0">
+              <a:buNone/>
+            </a:pPr>
+            <a:r>
+              <a:rPr lang="en-US" sz="1000" b="1" dirty="0">
+                <a:solidFill>
+                  <a:srgbClr val="4F6EF1"/>
+                </a:solidFill>
+                <a:latin typeface="Malgun Gothic" pitchFamily="34" charset="0"/>
+                <a:ea typeface="Malgun Gothic" pitchFamily="34" charset="-122"/>
+                <a:cs typeface="Malgun Gothic" pitchFamily="34" charset="-120"/>
+              </a:rPr>
+              <a:t>생산자-소비자로 루프 분리</a:t>
             </a:r>
             <a:endParaRPr lang="en-US" sz="1000" dirty="0"/>
           </a:p>
@@ -6421,61 +6631,195 @@
       </p:sp>
       <p:sp>
         <p:nvSpPr>
-          <p:cNvPr id="16" name="Text 14"/>
-          <p:cNvSpPr/>
-          <p:nvPr/>
-        </p:nvSpPr>
-        <p:spPr>
-          <a:xfrm>
-            <a:off x="4409237" y="3429000"/>
-            <a:ext cx="3429000" cy="658368"/>
-          </a:xfrm>
-          <a:prstGeom prst="rect">
-            <a:avLst/>
-          </a:prstGeom>
-          <a:noFill/>
-          <a:ln/>
-        </p:spPr>
-        <p:txBody>
-          <a:bodyPr wrap="square" rtlCol="0" anchor="ctr"/>
-          <a:lstStyle/>
-          <a:p>
-            <a:pPr indent="0" marL="0">
-              <a:lnSpc>
-                <a:spcPct val="150000"/>
-              </a:lnSpc>
-              <a:buNone/>
-            </a:pPr>
-            <a:r>
-              <a:rPr lang="en-US" sz="1000" dirty="0">
-                <a:solidFill>
-                  <a:srgbClr val="45515E"/>
-                </a:solidFill>
-                <a:latin typeface="Malgun Gothic" pitchFamily="34" charset="0"/>
-                <a:ea typeface="Malgun Gothic" pitchFamily="34" charset="-122"/>
-                <a:cs typeface="Malgun Gothic" pitchFamily="34" charset="-120"/>
-              </a:rPr>
-              <a:t>socket_token 쿼리 파라미터</a:t>
+          <p:cNvPr id="16" name="Text 13"/>
+          <p:cNvSpPr/>
+          <p:nvPr/>
+        </p:nvSpPr>
+        <p:spPr>
+          <a:xfrm>
+            <a:off x="7616952" y="3575304"/>
+            <a:ext cx="4023360" cy="256032"/>
+          </a:xfrm>
+          <a:prstGeom prst="rect">
+            <a:avLst/>
+          </a:prstGeom>
+          <a:noFill/>
+          <a:ln/>
+        </p:spPr>
+        <p:txBody>
+          <a:bodyPr wrap="square" rtlCol="0" anchor="ctr"/>
+          <a:lstStyle/>
+          <a:p>
+            <a:pPr indent="0" marL="0">
+              <a:buNone/>
+            </a:pPr>
+            <a:r>
+              <a:rPr lang="en-US" sz="900" dirty="0">
+                <a:solidFill>
+                  <a:srgbClr val="8E8E93"/>
+                </a:solidFill>
+                <a:latin typeface="Malgun Gothic" pitchFamily="34" charset="0"/>
+                <a:ea typeface="Malgun Gothic" pitchFamily="34" charset="-122"/>
+                <a:cs typeface="Malgun Gothic" pitchFamily="34" charset="-120"/>
+              </a:rPr>
+              <a:t>렌더와 인코딩이 서로 방해하지 않음</a:t>
+            </a:r>
+            <a:endParaRPr lang="en-US" sz="900" dirty="0"/>
+          </a:p>
+        </p:txBody>
+      </p:sp>
+      <p:sp>
+        <p:nvSpPr>
+          <p:cNvPr id="17" name="Shape 14"/>
+          <p:cNvSpPr/>
+          <p:nvPr/>
+        </p:nvSpPr>
+        <p:spPr>
+          <a:xfrm>
+            <a:off x="7463333" y="4078224"/>
+            <a:ext cx="118872" cy="118872"/>
+          </a:xfrm>
+          <a:prstGeom prst="ellipse">
+            <a:avLst/>
+          </a:prstGeom>
+          <a:solidFill>
+            <a:srgbClr val="4F6EF1"/>
+          </a:solidFill>
+          <a:ln/>
+        </p:spPr>
+      </p:sp>
+      <p:sp>
+        <p:nvSpPr>
+          <p:cNvPr id="18" name="Text 15"/>
+          <p:cNvSpPr/>
+          <p:nvPr/>
+        </p:nvSpPr>
+        <p:spPr>
+          <a:xfrm>
+            <a:off x="7616952" y="4014216"/>
+            <a:ext cx="4023360" cy="256032"/>
+          </a:xfrm>
+          <a:prstGeom prst="rect">
+            <a:avLst/>
+          </a:prstGeom>
+          <a:noFill/>
+          <a:ln/>
+        </p:spPr>
+        <p:txBody>
+          <a:bodyPr wrap="square" rtlCol="0" anchor="ctr"/>
+          <a:lstStyle/>
+          <a:p>
+            <a:pPr indent="0" marL="0">
+              <a:buNone/>
+            </a:pPr>
+            <a:r>
+              <a:rPr lang="en-US" sz="1000" b="1" dirty="0">
+                <a:solidFill>
+                  <a:srgbClr val="4F6EF1"/>
+                </a:solidFill>
+                <a:latin typeface="Malgun Gothic" pitchFamily="34" charset="0"/>
+                <a:ea typeface="Malgun Gothic" pitchFamily="34" charset="-122"/>
+                <a:cs typeface="Malgun Gothic" pitchFamily="34" charset="-120"/>
+              </a:rPr>
+              <a:t>멀티 워커로 인코딩 분산</a:t>
             </a:r>
             <a:endParaRPr lang="en-US" sz="1000" dirty="0"/>
           </a:p>
-          <a:p>
-            <a:pPr indent="0" marL="0">
-              <a:lnSpc>
-                <a:spcPct val="150000"/>
-              </a:lnSpc>
-              <a:buNone/>
-            </a:pPr>
-            <a:r>
-              <a:rPr lang="en-US" sz="1000" dirty="0">
-                <a:solidFill>
-                  <a:srgbClr val="45515E"/>
-                </a:solidFill>
-                <a:latin typeface="Malgun Gothic" pitchFamily="34" charset="0"/>
-                <a:ea typeface="Malgun Gothic" pitchFamily="34" charset="-122"/>
-                <a:cs typeface="Malgun Gothic" pitchFamily="34" charset="-120"/>
-              </a:rPr>
-              <a:t>짧은 TTL로 노출 위험 최소화</a:t>
+        </p:txBody>
+      </p:sp>
+      <p:sp>
+        <p:nvSpPr>
+          <p:cNvPr id="19" name="Text 16"/>
+          <p:cNvSpPr/>
+          <p:nvPr/>
+        </p:nvSpPr>
+        <p:spPr>
+          <a:xfrm>
+            <a:off x="7616952" y="4270248"/>
+            <a:ext cx="4023360" cy="256032"/>
+          </a:xfrm>
+          <a:prstGeom prst="rect">
+            <a:avLst/>
+          </a:prstGeom>
+          <a:noFill/>
+          <a:ln/>
+        </p:spPr>
+        <p:txBody>
+          <a:bodyPr wrap="square" rtlCol="0" anchor="ctr"/>
+          <a:lstStyle/>
+          <a:p>
+            <a:pPr indent="0" marL="0">
+              <a:buNone/>
+            </a:pPr>
+            <a:r>
+              <a:rPr lang="en-US" sz="900" dirty="0">
+                <a:solidFill>
+                  <a:srgbClr val="8E8E93"/>
+                </a:solidFill>
+                <a:latin typeface="Malgun Gothic" pitchFamily="34" charset="0"/>
+                <a:ea typeface="Malgun Gothic" pitchFamily="34" charset="-122"/>
+                <a:cs typeface="Malgun Gothic" pitchFamily="34" charset="-120"/>
+              </a:rPr>
+              <a:t>압축 부하를 워커에 나눔</a:t>
+            </a:r>
+            <a:endParaRPr lang="en-US" sz="900" dirty="0"/>
+          </a:p>
+        </p:txBody>
+      </p:sp>
+      <p:sp>
+        <p:nvSpPr>
+          <p:cNvPr id="20" name="Shape 17"/>
+          <p:cNvSpPr/>
+          <p:nvPr/>
+        </p:nvSpPr>
+        <p:spPr>
+          <a:xfrm>
+            <a:off x="7463333" y="4773168"/>
+            <a:ext cx="118872" cy="118872"/>
+          </a:xfrm>
+          <a:prstGeom prst="ellipse">
+            <a:avLst/>
+          </a:prstGeom>
+          <a:solidFill>
+            <a:srgbClr val="4F6EF1"/>
+          </a:solidFill>
+          <a:ln/>
+        </p:spPr>
+      </p:sp>
+      <p:sp>
+        <p:nvSpPr>
+          <p:cNvPr id="21" name="Text 18"/>
+          <p:cNvSpPr/>
+          <p:nvPr/>
+        </p:nvSpPr>
+        <p:spPr>
+          <a:xfrm>
+            <a:off x="7616952" y="4709160"/>
+            <a:ext cx="4023360" cy="256032"/>
+          </a:xfrm>
+          <a:prstGeom prst="rect">
+            <a:avLst/>
+          </a:prstGeom>
+          <a:noFill/>
+          <a:ln/>
+        </p:spPr>
+        <p:txBody>
+          <a:bodyPr wrap="square" rtlCol="0" anchor="ctr"/>
+          <a:lstStyle/>
+          <a:p>
+            <a:pPr indent="0" marL="0">
+              <a:buNone/>
+            </a:pPr>
+            <a:r>
+              <a:rPr lang="en-US" sz="1000" b="1" dirty="0">
+                <a:solidFill>
+                  <a:srgbClr val="4F6EF1"/>
+                </a:solidFill>
+                <a:latin typeface="Malgun Gothic" pitchFamily="34" charset="0"/>
+                <a:ea typeface="Malgun Gothic" pitchFamily="34" charset="-122"/>
+                <a:cs typeface="Malgun Gothic" pitchFamily="34" charset="-120"/>
+              </a:rPr>
+              <a:t>iGPU 환경에서 더 큰 개선 확인</a:t>
             </a:r>
             <a:endParaRPr lang="en-US" sz="1000" dirty="0"/>
           </a:p>
@@ -6483,104 +6827,38 @@
       </p:sp>
       <p:sp>
         <p:nvSpPr>
-          <p:cNvPr id="17" name="Text 15"/>
-          <p:cNvSpPr/>
-          <p:nvPr/>
-        </p:nvSpPr>
-        <p:spPr>
-          <a:xfrm>
-            <a:off x="8158277" y="2377440"/>
-            <a:ext cx="3429000" cy="292608"/>
-          </a:xfrm>
-          <a:prstGeom prst="rect">
-            <a:avLst/>
-          </a:prstGeom>
-          <a:noFill/>
-          <a:ln/>
-        </p:spPr>
-        <p:txBody>
-          <a:bodyPr wrap="square" rtlCol="0" anchor="ctr"/>
-          <a:lstStyle/>
-          <a:p>
-            <a:pPr indent="0" marL="0">
-              <a:buNone/>
-            </a:pPr>
-            <a:r>
-              <a:rPr lang="en-US" sz="1000" b="1" dirty="0">
-                <a:solidFill>
-                  <a:srgbClr val="45515E"/>
-                </a:solidFill>
-                <a:latin typeface="Malgun Gothic" pitchFamily="34" charset="0"/>
-                <a:ea typeface="Malgun Gothic" pitchFamily="34" charset="-122"/>
-                <a:cs typeface="Malgun Gothic" pitchFamily="34" charset="-120"/>
-              </a:rPr>
-              <a:t>REFRESH TOKEN</a:t>
-            </a:r>
-            <a:endParaRPr lang="en-US" sz="1000" dirty="0"/>
-          </a:p>
-        </p:txBody>
-      </p:sp>
-      <p:sp>
-        <p:nvSpPr>
-          <p:cNvPr id="18" name="Shape 16"/>
-          <p:cNvSpPr/>
-          <p:nvPr/>
-        </p:nvSpPr>
-        <p:spPr>
-          <a:xfrm>
-            <a:off x="8158277" y="2743200"/>
-            <a:ext cx="777240" cy="256032"/>
-          </a:xfrm>
-          <a:prstGeom prst="roundRect">
-            <a:avLst>
-              <a:gd name="adj" fmla="val 17857"/>
-            </a:avLst>
-          </a:prstGeom>
-          <a:solidFill>
-            <a:srgbClr val="F0F0F0"/>
-          </a:solidFill>
-          <a:ln w="12700">
-            <a:solidFill>
-              <a:srgbClr val="EDEEF0"/>
-            </a:solidFill>
-            <a:prstDash val="solid"/>
-          </a:ln>
-        </p:spPr>
-      </p:sp>
-      <p:sp>
-        <p:nvSpPr>
-          <p:cNvPr id="19" name="Text 17"/>
-          <p:cNvSpPr/>
-          <p:nvPr/>
-        </p:nvSpPr>
-        <p:spPr>
-          <a:xfrm>
-            <a:off x="8158277" y="2743200"/>
-            <a:ext cx="777240" cy="256032"/>
-          </a:xfrm>
-          <a:prstGeom prst="rect">
-            <a:avLst/>
-          </a:prstGeom>
-          <a:noFill/>
-          <a:ln/>
-        </p:spPr>
-        <p:txBody>
-          <a:bodyPr wrap="square" rtlCol="0" anchor="ctr"/>
-          <a:lstStyle/>
-          <a:p>
-            <a:pPr algn="ctr" indent="0" marL="0">
-              <a:buNone/>
-            </a:pPr>
-            <a:r>
-              <a:rPr lang="en-US" sz="900" b="1" dirty="0">
-                <a:solidFill>
-                  <a:srgbClr val="45515E"/>
-                </a:solidFill>
-                <a:latin typeface="Malgun Gothic" pitchFamily="34" charset="0"/>
-                <a:ea typeface="Malgun Gothic" pitchFamily="34" charset="-122"/>
-                <a:cs typeface="Malgun Gothic" pitchFamily="34" charset="-120"/>
-              </a:rPr>
-              <a:t>7일</a:t>
+          <p:cNvPr id="22" name="Text 19"/>
+          <p:cNvSpPr/>
+          <p:nvPr/>
+        </p:nvSpPr>
+        <p:spPr>
+          <a:xfrm>
+            <a:off x="7616952" y="4965192"/>
+            <a:ext cx="4023360" cy="256032"/>
+          </a:xfrm>
+          <a:prstGeom prst="rect">
+            <a:avLst/>
+          </a:prstGeom>
+          <a:noFill/>
+          <a:ln/>
+        </p:spPr>
+        <p:txBody>
+          <a:bodyPr wrap="square" rtlCol="0" anchor="ctr"/>
+          <a:lstStyle/>
+          <a:p>
+            <a:pPr indent="0" marL="0">
+              <a:buNone/>
+            </a:pPr>
+            <a:r>
+              <a:rPr lang="en-US" sz="900" dirty="0">
+                <a:solidFill>
+                  <a:srgbClr val="8E8E93"/>
+                </a:solidFill>
+                <a:latin typeface="Malgun Gothic" pitchFamily="34" charset="0"/>
+                <a:ea typeface="Malgun Gothic" pitchFamily="34" charset="-122"/>
+                <a:cs typeface="Malgun Gothic" pitchFamily="34" charset="-120"/>
+              </a:rPr>
+              <a:t>외장 GPU 없는 환경일수록 효과 컸음</a:t>
             </a:r>
             <a:endParaRPr lang="en-US" sz="900" dirty="0"/>
           </a:p>
@@ -6588,147 +6866,7 @@
       </p:sp>
       <p:sp>
         <p:nvSpPr>
-          <p:cNvPr id="20" name="Text 18"/>
-          <p:cNvSpPr/>
-          <p:nvPr/>
-        </p:nvSpPr>
-        <p:spPr>
-          <a:xfrm>
-            <a:off x="8158277" y="3063240"/>
-            <a:ext cx="3429000" cy="274320"/>
-          </a:xfrm>
-          <a:prstGeom prst="rect">
-            <a:avLst/>
-          </a:prstGeom>
-          <a:noFill/>
-          <a:ln/>
-        </p:spPr>
-        <p:txBody>
-          <a:bodyPr wrap="square" rtlCol="0" anchor="ctr"/>
-          <a:lstStyle/>
-          <a:p>
-            <a:pPr indent="0" marL="0">
-              <a:buNone/>
-            </a:pPr>
-            <a:r>
-              <a:rPr lang="en-US" sz="1000" dirty="0">
-                <a:solidFill>
-                  <a:srgbClr val="222222"/>
-                </a:solidFill>
-                <a:latin typeface="Malgun Gothic" pitchFamily="34" charset="0"/>
-                <a:ea typeface="Malgun Gothic" pitchFamily="34" charset="-122"/>
-                <a:cs typeface="Malgun Gothic" pitchFamily="34" charset="-120"/>
-              </a:rPr>
-              <a:t>토큰 갱신 + 재사용 감지</a:t>
-            </a:r>
-            <a:endParaRPr lang="en-US" sz="1000" dirty="0"/>
-          </a:p>
-        </p:txBody>
-      </p:sp>
-      <p:sp>
-        <p:nvSpPr>
-          <p:cNvPr id="21" name="Text 19"/>
-          <p:cNvSpPr/>
-          <p:nvPr/>
-        </p:nvSpPr>
-        <p:spPr>
-          <a:xfrm>
-            <a:off x="8158277" y="3429000"/>
-            <a:ext cx="3429000" cy="658368"/>
-          </a:xfrm>
-          <a:prstGeom prst="rect">
-            <a:avLst/>
-          </a:prstGeom>
-          <a:noFill/>
-          <a:ln/>
-        </p:spPr>
-        <p:txBody>
-          <a:bodyPr wrap="square" rtlCol="0" anchor="ctr"/>
-          <a:lstStyle/>
-          <a:p>
-            <a:pPr indent="0" marL="0">
-              <a:lnSpc>
-                <a:spcPct val="150000"/>
-              </a:lnSpc>
-              <a:buNone/>
-            </a:pPr>
-            <a:r>
-              <a:rPr lang="en-US" sz="1000" dirty="0">
-                <a:solidFill>
-                  <a:srgbClr val="45515E"/>
-                </a:solidFill>
-                <a:latin typeface="Malgun Gothic" pitchFamily="34" charset="0"/>
-                <a:ea typeface="Malgun Gothic" pitchFamily="34" charset="-122"/>
-                <a:cs typeface="Malgun Gothic" pitchFamily="34" charset="-120"/>
-              </a:rPr>
-              <a:t>Redis TTL 저장</a:t>
-            </a:r>
-            <a:endParaRPr lang="en-US" sz="1000" dirty="0"/>
-          </a:p>
-          <a:p>
-            <a:pPr indent="0" marL="0">
-              <a:lnSpc>
-                <a:spcPct val="150000"/>
-              </a:lnSpc>
-              <a:buNone/>
-            </a:pPr>
-            <a:r>
-              <a:rPr lang="en-US" sz="1000" dirty="0">
-                <a:solidFill>
-                  <a:srgbClr val="45515E"/>
-                </a:solidFill>
-                <a:latin typeface="Malgun Gothic" pitchFamily="34" charset="0"/>
-                <a:ea typeface="Malgun Gothic" pitchFamily="34" charset="-122"/>
-                <a:cs typeface="Malgun Gothic" pitchFamily="34" charset="-120"/>
-              </a:rPr>
-              <a:t>재사용 감지 시 전체 세션 무효화</a:t>
-            </a:r>
-            <a:endParaRPr lang="en-US" sz="1000" dirty="0"/>
-          </a:p>
-        </p:txBody>
-      </p:sp>
-      <p:sp>
-        <p:nvSpPr>
-          <p:cNvPr id="22" name="Text 20"/>
-          <p:cNvSpPr/>
-          <p:nvPr/>
-        </p:nvSpPr>
-        <p:spPr>
-          <a:xfrm>
-            <a:off x="660197" y="4919472"/>
-            <a:ext cx="10872216" cy="274320"/>
-          </a:xfrm>
-          <a:prstGeom prst="rect">
-            <a:avLst/>
-          </a:prstGeom>
-          <a:noFill/>
-          <a:ln/>
-        </p:spPr>
-        <p:txBody>
-          <a:bodyPr wrap="square" rtlCol="0" anchor="ctr"/>
-          <a:lstStyle/>
-          <a:p>
-            <a:pPr algn="ctr" indent="0" marL="0">
-              <a:buNone/>
-            </a:pPr>
-            <a:r>
-              <a:rPr lang="en-US" sz="950" dirty="0">
-                <a:solidFill>
-                  <a:srgbClr val="45515E"/>
-                </a:solidFill>
-                <a:latin typeface="Malgun Gothic" pitchFamily="34" charset="0"/>
-                <a:ea typeface="Malgun Gothic" pitchFamily="34" charset="-122"/>
-                <a:cs typeface="Malgun Gothic" pitchFamily="34" charset="-120"/>
-              </a:rPr>
-              <a:t>로그인 → ACCESS + SOCKET + REFRESH 동시 발급  ·  SOCKET은 WebSocket 연결에만 사용·검증</a:t>
-            </a:r>
-            <a:endParaRPr lang="en-US" sz="950" dirty="0"/>
-          </a:p>
-        </p:txBody>
-      </p:sp>
-      <p:sp>
-        <p:nvSpPr>
-          <p:cNvPr id="23" name="Shape 21"/>
+          <p:cNvPr id="23" name="Shape 20"/>
           <p:cNvSpPr/>
           <p:nvPr/>
         </p:nvSpPr>
@@ -6750,7 +6888,7 @@
       </p:sp>
       <p:sp>
         <p:nvSpPr>
-          <p:cNvPr id="24" name="Text 22"/>
+          <p:cNvPr id="24" name="Text 21"/>
           <p:cNvSpPr/>
           <p:nvPr/>
         </p:nvSpPr>
@@ -6781,7 +6919,7 @@
                 <a:ea typeface="Malgun Gothic" pitchFamily="34" charset="-122"/>
                 <a:cs typeface="Malgun Gothic" pitchFamily="34" charset="-120"/>
               </a:rPr>
-              <a:t>WebSocket 연결은 헤더를 못 쓰니 토큰이 URL에 드러납니다. 수명 1분짜리 전용 토큰이 유일한 답입니다.</a:t>
+              <a:t>렌더링 자체가 느린 게 아니었습니다. 렌더와 인코딩이 같은 루프에서 서로 기다리는 구조가 문제였습니다.</a:t>
             </a:r>
             <a:endParaRPr lang="en-US" sz="900" dirty="0"/>
           </a:p>
@@ -6789,7 +6927,7 @@
       </p:sp>
       <p:sp>
         <p:nvSpPr>
-          <p:cNvPr id="25" name="Text 23"/>
+          <p:cNvPr id="25" name="Text 22"/>
           <p:cNvSpPr/>
           <p:nvPr/>
         </p:nvSpPr>
@@ -6820,7 +6958,7 @@
                 <a:ea typeface="Malgun Gothic" pitchFamily="34" charset="-122"/>
                 <a:cs typeface="Malgun Gothic" pitchFamily="34" charset="-120"/>
               </a:rPr>
-              <a:t>Source: AGV 커밋 S14P11A402-163 (2026-01-26)</a:t>
+              <a:t>Source: RobotPal 병목분석.md — 디버그 빌드 b01af42, 릴리즈 빌드 미측정 (2026-04-09)</a:t>
             </a:r>
             <a:endParaRPr lang="en-US" sz="800" dirty="0"/>
           </a:p>
@@ -6828,7 +6966,7 @@
       </p:sp>
       <p:sp>
         <p:nvSpPr>
-          <p:cNvPr id="26" name="Text 24"/>
+          <p:cNvPr id="26" name="Text 23"/>
           <p:cNvSpPr/>
           <p:nvPr/>
         </p:nvSpPr>
@@ -6906,7 +7044,7 @@
         <p:spPr>
           <a:xfrm>
             <a:off x="385877" y="279806"/>
-            <a:ext cx="5029200" cy="245974"/>
+            <a:ext cx="10972800" cy="245974"/>
           </a:xfrm>
           <a:prstGeom prst="rect">
             <a:avLst/>
@@ -6930,7 +7068,7 @@
                 <a:ea typeface="Malgun Gothic" pitchFamily="34" charset="-122"/>
                 <a:cs typeface="Malgun Gothic" pitchFamily="34" charset="-120"/>
               </a:rPr>
-              <a:t>KEY LINE 2 · RobotPal 성능</a:t>
+              <a:t>주요 프로젝트 03 · mausoleum</a:t>
             </a:r>
             <a:endParaRPr lang="en-US" sz="1000" dirty="0"/>
           </a:p>
@@ -6969,7 +7107,7 @@
                 <a:ea typeface="Malgun Gothic" pitchFamily="34" charset="-122"/>
                 <a:cs typeface="Malgun Gothic" pitchFamily="34" charset="-120"/>
               </a:rPr>
-              <a:t>감이 아닌 수치로 — 워커 수 10단계 실측해서 +27% FPS 향상을 확보했다</a:t>
+              <a:t>Alt-Tab 복귀 후 쌓인 음성이 한꺼번에 재생되는 문제, 버퍼 폐기로 해결했다</a:t>
             </a:r>
             <a:endParaRPr lang="en-US" sz="2400" dirty="0"/>
           </a:p>
@@ -7008,7 +7146,7 @@
                 <a:ea typeface="Malgun Gothic" pitchFamily="34" charset="-122"/>
                 <a:cs typeface="Malgun Gothic" pitchFamily="34" charset="-120"/>
               </a:rPr>
-              <a:t>libjpeg-turbo 멀티스레드 인코딩 · PBO 비동기 readback · C++17 OpenGL</a:t>
+              <a:t>Unreal Engine 5 · C++ · 전용 서버 · UDP 음성 서버</a:t>
             </a:r>
             <a:endParaRPr lang="en-US" sz="1200" dirty="0"/>
           </a:p>
@@ -7023,7 +7161,7 @@
         <p:spPr>
           <a:xfrm>
             <a:off x="385877" y="2011680"/>
-            <a:ext cx="6711696" cy="3520440"/>
+            <a:ext cx="4526280" cy="3520440"/>
           </a:xfrm>
           <a:prstGeom prst="roundRect">
             <a:avLst>
@@ -7056,8 +7194,8 @@
         </p:nvSpPr>
         <p:spPr>
           <a:xfrm>
-            <a:off x="7280453" y="2011680"/>
-            <a:ext cx="4526280" cy="3520440"/>
+            <a:off x="5095037" y="2011680"/>
+            <a:ext cx="6711696" cy="3520440"/>
           </a:xfrm>
           <a:prstGeom prst="roundRect">
             <a:avLst>
@@ -7090,8 +7228,8 @@
         </p:nvSpPr>
         <p:spPr>
           <a:xfrm>
-            <a:off x="568757" y="2194560"/>
-            <a:ext cx="6345936" cy="256032"/>
+            <a:off x="568757" y="2240280"/>
+            <a:ext cx="4160520" cy="256032"/>
           </a:xfrm>
           <a:prstGeom prst="rect">
             <a:avLst/>
@@ -7109,60 +7247,310 @@
             <a:r>
               <a:rPr lang="en-US" sz="1000" b="1" dirty="0">
                 <a:solidFill>
+                  <a:srgbClr val="4F6EF1"/>
+                </a:solidFill>
+                <a:latin typeface="Malgun Gothic" pitchFamily="34" charset="0"/>
+                <a:ea typeface="Malgun Gothic" pitchFamily="34" charset="-122"/>
+                <a:cs typeface="Malgun Gothic" pitchFamily="34" charset="-120"/>
+              </a:rPr>
+              <a:t>문제</a:t>
+            </a:r>
+            <a:endParaRPr lang="en-US" sz="1000" dirty="0"/>
+          </a:p>
+        </p:txBody>
+      </p:sp>
+      <p:sp>
+        <p:nvSpPr>
+          <p:cNvPr id="8" name="Text 6"/>
+          <p:cNvSpPr/>
+          <p:nvPr/>
+        </p:nvSpPr>
+        <p:spPr>
+          <a:xfrm>
+            <a:off x="568757" y="2542032"/>
+            <a:ext cx="4160520" cy="1005840"/>
+          </a:xfrm>
+          <a:prstGeom prst="rect">
+            <a:avLst/>
+          </a:prstGeom>
+          <a:noFill/>
+          <a:ln/>
+        </p:spPr>
+        <p:txBody>
+          <a:bodyPr wrap="square" rtlCol="0" anchor="ctr"/>
+          <a:lstStyle/>
+          <a:p>
+            <a:pPr indent="0" marL="0">
+              <a:lnSpc>
+                <a:spcPct val="150000"/>
+              </a:lnSpc>
+              <a:buNone/>
+            </a:pPr>
+            <a:r>
+              <a:rPr lang="en-US" sz="1100" dirty="0">
+                <a:solidFill>
                   <a:srgbClr val="222222"/>
                 </a:solidFill>
                 <a:latin typeface="Malgun Gothic" pitchFamily="34" charset="0"/>
                 <a:ea typeface="Malgun Gothic" pitchFamily="34" charset="-122"/>
                 <a:cs typeface="Malgun Gothic" pitchFamily="34" charset="-120"/>
               </a:rPr>
-              <a:t>인코딩 워커 수 vs APP FPS (816×616)</a:t>
+              <a:t>Alt-Tab 복귀 직후 대기 중 누적된</a:t>
+            </a:r>
+            <a:endParaRPr lang="en-US" sz="1100" dirty="0"/>
+          </a:p>
+          <a:p>
+            <a:pPr indent="0" marL="0">
+              <a:lnSpc>
+                <a:spcPct val="150000"/>
+              </a:lnSpc>
+              <a:buNone/>
+            </a:pPr>
+            <a:r>
+              <a:rPr lang="en-US" sz="1100" dirty="0">
+                <a:solidFill>
+                  <a:srgbClr val="222222"/>
+                </a:solidFill>
+                <a:latin typeface="Malgun Gothic" pitchFamily="34" charset="0"/>
+                <a:ea typeface="Malgun Gothic" pitchFamily="34" charset="-122"/>
+                <a:cs typeface="Malgun Gothic" pitchFamily="34" charset="-120"/>
+              </a:rPr>
+              <a:t>음성 버퍼가 한꺼번에 재생 →</a:t>
+            </a:r>
+            <a:endParaRPr lang="en-US" sz="1100" dirty="0"/>
+          </a:p>
+          <a:p>
+            <a:pPr indent="0" marL="0">
+              <a:lnSpc>
+                <a:spcPct val="150000"/>
+              </a:lnSpc>
+              <a:buNone/>
+            </a:pPr>
+            <a:r>
+              <a:rPr lang="en-US" sz="1100" dirty="0">
+                <a:solidFill>
+                  <a:srgbClr val="222222"/>
+                </a:solidFill>
+                <a:latin typeface="Malgun Gothic" pitchFamily="34" charset="0"/>
+                <a:ea typeface="Malgun Gothic" pitchFamily="34" charset="-122"/>
+                <a:cs typeface="Malgun Gothic" pitchFamily="34" charset="-120"/>
+              </a:rPr>
+              <a:t>잡음 섞인 음성이 한꺼번에 쏟아짐.</a:t>
+            </a:r>
+            <a:endParaRPr lang="en-US" sz="1100" dirty="0"/>
+          </a:p>
+        </p:txBody>
+      </p:sp>
+      <p:sp>
+        <p:nvSpPr>
+          <p:cNvPr id="9" name="Text 7"/>
+          <p:cNvSpPr/>
+          <p:nvPr/>
+        </p:nvSpPr>
+        <p:spPr>
+          <a:xfrm>
+            <a:off x="568757" y="3611880"/>
+            <a:ext cx="4160520" cy="256032"/>
+          </a:xfrm>
+          <a:prstGeom prst="rect">
+            <a:avLst/>
+          </a:prstGeom>
+          <a:noFill/>
+          <a:ln/>
+        </p:spPr>
+        <p:txBody>
+          <a:bodyPr wrap="square" rtlCol="0" anchor="ctr"/>
+          <a:lstStyle/>
+          <a:p>
+            <a:pPr indent="0" marL="0">
+              <a:buNone/>
+            </a:pPr>
+            <a:r>
+              <a:rPr lang="en-US" sz="1000" b="1" dirty="0">
+                <a:solidFill>
+                  <a:srgbClr val="45515E"/>
+                </a:solidFill>
+                <a:latin typeface="Malgun Gothic" pitchFamily="34" charset="0"/>
+                <a:ea typeface="Malgun Gothic" pitchFamily="34" charset="-122"/>
+                <a:cs typeface="Malgun Gothic" pitchFamily="34" charset="-120"/>
+              </a:rPr>
+              <a:t>추가로 해결한 문제</a:t>
             </a:r>
             <a:endParaRPr lang="en-US" sz="1000" dirty="0"/>
           </a:p>
         </p:txBody>
       </p:sp>
-      <p:graphicFrame>
-        <p:nvGraphicFramePr>
-          <p:cNvPr id="8" name="Chart 0" descr=""/>
-          <p:cNvGraphicFramePr/>
-          <p:nvPr/>
-        </p:nvGraphicFramePr>
-        <p:xfrm>
-          <a:off x="568757" y="2487168"/>
-          <a:ext cx="6345936" cy="2697480"/>
-        </p:xfrm>
-        <a:graphic xmlns:a="http://schemas.openxmlformats.org/drawingml/2006/main">
-          <a:graphicData uri="http://schemas.openxmlformats.org/drawingml/2006/chart">
-            <c:chart xmlns:c="http://schemas.openxmlformats.org/drawingml/2006/chart" r:id="rId1"/>
-          </a:graphicData>
-        </a:graphic>
-      </p:graphicFrame>
-      <p:sp>
-        <p:nvSpPr>
-          <p:cNvPr id="9" name="Text 6"/>
-          <p:cNvSpPr/>
-          <p:nvPr/>
-        </p:nvSpPr>
-        <p:spPr>
-          <a:xfrm>
-            <a:off x="660197" y="5230368"/>
-            <a:ext cx="2743200" cy="274320"/>
-          </a:xfrm>
-          <a:prstGeom prst="rect">
-            <a:avLst/>
-          </a:prstGeom>
-          <a:noFill/>
-          <a:ln/>
-        </p:spPr>
-        <p:txBody>
-          <a:bodyPr wrap="square" rtlCol="0" anchor="ctr"/>
-          <a:lstStyle/>
-          <a:p>
-            <a:pPr indent="0" marL="0">
-              <a:buNone/>
-            </a:pPr>
-            <a:r>
-              <a:rPr lang="en-US" sz="1100" b="1" dirty="0">
+      <p:sp>
+        <p:nvSpPr>
+          <p:cNvPr id="10" name="Text 8"/>
+          <p:cNvSpPr/>
+          <p:nvPr/>
+        </p:nvSpPr>
+        <p:spPr>
+          <a:xfrm>
+            <a:off x="568757" y="3895344"/>
+            <a:ext cx="4160520" cy="1371600"/>
+          </a:xfrm>
+          <a:prstGeom prst="rect">
+            <a:avLst/>
+          </a:prstGeom>
+          <a:noFill/>
+          <a:ln/>
+        </p:spPr>
+        <p:txBody>
+          <a:bodyPr wrap="square" rtlCol="0" anchor="ctr"/>
+          <a:lstStyle/>
+          <a:p>
+            <a:pPr indent="0" marL="0">
+              <a:lnSpc>
+                <a:spcPct val="150000"/>
+              </a:lnSpc>
+              <a:buNone/>
+            </a:pPr>
+            <a:r>
+              <a:rPr lang="en-US" sz="1050" dirty="0">
+                <a:solidFill>
+                  <a:srgbClr val="222222"/>
+                </a:solidFill>
+                <a:latin typeface="Malgun Gothic" pitchFamily="34" charset="0"/>
+                <a:ea typeface="Malgun Gothic" pitchFamily="34" charset="-122"/>
+                <a:cs typeface="Malgun Gothic" pitchFamily="34" charset="-120"/>
+              </a:rPr>
+              <a:t>사망자/생존자/관전자 청취 권한 미분리</a:t>
+            </a:r>
+            <a:endParaRPr lang="en-US" sz="1050" dirty="0"/>
+          </a:p>
+          <a:p>
+            <a:pPr indent="0" marL="0">
+              <a:lnSpc>
+                <a:spcPct val="150000"/>
+              </a:lnSpc>
+              <a:buNone/>
+            </a:pPr>
+            <a:r>
+              <a:rPr lang="en-US" sz="1050" dirty="0">
+                <a:solidFill>
+                  <a:srgbClr val="222222"/>
+                </a:solidFill>
+                <a:latin typeface="Malgun Gothic" pitchFamily="34" charset="0"/>
+                <a:ea typeface="Malgun Gothic" pitchFamily="34" charset="-122"/>
+                <a:cs typeface="Malgun Gothic" pitchFamily="34" charset="-120"/>
+              </a:rPr>
+              <a:t>→ 사망 후에도 생존자 정보 노출.</a:t>
+            </a:r>
+            <a:endParaRPr lang="en-US" sz="1050" dirty="0"/>
+          </a:p>
+          <a:p>
+            <a:pPr indent="0" marL="0">
+              <a:lnSpc>
+                <a:spcPct val="150000"/>
+              </a:lnSpc>
+              <a:buNone/>
+            </a:pPr>
+            <a:endParaRPr lang="en-US" sz="1050" dirty="0"/>
+          </a:p>
+          <a:p>
+            <a:pPr indent="0" marL="0">
+              <a:lnSpc>
+                <a:spcPct val="150000"/>
+              </a:lnSpc>
+              <a:buNone/>
+            </a:pPr>
+            <a:r>
+              <a:rPr lang="en-US" sz="1050" dirty="0">
+                <a:solidFill>
+                  <a:srgbClr val="222222"/>
+                </a:solidFill>
+                <a:latin typeface="Malgun Gothic" pitchFamily="34" charset="0"/>
+                <a:ea typeface="Malgun Gothic" pitchFamily="34" charset="-122"/>
+                <a:cs typeface="Malgun Gothic" pitchFamily="34" charset="-120"/>
+              </a:rPr>
+              <a:t>게임 세션 생명주기를 대기/인게임</a:t>
+            </a:r>
+            <a:endParaRPr lang="en-US" sz="1050" dirty="0"/>
+          </a:p>
+          <a:p>
+            <a:pPr indent="0" marL="0">
+              <a:lnSpc>
+                <a:spcPct val="150000"/>
+              </a:lnSpc>
+              <a:buNone/>
+            </a:pPr>
+            <a:r>
+              <a:rPr lang="en-US" sz="1050" dirty="0">
+                <a:solidFill>
+                  <a:srgbClr val="222222"/>
+                </a:solidFill>
+                <a:latin typeface="Malgun Gothic" pitchFamily="34" charset="0"/>
+                <a:ea typeface="Malgun Gothic" pitchFamily="34" charset="-122"/>
+                <a:cs typeface="Malgun Gothic" pitchFamily="34" charset="-120"/>
+              </a:rPr>
+              <a:t>단계로 분리 → 상태 충돌 감소.</a:t>
+            </a:r>
+            <a:endParaRPr lang="en-US" sz="1050" dirty="0"/>
+          </a:p>
+        </p:txBody>
+      </p:sp>
+      <p:sp>
+        <p:nvSpPr>
+          <p:cNvPr id="11" name="Shape 9"/>
+          <p:cNvSpPr/>
+          <p:nvPr/>
+        </p:nvSpPr>
+        <p:spPr>
+          <a:xfrm>
+            <a:off x="5113325" y="2029968"/>
+            <a:ext cx="6675120" cy="1463040"/>
+          </a:xfrm>
+          <a:prstGeom prst="roundRect">
+            <a:avLst>
+              <a:gd name="adj" fmla="val 8750"/>
+            </a:avLst>
+          </a:prstGeom>
+          <a:solidFill>
+            <a:srgbClr val="F8F9FF"/>
+          </a:solidFill>
+          <a:ln w="17780">
+            <a:solidFill>
+              <a:srgbClr val="A8B7F8"/>
+            </a:solidFill>
+            <a:prstDash val="solid"/>
+          </a:ln>
+          <a:effectLst>
+            <a:outerShdw sx="100000" sy="100000" kx="0" ky="0" algn="bl" rotWithShape="0" blurRad="190500" dist="50800" dir="5400000">
+              <a:srgbClr val="4F6EF1">
+                <a:alpha val="20000"/>
+              </a:srgbClr>
+            </a:outerShdw>
+          </a:effectLst>
+        </p:spPr>
+      </p:sp>
+      <p:sp>
+        <p:nvSpPr>
+          <p:cNvPr id="12" name="Text 10"/>
+          <p:cNvSpPr/>
+          <p:nvPr/>
+        </p:nvSpPr>
+        <p:spPr>
+          <a:xfrm>
+            <a:off x="5277917" y="2121408"/>
+            <a:ext cx="6400800" cy="256032"/>
+          </a:xfrm>
+          <a:prstGeom prst="rect">
+            <a:avLst/>
+          </a:prstGeom>
+          <a:noFill/>
+          <a:ln/>
+        </p:spPr>
+        <p:txBody>
+          <a:bodyPr wrap="square" rtlCol="0" anchor="ctr"/>
+          <a:lstStyle/>
+          <a:p>
+            <a:pPr indent="0" marL="0">
+              <a:buNone/>
+            </a:pPr>
+            <a:r>
+              <a:rPr lang="en-US" sz="1000" b="1" dirty="0">
                 <a:solidFill>
                   <a:srgbClr val="4F6EF1"/>
                 </a:solidFill>
@@ -7170,38 +7558,120 @@
                 <a:ea typeface="Malgun Gothic" pitchFamily="34" charset="-122"/>
                 <a:cs typeface="Malgun Gothic" pitchFamily="34" charset="-120"/>
               </a:rPr>
-              <a:t>+27.2%</a:t>
+              <a:t>해결 1 — 버퍼 폐기 + 코덱 리셋</a:t>
+            </a:r>
+            <a:endParaRPr lang="en-US" sz="1000" dirty="0"/>
+          </a:p>
+        </p:txBody>
+      </p:sp>
+      <p:sp>
+        <p:nvSpPr>
+          <p:cNvPr id="13" name="Text 11"/>
+          <p:cNvSpPr/>
+          <p:nvPr/>
+        </p:nvSpPr>
+        <p:spPr>
+          <a:xfrm>
+            <a:off x="5277917" y="2404872"/>
+            <a:ext cx="6309360" cy="731520"/>
+          </a:xfrm>
+          <a:prstGeom prst="rect">
+            <a:avLst/>
+          </a:prstGeom>
+          <a:noFill/>
+          <a:ln/>
+        </p:spPr>
+        <p:txBody>
+          <a:bodyPr wrap="square" rtlCol="0" anchor="ctr"/>
+          <a:lstStyle/>
+          <a:p>
+            <a:pPr indent="0" marL="0">
+              <a:lnSpc>
+                <a:spcPct val="150000"/>
+              </a:lnSpc>
+              <a:buNone/>
+            </a:pPr>
+            <a:r>
+              <a:rPr lang="en-US" sz="1100" dirty="0">
+                <a:solidFill>
+                  <a:srgbClr val="222222"/>
+                </a:solidFill>
+                <a:latin typeface="Malgun Gothic" pitchFamily="34" charset="0"/>
+                <a:ea typeface="Malgun Gothic" pitchFamily="34" charset="-122"/>
+                <a:cs typeface="Malgun Gothic" pitchFamily="34" charset="-120"/>
+              </a:rPr>
+              <a:t>백그라운드 복귀 시 누적된 캡처 버퍼</a:t>
             </a:r>
             <a:endParaRPr lang="en-US" sz="1100" dirty="0"/>
           </a:p>
-        </p:txBody>
-      </p:sp>
-      <p:sp>
-        <p:nvSpPr>
-          <p:cNvPr id="10" name="Text 7"/>
-          <p:cNvSpPr/>
-          <p:nvPr/>
-        </p:nvSpPr>
-        <p:spPr>
-          <a:xfrm>
-            <a:off x="3218688" y="5230368"/>
-            <a:ext cx="2743200" cy="274320"/>
-          </a:xfrm>
-          <a:prstGeom prst="rect">
-            <a:avLst/>
-          </a:prstGeom>
-          <a:noFill/>
-          <a:ln/>
-        </p:spPr>
-        <p:txBody>
-          <a:bodyPr wrap="square" rtlCol="0" anchor="ctr"/>
-          <a:lstStyle/>
-          <a:p>
-            <a:pPr indent="0" marL="0">
-              <a:buNone/>
-            </a:pPr>
-            <a:r>
-              <a:rPr lang="en-US" sz="1000" dirty="0">
+          <a:p>
+            <a:pPr indent="0" marL="0">
+              <a:lnSpc>
+                <a:spcPct val="150000"/>
+              </a:lnSpc>
+              <a:buNone/>
+            </a:pPr>
+            <a:r>
+              <a:rPr lang="en-US" sz="1100" dirty="0">
+                <a:solidFill>
+                  <a:srgbClr val="222222"/>
+                </a:solidFill>
+                <a:latin typeface="Malgun Gothic" pitchFamily="34" charset="0"/>
+                <a:ea typeface="Malgun Gothic" pitchFamily="34" charset="-122"/>
+                <a:cs typeface="Malgun Gothic" pitchFamily="34" charset="-120"/>
+              </a:rPr>
+              <a:t>폐기 + 코덱 리셋 → 복귀 직후</a:t>
+            </a:r>
+            <a:endParaRPr lang="en-US" sz="1100" dirty="0"/>
+          </a:p>
+          <a:p>
+            <a:pPr indent="0" marL="0">
+              <a:lnSpc>
+                <a:spcPct val="150000"/>
+              </a:lnSpc>
+              <a:buNone/>
+            </a:pPr>
+            <a:r>
+              <a:rPr lang="en-US" sz="1100" dirty="0">
+                <a:solidFill>
+                  <a:srgbClr val="222222"/>
+                </a:solidFill>
+                <a:latin typeface="Malgun Gothic" pitchFamily="34" charset="0"/>
+                <a:ea typeface="Malgun Gothic" pitchFamily="34" charset="-122"/>
+                <a:cs typeface="Malgun Gothic" pitchFamily="34" charset="-120"/>
+              </a:rPr>
+              <a:t>한꺼번에 재생되는 현상 제거.</a:t>
+            </a:r>
+            <a:endParaRPr lang="en-US" sz="1100" dirty="0"/>
+          </a:p>
+        </p:txBody>
+      </p:sp>
+      <p:sp>
+        <p:nvSpPr>
+          <p:cNvPr id="14" name="Text 12"/>
+          <p:cNvSpPr/>
+          <p:nvPr/>
+        </p:nvSpPr>
+        <p:spPr>
+          <a:xfrm>
+            <a:off x="5277917" y="3657600"/>
+            <a:ext cx="6400800" cy="256032"/>
+          </a:xfrm>
+          <a:prstGeom prst="rect">
+            <a:avLst/>
+          </a:prstGeom>
+          <a:noFill/>
+          <a:ln/>
+        </p:spPr>
+        <p:txBody>
+          <a:bodyPr wrap="square" rtlCol="0" anchor="ctr"/>
+          <a:lstStyle/>
+          <a:p>
+            <a:pPr indent="0" marL="0">
+              <a:buNone/>
+            </a:pPr>
+            <a:r>
+              <a:rPr lang="en-US" sz="1000" b="1" dirty="0">
                 <a:solidFill>
                   <a:srgbClr val="45515E"/>
                 </a:solidFill>
@@ -7209,7 +7679,7 @@
                 <a:ea typeface="Malgun Gothic" pitchFamily="34" charset="-122"/>
                 <a:cs typeface="Malgun Gothic" pitchFamily="34" charset="-120"/>
               </a:rPr>
-              <a:t>(Single → W12)</a:t>
+              <a:t>해결 2 — 상태별 청취 규칙 분리</a:t>
             </a:r>
             <a:endParaRPr lang="en-US" sz="1000" dirty="0"/>
           </a:p>
@@ -7217,14 +7687,96 @@
       </p:sp>
       <p:sp>
         <p:nvSpPr>
-          <p:cNvPr id="11" name="Text 8"/>
-          <p:cNvSpPr/>
-          <p:nvPr/>
-        </p:nvSpPr>
-        <p:spPr>
-          <a:xfrm>
-            <a:off x="7463333" y="2240280"/>
-            <a:ext cx="4160520" cy="256032"/>
+          <p:cNvPr id="15" name="Text 13"/>
+          <p:cNvSpPr/>
+          <p:nvPr/>
+        </p:nvSpPr>
+        <p:spPr>
+          <a:xfrm>
+            <a:off x="5277917" y="3931920"/>
+            <a:ext cx="6309360" cy="685800"/>
+          </a:xfrm>
+          <a:prstGeom prst="rect">
+            <a:avLst/>
+          </a:prstGeom>
+          <a:noFill/>
+          <a:ln/>
+        </p:spPr>
+        <p:txBody>
+          <a:bodyPr wrap="square" rtlCol="0" anchor="ctr"/>
+          <a:lstStyle/>
+          <a:p>
+            <a:pPr indent="0" marL="0">
+              <a:lnSpc>
+                <a:spcPct val="150000"/>
+              </a:lnSpc>
+              <a:buNone/>
+            </a:pPr>
+            <a:r>
+              <a:rPr lang="en-US" sz="1100" dirty="0">
+                <a:solidFill>
+                  <a:srgbClr val="222222"/>
+                </a:solidFill>
+                <a:latin typeface="Malgun Gothic" pitchFamily="34" charset="0"/>
+                <a:ea typeface="Malgun Gothic" pitchFamily="34" charset="-122"/>
+                <a:cs typeface="Malgun Gothic" pitchFamily="34" charset="-120"/>
+              </a:rPr>
+              <a:t>생존/사망/관전 상태에 따라 수신</a:t>
+            </a:r>
+            <a:endParaRPr lang="en-US" sz="1100" dirty="0"/>
+          </a:p>
+          <a:p>
+            <a:pPr indent="0" marL="0">
+              <a:lnSpc>
+                <a:spcPct val="150000"/>
+              </a:lnSpc>
+              <a:buNone/>
+            </a:pPr>
+            <a:r>
+              <a:rPr lang="en-US" sz="1100" dirty="0">
+                <a:solidFill>
+                  <a:srgbClr val="222222"/>
+                </a:solidFill>
+                <a:latin typeface="Malgun Gothic" pitchFamily="34" charset="0"/>
+                <a:ea typeface="Malgun Gothic" pitchFamily="34" charset="-122"/>
+                <a:cs typeface="Malgun Gothic" pitchFamily="34" charset="-120"/>
+              </a:rPr>
+              <a:t>가능한 음성 채널을 별도 분리 →</a:t>
+            </a:r>
+            <a:endParaRPr lang="en-US" sz="1100" dirty="0"/>
+          </a:p>
+          <a:p>
+            <a:pPr indent="0" marL="0">
+              <a:lnSpc>
+                <a:spcPct val="150000"/>
+              </a:lnSpc>
+              <a:buNone/>
+            </a:pPr>
+            <a:r>
+              <a:rPr lang="en-US" sz="1100" dirty="0">
+                <a:solidFill>
+                  <a:srgbClr val="222222"/>
+                </a:solidFill>
+                <a:latin typeface="Malgun Gothic" pitchFamily="34" charset="0"/>
+                <a:ea typeface="Malgun Gothic" pitchFamily="34" charset="-122"/>
+                <a:cs typeface="Malgun Gothic" pitchFamily="34" charset="-120"/>
+              </a:rPr>
+              <a:t>사망자 정보 노출 완화.</a:t>
+            </a:r>
+            <a:endParaRPr lang="en-US" sz="1100" dirty="0"/>
+          </a:p>
+        </p:txBody>
+      </p:sp>
+      <p:sp>
+        <p:nvSpPr>
+          <p:cNvPr id="16" name="Text 14"/>
+          <p:cNvSpPr/>
+          <p:nvPr/>
+        </p:nvSpPr>
+        <p:spPr>
+          <a:xfrm>
+            <a:off x="5277917" y="4681728"/>
+            <a:ext cx="6400800" cy="256032"/>
           </a:xfrm>
           <a:prstGeom prst="rect">
             <a:avLst/>
@@ -7248,7 +7800,7 @@
                 <a:ea typeface="Malgun Gothic" pitchFamily="34" charset="-122"/>
                 <a:cs typeface="Malgun Gothic" pitchFamily="34" charset="-120"/>
               </a:rPr>
-              <a:t>병목 원인 &amp; 해결</a:t>
+              <a:t>해결 3 — 룸 코드 기반 세션 격리</a:t>
             </a:r>
             <a:endParaRPr lang="en-US" sz="1000" dirty="0"/>
           </a:p>
@@ -7256,399 +7808,69 @@
       </p:sp>
       <p:sp>
         <p:nvSpPr>
-          <p:cNvPr id="12" name="Shape 9"/>
-          <p:cNvSpPr/>
-          <p:nvPr/>
-        </p:nvSpPr>
-        <p:spPr>
-          <a:xfrm>
-            <a:off x="7463333" y="2679192"/>
-            <a:ext cx="128016" cy="128016"/>
-          </a:xfrm>
-          <a:prstGeom prst="ellipse">
-            <a:avLst/>
-          </a:prstGeom>
-          <a:solidFill>
-            <a:srgbClr val="45515E"/>
-          </a:solidFill>
-          <a:ln/>
-        </p:spPr>
-      </p:sp>
-      <p:sp>
-        <p:nvSpPr>
-          <p:cNvPr id="13" name="Text 10"/>
-          <p:cNvSpPr/>
-          <p:nvPr/>
-        </p:nvSpPr>
-        <p:spPr>
-          <a:xfrm>
-            <a:off x="7635240" y="2624328"/>
-            <a:ext cx="3931920" cy="256032"/>
-          </a:xfrm>
-          <a:prstGeom prst="rect">
-            <a:avLst/>
-          </a:prstGeom>
-          <a:noFill/>
-          <a:ln/>
-        </p:spPr>
-        <p:txBody>
-          <a:bodyPr wrap="square" rtlCol="0" anchor="ctr"/>
-          <a:lstStyle/>
-          <a:p>
-            <a:pPr indent="0" marL="0">
-              <a:buNone/>
-            </a:pPr>
-            <a:r>
-              <a:rPr lang="en-US" sz="1000" dirty="0">
-                <a:solidFill>
-                  <a:srgbClr val="45515E"/>
-                </a:solidFill>
-                <a:latin typeface="Malgun Gothic" pitchFamily="34" charset="0"/>
-                <a:ea typeface="Malgun Gothic" pitchFamily="34" charset="-122"/>
-                <a:cs typeface="Malgun Gothic" pitchFamily="34" charset="-120"/>
-              </a:rPr>
-              <a:t>glReadPixels 동기 블로킹</a:t>
-            </a:r>
-            <a:endParaRPr lang="en-US" sz="1000" dirty="0"/>
-          </a:p>
-        </p:txBody>
-      </p:sp>
-      <p:sp>
-        <p:nvSpPr>
-          <p:cNvPr id="14" name="Text 11"/>
-          <p:cNvSpPr/>
-          <p:nvPr/>
-        </p:nvSpPr>
-        <p:spPr>
-          <a:xfrm>
-            <a:off x="7635240" y="2880360"/>
-            <a:ext cx="3931920" cy="256032"/>
-          </a:xfrm>
-          <a:prstGeom prst="rect">
-            <a:avLst/>
-          </a:prstGeom>
-          <a:noFill/>
-          <a:ln/>
-        </p:spPr>
-        <p:txBody>
-          <a:bodyPr wrap="square" rtlCol="0" anchor="ctr"/>
-          <a:lstStyle/>
-          <a:p>
-            <a:pPr indent="0" marL="0">
-              <a:buNone/>
-            </a:pPr>
-            <a:r>
-              <a:rPr lang="en-US" sz="900" dirty="0">
-                <a:solidFill>
-                  <a:srgbClr val="8E8E93"/>
-                </a:solidFill>
-                <a:latin typeface="Malgun Gothic" pitchFamily="34" charset="0"/>
-                <a:ea typeface="Malgun Gothic" pitchFamily="34" charset="-122"/>
-                <a:cs typeface="Malgun Gothic" pitchFamily="34" charset="-120"/>
-              </a:rPr>
-              <a:t>GPU 렌더 완료까지 CPU 대기</a:t>
-            </a:r>
-            <a:endParaRPr lang="en-US" sz="900" dirty="0"/>
-          </a:p>
-        </p:txBody>
-      </p:sp>
-      <p:sp>
-        <p:nvSpPr>
-          <p:cNvPr id="15" name="Shape 12"/>
-          <p:cNvSpPr/>
-          <p:nvPr/>
-        </p:nvSpPr>
-        <p:spPr>
-          <a:xfrm>
-            <a:off x="7463333" y="3392424"/>
-            <a:ext cx="128016" cy="128016"/>
-          </a:xfrm>
-          <a:prstGeom prst="ellipse">
-            <a:avLst/>
-          </a:prstGeom>
-          <a:solidFill>
-            <a:srgbClr val="4F6EF1"/>
-          </a:solidFill>
-          <a:ln/>
-        </p:spPr>
-      </p:sp>
-      <p:sp>
-        <p:nvSpPr>
-          <p:cNvPr id="16" name="Text 13"/>
-          <p:cNvSpPr/>
-          <p:nvPr/>
-        </p:nvSpPr>
-        <p:spPr>
-          <a:xfrm>
-            <a:off x="7635240" y="3337560"/>
-            <a:ext cx="3931920" cy="256032"/>
-          </a:xfrm>
-          <a:prstGeom prst="rect">
-            <a:avLst/>
-          </a:prstGeom>
-          <a:noFill/>
-          <a:ln/>
-        </p:spPr>
-        <p:txBody>
-          <a:bodyPr wrap="square" rtlCol="0" anchor="ctr"/>
-          <a:lstStyle/>
-          <a:p>
-            <a:pPr indent="0" marL="0">
-              <a:buNone/>
-            </a:pPr>
-            <a:r>
-              <a:rPr lang="en-US" sz="1000" b="1" dirty="0">
-                <a:solidFill>
-                  <a:srgbClr val="4F6EF1"/>
-                </a:solidFill>
-                <a:latin typeface="Malgun Gothic" pitchFamily="34" charset="0"/>
-                <a:ea typeface="Malgun Gothic" pitchFamily="34" charset="-122"/>
-                <a:cs typeface="Malgun Gothic" pitchFamily="34" charset="-120"/>
-              </a:rPr>
-              <a:t>PBO 더블 버퍼 ping-pong</a:t>
-            </a:r>
-            <a:endParaRPr lang="en-US" sz="1000" dirty="0"/>
-          </a:p>
-        </p:txBody>
-      </p:sp>
-      <p:sp>
-        <p:nvSpPr>
-          <p:cNvPr id="17" name="Text 14"/>
-          <p:cNvSpPr/>
-          <p:nvPr/>
-        </p:nvSpPr>
-        <p:spPr>
-          <a:xfrm>
-            <a:off x="7635240" y="3593592"/>
-            <a:ext cx="3931920" cy="256032"/>
-          </a:xfrm>
-          <a:prstGeom prst="rect">
-            <a:avLst/>
-          </a:prstGeom>
-          <a:noFill/>
-          <a:ln/>
-        </p:spPr>
-        <p:txBody>
-          <a:bodyPr wrap="square" rtlCol="0" anchor="ctr"/>
-          <a:lstStyle/>
-          <a:p>
-            <a:pPr indent="0" marL="0">
-              <a:buNone/>
-            </a:pPr>
-            <a:r>
-              <a:rPr lang="en-US" sz="900" dirty="0">
-                <a:solidFill>
-                  <a:srgbClr val="8E8E93"/>
-                </a:solidFill>
-                <a:latin typeface="Malgun Gothic" pitchFamily="34" charset="0"/>
-                <a:ea typeface="Malgun Gothic" pitchFamily="34" charset="-122"/>
-                <a:cs typeface="Malgun Gothic" pitchFamily="34" charset="-120"/>
-              </a:rPr>
-              <a:t>프레임 N 쓰는 동안 N-1 읽기</a:t>
-            </a:r>
-            <a:endParaRPr lang="en-US" sz="900" dirty="0"/>
-          </a:p>
-        </p:txBody>
-      </p:sp>
-      <p:sp>
-        <p:nvSpPr>
-          <p:cNvPr id="18" name="Shape 15"/>
-          <p:cNvSpPr/>
-          <p:nvPr/>
-        </p:nvSpPr>
-        <p:spPr>
-          <a:xfrm>
-            <a:off x="7463333" y="4105656"/>
-            <a:ext cx="128016" cy="128016"/>
-          </a:xfrm>
-          <a:prstGeom prst="ellipse">
-            <a:avLst/>
-          </a:prstGeom>
-          <a:solidFill>
-            <a:srgbClr val="4F6EF1"/>
-          </a:solidFill>
-          <a:ln/>
-        </p:spPr>
-      </p:sp>
-      <p:sp>
-        <p:nvSpPr>
-          <p:cNvPr id="19" name="Text 16"/>
-          <p:cNvSpPr/>
-          <p:nvPr/>
-        </p:nvSpPr>
-        <p:spPr>
-          <a:xfrm>
-            <a:off x="7635240" y="4050792"/>
-            <a:ext cx="3931920" cy="256032"/>
-          </a:xfrm>
-          <a:prstGeom prst="rect">
-            <a:avLst/>
-          </a:prstGeom>
-          <a:noFill/>
-          <a:ln/>
-        </p:spPr>
-        <p:txBody>
-          <a:bodyPr wrap="square" rtlCol="0" anchor="ctr"/>
-          <a:lstStyle/>
-          <a:p>
-            <a:pPr indent="0" marL="0">
-              <a:buNone/>
-            </a:pPr>
-            <a:r>
-              <a:rPr lang="en-US" sz="1000" b="1" dirty="0">
-                <a:solidFill>
-                  <a:srgbClr val="4F6EF1"/>
-                </a:solidFill>
-                <a:latin typeface="Malgun Gothic" pitchFamily="34" charset="0"/>
-                <a:ea typeface="Malgun Gothic" pitchFamily="34" charset="-122"/>
-                <a:cs typeface="Malgun Gothic" pitchFamily="34" charset="-120"/>
-              </a:rPr>
-              <a:t>인코딩 스레드 분리</a:t>
-            </a:r>
-            <a:endParaRPr lang="en-US" sz="1000" dirty="0"/>
-          </a:p>
-        </p:txBody>
-      </p:sp>
-      <p:sp>
-        <p:nvSpPr>
-          <p:cNvPr id="20" name="Text 17"/>
-          <p:cNvSpPr/>
-          <p:nvPr/>
-        </p:nvSpPr>
-        <p:spPr>
-          <a:xfrm>
-            <a:off x="7635240" y="4306824"/>
-            <a:ext cx="3931920" cy="256032"/>
-          </a:xfrm>
-          <a:prstGeom prst="rect">
-            <a:avLst/>
-          </a:prstGeom>
-          <a:noFill/>
-          <a:ln/>
-        </p:spPr>
-        <p:txBody>
-          <a:bodyPr wrap="square" rtlCol="0" anchor="ctr"/>
-          <a:lstStyle/>
-          <a:p>
-            <a:pPr indent="0" marL="0">
-              <a:buNone/>
-            </a:pPr>
-            <a:r>
-              <a:rPr lang="en-US" sz="900" dirty="0">
-                <a:solidFill>
-                  <a:srgbClr val="8E8E93"/>
-                </a:solidFill>
-                <a:latin typeface="Malgun Gothic" pitchFamily="34" charset="0"/>
-                <a:ea typeface="Malgun Gothic" pitchFamily="34" charset="-122"/>
-                <a:cs typeface="Malgun Gothic" pitchFamily="34" charset="-120"/>
-              </a:rPr>
-              <a:t>네트워크 전송과 완전 독립</a:t>
-            </a:r>
-            <a:endParaRPr lang="en-US" sz="900" dirty="0"/>
-          </a:p>
-        </p:txBody>
-      </p:sp>
-      <p:sp>
-        <p:nvSpPr>
-          <p:cNvPr id="21" name="Shape 18"/>
-          <p:cNvSpPr/>
-          <p:nvPr/>
-        </p:nvSpPr>
-        <p:spPr>
-          <a:xfrm>
-            <a:off x="7463333" y="4818888"/>
-            <a:ext cx="128016" cy="128016"/>
-          </a:xfrm>
-          <a:prstGeom prst="ellipse">
-            <a:avLst/>
-          </a:prstGeom>
-          <a:solidFill>
-            <a:srgbClr val="4F6EF1"/>
-          </a:solidFill>
-          <a:ln/>
-        </p:spPr>
-      </p:sp>
-      <p:sp>
-        <p:nvSpPr>
-          <p:cNvPr id="22" name="Text 19"/>
-          <p:cNvSpPr/>
-          <p:nvPr/>
-        </p:nvSpPr>
-        <p:spPr>
-          <a:xfrm>
-            <a:off x="7635240" y="4764024"/>
-            <a:ext cx="3931920" cy="256032"/>
-          </a:xfrm>
-          <a:prstGeom prst="rect">
-            <a:avLst/>
-          </a:prstGeom>
-          <a:noFill/>
-          <a:ln/>
-        </p:spPr>
-        <p:txBody>
-          <a:bodyPr wrap="square" rtlCol="0" anchor="ctr"/>
-          <a:lstStyle/>
-          <a:p>
-            <a:pPr indent="0" marL="0">
-              <a:buNone/>
-            </a:pPr>
-            <a:r>
-              <a:rPr lang="en-US" sz="1000" b="1" dirty="0">
-                <a:solidFill>
-                  <a:srgbClr val="4F6EF1"/>
-                </a:solidFill>
-                <a:latin typeface="Malgun Gothic" pitchFamily="34" charset="0"/>
-                <a:ea typeface="Malgun Gothic" pitchFamily="34" charset="-122"/>
-                <a:cs typeface="Malgun Gothic" pitchFamily="34" charset="-120"/>
-              </a:rPr>
-              <a:t>워커 12 고정</a:t>
-            </a:r>
-            <a:endParaRPr lang="en-US" sz="1000" dirty="0"/>
-          </a:p>
-        </p:txBody>
-      </p:sp>
-      <p:sp>
-        <p:nvSpPr>
-          <p:cNvPr id="23" name="Text 20"/>
-          <p:cNvSpPr/>
-          <p:nvPr/>
-        </p:nvSpPr>
-        <p:spPr>
-          <a:xfrm>
-            <a:off x="7635240" y="5020056"/>
-            <a:ext cx="3931920" cy="256032"/>
-          </a:xfrm>
-          <a:prstGeom prst="rect">
-            <a:avLst/>
-          </a:prstGeom>
-          <a:noFill/>
-          <a:ln/>
-        </p:spPr>
-        <p:txBody>
-          <a:bodyPr wrap="square" rtlCol="0" anchor="ctr"/>
-          <a:lstStyle/>
-          <a:p>
-            <a:pPr indent="0" marL="0">
-              <a:buNone/>
-            </a:pPr>
-            <a:r>
-              <a:rPr lang="en-US" sz="900" dirty="0">
-                <a:solidFill>
-                  <a:srgbClr val="8E8E93"/>
-                </a:solidFill>
-                <a:latin typeface="Malgun Gothic" pitchFamily="34" charset="0"/>
-                <a:ea typeface="Malgun Gothic" pitchFamily="34" charset="-122"/>
-                <a:cs typeface="Malgun Gothic" pitchFamily="34" charset="-120"/>
-              </a:rPr>
-              <a:t>OS·렌더·네트워크에 여유 코어</a:t>
-            </a:r>
-            <a:endParaRPr lang="en-US" sz="900" dirty="0"/>
-          </a:p>
-        </p:txBody>
-      </p:sp>
-      <p:sp>
-        <p:nvSpPr>
-          <p:cNvPr id="24" name="Shape 21"/>
+          <p:cNvPr id="17" name="Text 15"/>
+          <p:cNvSpPr/>
+          <p:nvPr/>
+        </p:nvSpPr>
+        <p:spPr>
+          <a:xfrm>
+            <a:off x="5277917" y="4965192"/>
+            <a:ext cx="6309360" cy="457200"/>
+          </a:xfrm>
+          <a:prstGeom prst="rect">
+            <a:avLst/>
+          </a:prstGeom>
+          <a:noFill/>
+          <a:ln/>
+        </p:spPr>
+        <p:txBody>
+          <a:bodyPr wrap="square" rtlCol="0" anchor="ctr"/>
+          <a:lstStyle/>
+          <a:p>
+            <a:pPr indent="0" marL="0">
+              <a:lnSpc>
+                <a:spcPct val="150000"/>
+              </a:lnSpc>
+              <a:buNone/>
+            </a:pPr>
+            <a:r>
+              <a:rPr lang="en-US" sz="1100" dirty="0">
+                <a:solidFill>
+                  <a:srgbClr val="222222"/>
+                </a:solidFill>
+                <a:latin typeface="Malgun Gothic" pitchFamily="34" charset="0"/>
+                <a:ea typeface="Malgun Gothic" pitchFamily="34" charset="-122"/>
+                <a:cs typeface="Malgun Gothic" pitchFamily="34" charset="-120"/>
+              </a:rPr>
+              <a:t>방 단위로 이벤트·음성 경로를 격리해</a:t>
+            </a:r>
+            <a:endParaRPr lang="en-US" sz="1100" dirty="0"/>
+          </a:p>
+          <a:p>
+            <a:pPr indent="0" marL="0">
+              <a:lnSpc>
+                <a:spcPct val="150000"/>
+              </a:lnSpc>
+              <a:buNone/>
+            </a:pPr>
+            <a:r>
+              <a:rPr lang="en-US" sz="1100" dirty="0">
+                <a:solidFill>
+                  <a:srgbClr val="222222"/>
+                </a:solidFill>
+                <a:latin typeface="Malgun Gothic" pitchFamily="34" charset="0"/>
+                <a:ea typeface="Malgun Gothic" pitchFamily="34" charset="-122"/>
+                <a:cs typeface="Malgun Gothic" pitchFamily="34" charset="-120"/>
+              </a:rPr>
+              <a:t>다른 방 세션과의 간섭 차단.</a:t>
+            </a:r>
+            <a:endParaRPr lang="en-US" sz="1100" dirty="0"/>
+          </a:p>
+        </p:txBody>
+      </p:sp>
+      <p:sp>
+        <p:nvSpPr>
+          <p:cNvPr id="18" name="Shape 16"/>
           <p:cNvSpPr/>
           <p:nvPr/>
         </p:nvSpPr>
@@ -7670,7 +7892,7 @@
       </p:sp>
       <p:sp>
         <p:nvSpPr>
-          <p:cNvPr id="25" name="Text 22"/>
+          <p:cNvPr id="19" name="Text 17"/>
           <p:cNvSpPr/>
           <p:nvPr/>
         </p:nvSpPr>
@@ -7701,7 +7923,7 @@
                 <a:ea typeface="Malgun Gothic" pitchFamily="34" charset="-122"/>
                 <a:cs typeface="Malgun Gothic" pitchFamily="34" charset="-120"/>
               </a:rPr>
-              <a:t>GPU readback 병목은 GPU가 느린 게 아닙니다. 동기 호출 구조 자체가 문제일 뿐입니다.</a:t>
+              <a:t>대기 중 쌓인 버퍼를 그대로 재생하면 사용자가 가장 먼저 체감합니다. 복귀 시 폐기가 기본값이어야 합니다.</a:t>
             </a:r>
             <a:endParaRPr lang="en-US" sz="900" dirty="0"/>
           </a:p>
@@ -7709,7 +7931,7 @@
       </p:sp>
       <p:sp>
         <p:nvSpPr>
-          <p:cNvPr id="26" name="Text 23"/>
+          <p:cNvPr id="20" name="Text 18"/>
           <p:cNvSpPr/>
           <p:nvPr/>
         </p:nvSpPr>
@@ -7740,7 +7962,7 @@
                 <a:ea typeface="Malgun Gothic" pitchFamily="34" charset="-122"/>
                 <a:cs typeface="Malgun Gothic" pitchFamily="34" charset="-120"/>
               </a:rPr>
-              <a:t>Source: RobotPal 카메라스트리밍 병목분석.md · Debug 빌드 기준 (2026-04-09)</a:t>
+              <a:t>Source: mausoleum — VoiceCapture 코덱 리셋 커밋 (2026-03)</a:t>
             </a:r>
             <a:endParaRPr lang="en-US" sz="800" dirty="0"/>
           </a:p>
@@ -7748,7 +7970,7 @@
       </p:sp>
       <p:sp>
         <p:nvSpPr>
-          <p:cNvPr id="27" name="Text 24"/>
+          <p:cNvPr id="21" name="Text 19"/>
           <p:cNvSpPr/>
           <p:nvPr/>
         </p:nvSpPr>
@@ -7826,7 +8048,7 @@
         <p:spPr>
           <a:xfrm>
             <a:off x="385877" y="279806"/>
-            <a:ext cx="5029200" cy="245974"/>
+            <a:ext cx="10972800" cy="245974"/>
           </a:xfrm>
           <a:prstGeom prst="rect">
             <a:avLst/>
@@ -7850,7 +8072,7 @@
                 <a:ea typeface="Malgun Gothic" pitchFamily="34" charset="-122"/>
                 <a:cs typeface="Malgun Gothic" pitchFamily="34" charset="-120"/>
               </a:rPr>
-              <a:t>KEY LINE 2 · STICKER 모니터링</a:t>
+              <a:t>주요 프로젝트 04 · STICKER</a:t>
             </a:r>
             <a:endParaRPr lang="en-US" sz="1000" dirty="0"/>
           </a:p>
@@ -7889,7 +8111,7 @@
                 <a:ea typeface="Malgun Gothic" pitchFamily="34" charset="-122"/>
                 <a:cs typeface="Malgun Gothic" pitchFamily="34" charset="-120"/>
               </a:rPr>
-              <a:t>AOP 계층별 메트릭으로 코드 한 줄 안 건드리고 병목 위치를 찾아냈다</a:t>
+              <a:t>SQS 소비기에 graceful shutdown과 재처리 불가 메시지 차단을 함께 구현했다</a:t>
             </a:r>
             <a:endParaRPr lang="en-US" sz="2400" dirty="0"/>
           </a:p>
@@ -7928,7 +8150,7 @@
                 <a:ea typeface="Malgun Gothic" pitchFamily="34" charset="-122"/>
                 <a:cs typeface="Malgun Gothic" pitchFamily="34" charset="-120"/>
               </a:rPr>
-              <a:t>Micrometer AOP · Prometheus · Grafana · p95/p99 SLO</a:t>
+              <a:t>Spring Boot 3.5 · Java 21 가상 스레드 · AWS SQS/S3 · Micrometer · Prometheus · Grafana</a:t>
             </a:r>
             <a:endParaRPr lang="en-US" sz="1200" dirty="0"/>
           </a:p>
@@ -7976,12 +8198,12 @@
         </p:nvSpPr>
         <p:spPr>
           <a:xfrm>
-            <a:off x="568757" y="2331720"/>
-            <a:ext cx="10872216" cy="457200"/>
+            <a:off x="568757" y="2304288"/>
+            <a:ext cx="10872216" cy="420624"/>
           </a:xfrm>
           <a:prstGeom prst="roundRect">
             <a:avLst>
-              <a:gd name="adj" fmla="val 14000"/>
+              <a:gd name="adj" fmla="val 15217"/>
             </a:avLst>
           </a:prstGeom>
           <a:solidFill>
@@ -8003,8 +8225,8 @@
         </p:nvSpPr>
         <p:spPr>
           <a:xfrm>
-            <a:off x="751637" y="2331720"/>
-            <a:ext cx="1645920" cy="457200"/>
+            <a:off x="751637" y="2304288"/>
+            <a:ext cx="1554480" cy="420624"/>
           </a:xfrm>
           <a:prstGeom prst="rect">
             <a:avLst/>
@@ -8028,7 +8250,7 @@
                 <a:ea typeface="Malgun Gothic" pitchFamily="34" charset="-122"/>
                 <a:cs typeface="Malgun Gothic" pitchFamily="34" charset="-120"/>
               </a:rPr>
-              <a:t>Controller</a:t>
+              <a:t>Job 발행기</a:t>
             </a:r>
             <a:endParaRPr lang="en-US" sz="1000" dirty="0"/>
           </a:p>
@@ -8042,8 +8264,8 @@
         </p:nvSpPr>
         <p:spPr>
           <a:xfrm>
-            <a:off x="2580437" y="2331720"/>
-            <a:ext cx="8412480" cy="457200"/>
+            <a:off x="2488997" y="2304288"/>
+            <a:ext cx="8503920" cy="420624"/>
           </a:xfrm>
           <a:prstGeom prst="rect">
             <a:avLst/>
@@ -8067,7 +8289,7 @@
                 <a:ea typeface="Malgun Gothic" pitchFamily="34" charset="-122"/>
                 <a:cs typeface="Malgun Gothic" pitchFamily="34" charset="-120"/>
               </a:rPr>
-              <a:t>HTTP 요청 수신</a:t>
+              <a:t>Redis 원자적 락으로 동시 중복 발행 차단 → SQS에 AI 추천 요청 전달</a:t>
             </a:r>
             <a:endParaRPr lang="en-US" sz="950" dirty="0"/>
           </a:p>
@@ -8081,12 +8303,12 @@
         </p:nvSpPr>
         <p:spPr>
           <a:xfrm>
-            <a:off x="568757" y="2907792"/>
-            <a:ext cx="10872216" cy="457200"/>
+            <a:off x="568757" y="2834640"/>
+            <a:ext cx="10872216" cy="420624"/>
           </a:xfrm>
           <a:prstGeom prst="roundRect">
             <a:avLst>
-              <a:gd name="adj" fmla="val 14000"/>
+              <a:gd name="adj" fmla="val 15217"/>
             </a:avLst>
           </a:prstGeom>
           <a:solidFill>
@@ -8108,8 +8330,8 @@
         </p:nvSpPr>
         <p:spPr>
           <a:xfrm>
-            <a:off x="751637" y="2907792"/>
-            <a:ext cx="1645920" cy="457200"/>
+            <a:off x="751637" y="2834640"/>
+            <a:ext cx="1554480" cy="420624"/>
           </a:xfrm>
           <a:prstGeom prst="rect">
             <a:avLst/>
@@ -8133,7 +8355,7 @@
                 <a:ea typeface="Malgun Gothic" pitchFamily="34" charset="-122"/>
                 <a:cs typeface="Malgun Gothic" pitchFamily="34" charset="-120"/>
               </a:rPr>
-              <a:t>Service</a:t>
+              <a:t>SQS 소비기</a:t>
             </a:r>
             <a:endParaRPr lang="en-US" sz="1000" dirty="0"/>
           </a:p>
@@ -8147,8 +8369,8 @@
         </p:nvSpPr>
         <p:spPr>
           <a:xfrm>
-            <a:off x="2580437" y="2907792"/>
-            <a:ext cx="8412480" cy="457200"/>
+            <a:off x="2488997" y="2834640"/>
+            <a:ext cx="8503920" cy="420624"/>
           </a:xfrm>
           <a:prstGeom prst="rect">
             <a:avLst/>
@@ -8172,7 +8394,7 @@
                 <a:ea typeface="Malgun Gothic" pitchFamily="34" charset="-122"/>
                 <a:cs typeface="Malgun Gothic" pitchFamily="34" charset="-120"/>
               </a:rPr>
-              <a:t>app_operation_seconds — layer=service</a:t>
+              <a:t>SmartLifecycle 구현: 서버 종료 시 루프 중단 대기 후 안전 종료 → 메시지 유실 없음</a:t>
             </a:r>
             <a:endParaRPr lang="en-US" sz="950" dirty="0"/>
           </a:p>
@@ -8186,12 +8408,12 @@
         </p:nvSpPr>
         <p:spPr>
           <a:xfrm>
-            <a:off x="568757" y="3483864"/>
-            <a:ext cx="10872216" cy="457200"/>
+            <a:off x="568757" y="3364992"/>
+            <a:ext cx="10872216" cy="420624"/>
           </a:xfrm>
           <a:prstGeom prst="roundRect">
             <a:avLst>
-              <a:gd name="adj" fmla="val 14000"/>
+              <a:gd name="adj" fmla="val 15217"/>
             </a:avLst>
           </a:prstGeom>
           <a:solidFill>
@@ -8213,8 +8435,8 @@
         </p:nvSpPr>
         <p:spPr>
           <a:xfrm>
-            <a:off x="751637" y="3483864"/>
-            <a:ext cx="1645920" cy="457200"/>
+            <a:off x="751637" y="3364992"/>
+            <a:ext cx="1554480" cy="420624"/>
           </a:xfrm>
           <a:prstGeom prst="rect">
             <a:avLst/>
@@ -8238,7 +8460,7 @@
                 <a:ea typeface="Malgun Gothic" pitchFamily="34" charset="-122"/>
                 <a:cs typeface="Malgun Gothic" pitchFamily="34" charset="-120"/>
               </a:rPr>
-              <a:t>Repository</a:t>
+              <a:t>오류 처리</a:t>
             </a:r>
             <a:endParaRPr lang="en-US" sz="1000" dirty="0"/>
           </a:p>
@@ -8252,8 +8474,8 @@
         </p:nvSpPr>
         <p:spPr>
           <a:xfrm>
-            <a:off x="2580437" y="3483864"/>
-            <a:ext cx="8412480" cy="457200"/>
+            <a:off x="2488997" y="3364992"/>
+            <a:ext cx="8503920" cy="420624"/>
           </a:xfrm>
           <a:prstGeom prst="rect">
             <a:avLst/>
@@ -8277,7 +8499,7 @@
                 <a:ea typeface="Malgun Gothic" pitchFamily="34" charset="-122"/>
                 <a:cs typeface="Malgun Gothic" pitchFamily="34" charset="-120"/>
               </a:rPr>
-              <a:t>app_db_query_candidate_seconds — 슬로우쿼리 1차 감지</a:t>
+              <a:t>포맷 위반 메시지: 즉시 삭제(재시도해도 안 됨) · 일시 장애: 삭제 보류 → SQS 자동 재처리</a:t>
             </a:r>
             <a:endParaRPr lang="en-US" sz="950" dirty="0"/>
           </a:p>
@@ -8291,160 +8513,16 @@
         </p:nvSpPr>
         <p:spPr>
           <a:xfrm>
-            <a:off x="568757" y="4059936"/>
-            <a:ext cx="10872216" cy="457200"/>
+            <a:off x="568757" y="3895344"/>
+            <a:ext cx="10872216" cy="420624"/>
           </a:xfrm>
           <a:prstGeom prst="roundRect">
             <a:avLst>
-              <a:gd name="adj" fmla="val 14000"/>
+              <a:gd name="adj" fmla="val 15217"/>
             </a:avLst>
           </a:prstGeom>
           <a:solidFill>
-            <a:srgbClr val="F8F9FF"/>
-          </a:solidFill>
-          <a:ln w="12700">
-            <a:solidFill>
-              <a:srgbClr val="A8B7F8"/>
-            </a:solidFill>
-            <a:prstDash val="solid"/>
-          </a:ln>
-        </p:spPr>
-      </p:sp>
-      <p:sp>
-        <p:nvSpPr>
-          <p:cNvPr id="16" name="Text 14"/>
-          <p:cNvSpPr/>
-          <p:nvPr/>
-        </p:nvSpPr>
-        <p:spPr>
-          <a:xfrm>
-            <a:off x="751637" y="4059936"/>
-            <a:ext cx="1645920" cy="457200"/>
-          </a:xfrm>
-          <a:prstGeom prst="rect">
-            <a:avLst/>
-          </a:prstGeom>
-          <a:noFill/>
-          <a:ln/>
-        </p:spPr>
-        <p:txBody>
-          <a:bodyPr wrap="square" rtlCol="0" anchor="ctr"/>
-          <a:lstStyle/>
-          <a:p>
-            <a:pPr indent="0" marL="0">
-              <a:buNone/>
-            </a:pPr>
-            <a:r>
-              <a:rPr lang="en-US" sz="1000" b="1" dirty="0">
-                <a:solidFill>
-                  <a:srgbClr val="4F6EF1"/>
-                </a:solidFill>
-                <a:latin typeface="Malgun Gothic" pitchFamily="34" charset="0"/>
-                <a:ea typeface="Malgun Gothic" pitchFamily="34" charset="-122"/>
-                <a:cs typeface="Malgun Gothic" pitchFamily="34" charset="-120"/>
-              </a:rPr>
-              <a:t>External</a:t>
-            </a:r>
-            <a:endParaRPr lang="en-US" sz="1000" dirty="0"/>
-          </a:p>
-        </p:txBody>
-      </p:sp>
-      <p:sp>
-        <p:nvSpPr>
-          <p:cNvPr id="17" name="Text 15"/>
-          <p:cNvSpPr/>
-          <p:nvPr/>
-        </p:nvSpPr>
-        <p:spPr>
-          <a:xfrm>
-            <a:off x="2580437" y="4059936"/>
-            <a:ext cx="8412480" cy="457200"/>
-          </a:xfrm>
-          <a:prstGeom prst="rect">
-            <a:avLst/>
-          </a:prstGeom>
-          <a:noFill/>
-          <a:ln/>
-        </p:spPr>
-        <p:txBody>
-          <a:bodyPr wrap="square" rtlCol="0" anchor="ctr"/>
-          <a:lstStyle/>
-          <a:p>
-            <a:pPr indent="0" marL="0">
-              <a:buNone/>
-            </a:pPr>
-            <a:r>
-              <a:rPr lang="en-US" sz="950" dirty="0">
-                <a:solidFill>
-                  <a:srgbClr val="45515E"/>
-                </a:solidFill>
-                <a:latin typeface="Malgun Gothic" pitchFamily="34" charset="0"/>
-                <a:ea typeface="Malgun Gothic" pitchFamily="34" charset="-122"/>
-                <a:cs typeface="Malgun Gothic" pitchFamily="34" charset="-120"/>
-              </a:rPr>
-              <a:t>layer=external — KMA API · SQS 호출</a:t>
-            </a:r>
-            <a:endParaRPr lang="en-US" sz="950" dirty="0"/>
-          </a:p>
-        </p:txBody>
-      </p:sp>
-      <p:sp>
-        <p:nvSpPr>
-          <p:cNvPr id="18" name="Text 16"/>
-          <p:cNvSpPr/>
-          <p:nvPr/>
-        </p:nvSpPr>
-        <p:spPr>
-          <a:xfrm>
-            <a:off x="568757" y="4663440"/>
-            <a:ext cx="10872216" cy="274320"/>
-          </a:xfrm>
-          <a:prstGeom prst="rect">
-            <a:avLst/>
-          </a:prstGeom>
-          <a:noFill/>
-          <a:ln/>
-        </p:spPr>
-        <p:txBody>
-          <a:bodyPr wrap="square" rtlCol="0" anchor="ctr"/>
-          <a:lstStyle/>
-          <a:p>
-            <a:pPr indent="0" marL="0">
-              <a:buNone/>
-            </a:pPr>
-            <a:r>
-              <a:rPr lang="en-US" sz="900" dirty="0">
-                <a:solidFill>
-                  <a:srgbClr val="8E8E93"/>
-                </a:solidFill>
-                <a:latin typeface="Malgun Gothic" pitchFamily="34" charset="0"/>
-                <a:ea typeface="Malgun Gothic" pitchFamily="34" charset="-122"/>
-                <a:cs typeface="Malgun Gothic" pitchFamily="34" charset="-120"/>
-              </a:rPr>
-              <a:t>메트릭 태그  |  endpoint: /users/{id} (raw URI 금지, 카디널리티 통제)  ·  operation: 10개 버킷  ·  result: success/error</a:t>
-            </a:r>
-            <a:endParaRPr lang="en-US" sz="900" dirty="0"/>
-          </a:p>
-        </p:txBody>
-      </p:sp>
-      <p:sp>
-        <p:nvSpPr>
-          <p:cNvPr id="19" name="Shape 17"/>
-          <p:cNvSpPr/>
-          <p:nvPr/>
-        </p:nvSpPr>
-        <p:spPr>
-          <a:xfrm>
-            <a:off x="568757" y="5010912"/>
-            <a:ext cx="3474720" cy="384048"/>
-          </a:xfrm>
-          <a:prstGeom prst="roundRect">
-            <a:avLst>
-              <a:gd name="adj" fmla="val 14286"/>
-            </a:avLst>
-          </a:prstGeom>
-          <a:solidFill>
-            <a:srgbClr val="F0F0F0"/>
+            <a:srgbClr val="F2F3F5"/>
           </a:solidFill>
           <a:ln w="12700">
             <a:solidFill>
@@ -8456,30 +8534,30 @@
       </p:sp>
       <p:sp>
         <p:nvSpPr>
-          <p:cNvPr id="20" name="Text 18"/>
-          <p:cNvSpPr/>
-          <p:nvPr/>
-        </p:nvSpPr>
-        <p:spPr>
-          <a:xfrm>
-            <a:off x="751637" y="5010912"/>
-            <a:ext cx="3291840" cy="384048"/>
-          </a:xfrm>
-          <a:prstGeom prst="rect">
-            <a:avLst/>
-          </a:prstGeom>
-          <a:noFill/>
-          <a:ln/>
-        </p:spPr>
-        <p:txBody>
-          <a:bodyPr wrap="square" rtlCol="0" anchor="ctr"/>
-          <a:lstStyle/>
-          <a:p>
-            <a:pPr indent="0" marL="0">
-              <a:buNone/>
-            </a:pPr>
-            <a:r>
-              <a:rPr lang="en-US" sz="850" dirty="0">
+          <p:cNvPr id="16" name="Text 14"/>
+          <p:cNvSpPr/>
+          <p:nvPr/>
+        </p:nvSpPr>
+        <p:spPr>
+          <a:xfrm>
+            <a:off x="751637" y="3895344"/>
+            <a:ext cx="1554480" cy="420624"/>
+          </a:xfrm>
+          <a:prstGeom prst="rect">
+            <a:avLst/>
+          </a:prstGeom>
+          <a:noFill/>
+          <a:ln/>
+        </p:spPr>
+        <p:txBody>
+          <a:bodyPr wrap="square" rtlCol="0" anchor="ctr"/>
+          <a:lstStyle/>
+          <a:p>
+            <a:pPr indent="0" marL="0">
+              <a:buNone/>
+            </a:pPr>
+            <a:r>
+              <a:rPr lang="en-US" sz="1000" b="1" dirty="0">
                 <a:solidFill>
                   <a:srgbClr val="45515E"/>
                 </a:solidFill>
@@ -8487,30 +8565,69 @@
                 <a:ea typeface="Malgun Gothic" pitchFamily="34" charset="-122"/>
                 <a:cs typeface="Malgun Gothic" pitchFamily="34" charset="-120"/>
               </a:rPr>
-              <a:t>DB 인덱스 추가  ·  findByUser_IdOrderByCreatedAtDesc</a:t>
-            </a:r>
-            <a:endParaRPr lang="en-US" sz="850" dirty="0"/>
-          </a:p>
-        </p:txBody>
-      </p:sp>
-      <p:sp>
-        <p:nvSpPr>
-          <p:cNvPr id="21" name="Shape 19"/>
-          <p:cNvSpPr/>
-          <p:nvPr/>
-        </p:nvSpPr>
-        <p:spPr>
-          <a:xfrm>
-            <a:off x="4317797" y="5010912"/>
-            <a:ext cx="3474720" cy="384048"/>
+              <a:t>중복 방지</a:t>
+            </a:r>
+            <a:endParaRPr lang="en-US" sz="1000" dirty="0"/>
+          </a:p>
+        </p:txBody>
+      </p:sp>
+      <p:sp>
+        <p:nvSpPr>
+          <p:cNvPr id="17" name="Text 15"/>
+          <p:cNvSpPr/>
+          <p:nvPr/>
+        </p:nvSpPr>
+        <p:spPr>
+          <a:xfrm>
+            <a:off x="2488997" y="3895344"/>
+            <a:ext cx="8503920" cy="420624"/>
+          </a:xfrm>
+          <a:prstGeom prst="rect">
+            <a:avLst/>
+          </a:prstGeom>
+          <a:noFill/>
+          <a:ln/>
+        </p:spPr>
+        <p:txBody>
+          <a:bodyPr wrap="square" rtlCol="0" anchor="ctr"/>
+          <a:lstStyle/>
+          <a:p>
+            <a:pPr indent="0" marL="0">
+              <a:buNone/>
+            </a:pPr>
+            <a:r>
+              <a:rPr lang="en-US" sz="950" dirty="0">
+                <a:solidFill>
+                  <a:srgbClr val="45515E"/>
+                </a:solidFill>
+                <a:latin typeface="Malgun Gothic" pitchFamily="34" charset="0"/>
+                <a:ea typeface="Malgun Gothic" pitchFamily="34" charset="-122"/>
+                <a:cs typeface="Malgun Gothic" pitchFamily="34" charset="-120"/>
+              </a:rPr>
+              <a:t>SQS는 같은 메시지를 두 번 전달할 수 있음 → Redis에 jobId 기록해 중복 처리 차단</a:t>
+            </a:r>
+            <a:endParaRPr lang="en-US" sz="950" dirty="0"/>
+          </a:p>
+        </p:txBody>
+      </p:sp>
+      <p:sp>
+        <p:nvSpPr>
+          <p:cNvPr id="18" name="Shape 16"/>
+          <p:cNvSpPr/>
+          <p:nvPr/>
+        </p:nvSpPr>
+        <p:spPr>
+          <a:xfrm>
+            <a:off x="568757" y="4425696"/>
+            <a:ext cx="10872216" cy="420624"/>
           </a:xfrm>
           <a:prstGeom prst="roundRect">
             <a:avLst>
-              <a:gd name="adj" fmla="val 14286"/>
+              <a:gd name="adj" fmla="val 15217"/>
             </a:avLst>
           </a:prstGeom>
           <a:solidFill>
-            <a:srgbClr val="F0F0F0"/>
+            <a:srgbClr val="F2F3F5"/>
           </a:solidFill>
           <a:ln w="12700">
             <a:solidFill>
@@ -8522,30 +8639,30 @@
       </p:sp>
       <p:sp>
         <p:nvSpPr>
-          <p:cNvPr id="22" name="Text 20"/>
-          <p:cNvSpPr/>
-          <p:nvPr/>
-        </p:nvSpPr>
-        <p:spPr>
-          <a:xfrm>
-            <a:off x="4500677" y="5010912"/>
-            <a:ext cx="3291840" cy="384048"/>
-          </a:xfrm>
-          <a:prstGeom prst="rect">
-            <a:avLst/>
-          </a:prstGeom>
-          <a:noFill/>
-          <a:ln/>
-        </p:spPr>
-        <p:txBody>
-          <a:bodyPr wrap="square" rtlCol="0" anchor="ctr"/>
-          <a:lstStyle/>
-          <a:p>
-            <a:pPr indent="0" marL="0">
-              <a:buNone/>
-            </a:pPr>
-            <a:r>
-              <a:rPr lang="en-US" sz="850" dirty="0">
+          <p:cNvPr id="19" name="Text 17"/>
+          <p:cNvSpPr/>
+          <p:nvPr/>
+        </p:nvSpPr>
+        <p:spPr>
+          <a:xfrm>
+            <a:off x="751637" y="4425696"/>
+            <a:ext cx="1554480" cy="420624"/>
+          </a:xfrm>
+          <a:prstGeom prst="rect">
+            <a:avLst/>
+          </a:prstGeom>
+          <a:noFill/>
+          <a:ln/>
+        </p:spPr>
+        <p:txBody>
+          <a:bodyPr wrap="square" rtlCol="0" anchor="ctr"/>
+          <a:lstStyle/>
+          <a:p>
+            <a:pPr indent="0" marL="0">
+              <a:buNone/>
+            </a:pPr>
+            <a:r>
+              <a:rPr lang="en-US" sz="1000" b="1" dirty="0">
                 <a:solidFill>
                   <a:srgbClr val="45515E"/>
                 </a:solidFill>
@@ -8553,65 +8670,38 @@
                 <a:ea typeface="Malgun Gothic" pitchFamily="34" charset="-122"/>
                 <a:cs typeface="Malgun Gothic" pitchFamily="34" charset="-120"/>
               </a:rPr>
-              <a:t>Java 21 가상 스레드  ·  SQS long-polling 20s, OS 스레드 미점유</a:t>
-            </a:r>
-            <a:endParaRPr lang="en-US" sz="850" dirty="0"/>
-          </a:p>
-        </p:txBody>
-      </p:sp>
-      <p:sp>
-        <p:nvSpPr>
-          <p:cNvPr id="23" name="Shape 21"/>
-          <p:cNvSpPr/>
-          <p:nvPr/>
-        </p:nvSpPr>
-        <p:spPr>
-          <a:xfrm>
-            <a:off x="8066837" y="5010912"/>
-            <a:ext cx="3474720" cy="384048"/>
-          </a:xfrm>
-          <a:prstGeom prst="roundRect">
-            <a:avLst>
-              <a:gd name="adj" fmla="val 14286"/>
-            </a:avLst>
-          </a:prstGeom>
-          <a:solidFill>
-            <a:srgbClr val="F0F0F0"/>
-          </a:solidFill>
-          <a:ln w="12700">
-            <a:solidFill>
-              <a:srgbClr val="EDEEF0"/>
-            </a:solidFill>
-            <a:prstDash val="solid"/>
-          </a:ln>
-        </p:spPr>
-      </p:sp>
-      <p:sp>
-        <p:nvSpPr>
-          <p:cNvPr id="24" name="Text 22"/>
-          <p:cNvSpPr/>
-          <p:nvPr/>
-        </p:nvSpPr>
-        <p:spPr>
-          <a:xfrm>
-            <a:off x="8249717" y="5010912"/>
-            <a:ext cx="3291840" cy="384048"/>
-          </a:xfrm>
-          <a:prstGeom prst="rect">
-            <a:avLst/>
-          </a:prstGeom>
-          <a:noFill/>
-          <a:ln/>
-        </p:spPr>
-        <p:txBody>
-          <a:bodyPr wrap="square" rtlCol="0" anchor="ctr"/>
-          <a:lstStyle/>
-          <a:p>
-            <a:pPr indent="0" marL="0">
-              <a:buNone/>
-            </a:pPr>
-            <a:r>
-              <a:rPr lang="en-US" sz="850" dirty="0">
+              <a:t>AOP 계측</a:t>
+            </a:r>
+            <a:endParaRPr lang="en-US" sz="1000" dirty="0"/>
+          </a:p>
+        </p:txBody>
+      </p:sp>
+      <p:sp>
+        <p:nvSpPr>
+          <p:cNvPr id="20" name="Text 18"/>
+          <p:cNvSpPr/>
+          <p:nvPr/>
+        </p:nvSpPr>
+        <p:spPr>
+          <a:xfrm>
+            <a:off x="2488997" y="4425696"/>
+            <a:ext cx="8503920" cy="420624"/>
+          </a:xfrm>
+          <a:prstGeom prst="rect">
+            <a:avLst/>
+          </a:prstGeom>
+          <a:noFill/>
+          <a:ln/>
+        </p:spPr>
+        <p:txBody>
+          <a:bodyPr wrap="square" rtlCol="0" anchor="ctr"/>
+          <a:lstStyle/>
+          <a:p>
+            <a:pPr indent="0" marL="0">
+              <a:buNone/>
+            </a:pPr>
+            <a:r>
+              <a:rPr lang="en-US" sz="950" dirty="0">
                 <a:solidFill>
                   <a:srgbClr val="45515E"/>
                 </a:solidFill>
@@ -8619,15 +8709,15 @@
                 <a:ea typeface="Malgun Gothic" pitchFamily="34" charset="-122"/>
                 <a:cs typeface="Malgun Gothic" pitchFamily="34" charset="-120"/>
               </a:rPr>
-              <a:t>날씨 + S3 URL 캐싱  ·  격자점 기준 on-demand 캐시, 외부 API 빈도 감소</a:t>
-            </a:r>
-            <a:endParaRPr lang="en-US" sz="850" dirty="0"/>
-          </a:p>
-        </p:txBody>
-      </p:sp>
-      <p:sp>
-        <p:nvSpPr>
-          <p:cNvPr id="25" name="Shape 23"/>
+              <a:t>Service/Repository/External 레이어별 응답 시간 자동 수집 · p95·p99 Grafana 시각화</a:t>
+            </a:r>
+            <a:endParaRPr lang="en-US" sz="950" dirty="0"/>
+          </a:p>
+        </p:txBody>
+      </p:sp>
+      <p:sp>
+        <p:nvSpPr>
+          <p:cNvPr id="21" name="Shape 19"/>
           <p:cNvSpPr/>
           <p:nvPr/>
         </p:nvSpPr>
@@ -8649,7 +8739,7 @@
       </p:sp>
       <p:sp>
         <p:nvSpPr>
-          <p:cNvPr id="26" name="Text 24"/>
+          <p:cNvPr id="22" name="Text 20"/>
           <p:cNvSpPr/>
           <p:nvPr/>
         </p:nvSpPr>
@@ -8680,7 +8770,7 @@
                 <a:ea typeface="Malgun Gothic" pitchFamily="34" charset="-122"/>
                 <a:cs typeface="Malgun Gothic" pitchFamily="34" charset="-120"/>
               </a:rPr>
-              <a:t>AOP는 기존 코드에 손대지 않고 어느 레이어가 얼마나 걸리는지 바로 보여줍니다.</a:t>
+              <a:t>SQS는 같은 메시지를 두 번 이상 전달할 수 있습니다. 언제 삭제하고 언제 보류할지 오류 분류가 핵심입니다.</a:t>
             </a:r>
             <a:endParaRPr lang="en-US" sz="900" dirty="0"/>
           </a:p>
@@ -8688,7 +8778,7 @@
       </p:sp>
       <p:sp>
         <p:nvSpPr>
-          <p:cNvPr id="27" name="Text 25"/>
+          <p:cNvPr id="23" name="Text 21"/>
           <p:cNvSpPr/>
           <p:nvPr/>
         </p:nvSpPr>
@@ -8719,7 +8809,7 @@
                 <a:ea typeface="Malgun Gothic" pitchFamily="34" charset="-122"/>
                 <a:cs typeface="Malgun Gothic" pitchFamily="34" charset="-120"/>
               </a:rPr>
-              <a:t>Source: STICKER 프로젝트 ExecutionTimeAspect.java (2026-05-17)</a:t>
+              <a:t>Source: STICKER — SmartLifecycle · ExecutionTimeAspect.java (2026-05-17)</a:t>
             </a:r>
             <a:endParaRPr lang="en-US" sz="800" dirty="0"/>
           </a:p>
@@ -8727,7 +8817,7 @@
       </p:sp>
       <p:sp>
         <p:nvSpPr>
-          <p:cNvPr id="28" name="Text 26"/>
+          <p:cNvPr id="24" name="Text 22"/>
           <p:cNvSpPr/>
           <p:nvPr/>
         </p:nvSpPr>
@@ -8805,7 +8895,7 @@
         <p:spPr>
           <a:xfrm>
             <a:off x="385877" y="279806"/>
-            <a:ext cx="5029200" cy="245974"/>
+            <a:ext cx="10972800" cy="245974"/>
           </a:xfrm>
           <a:prstGeom prst="rect">
             <a:avLst/>
@@ -8829,7 +8919,7 @@
                 <a:ea typeface="Malgun Gothic" pitchFamily="34" charset="-122"/>
                 <a:cs typeface="Malgun Gothic" pitchFamily="34" charset="-120"/>
               </a:rPr>
-              <a:t>KEY LINE 3 · 아키텍처 패턴</a:t>
+              <a:t>OTHER PROJECTS</a:t>
             </a:r>
             <a:endParaRPr lang="en-US" sz="1000" dirty="0"/>
           </a:p>
@@ -8868,7 +8958,7 @@
                 <a:ea typeface="Malgun Gothic" pitchFamily="34" charset="-122"/>
                 <a:cs typeface="Malgun Gothic" pitchFamily="34" charset="-120"/>
               </a:rPr>
-              <a:t>도메인은 달랐지만 리팩토링의 결론은 매번 같았다</a:t>
+              <a:t>SSAFY BOB과 코리안스낵샵에서 MCP 서버 구조와 Spring 인증 흐름을 직접 구현했다</a:t>
             </a:r>
             <a:endParaRPr lang="en-US" sz="2400" dirty="0"/>
           </a:p>
@@ -8907,7 +8997,7 @@
                 <a:ea typeface="Malgun Gothic" pitchFamily="34" charset="-122"/>
                 <a:cs typeface="Malgun Gothic" pitchFamily="34" charset="-120"/>
               </a:rPr>
-              <a:t>AGV TxUtil  ·  영묘 INetworkEventLoop  ·  STICKER SmartLifecycle</a:t>
+              <a:t>Python FastMCP · Smithery · Spring Boot · AWS RDS · JWT · Google OAuth2</a:t>
             </a:r>
             <a:endParaRPr lang="en-US" sz="1200" dirty="0"/>
           </a:p>
@@ -8922,7 +9012,7 @@
         <p:spPr>
           <a:xfrm>
             <a:off x="385877" y="2011680"/>
-            <a:ext cx="3696919" cy="3520440"/>
+            <a:ext cx="5618988" cy="3520440"/>
           </a:xfrm>
           <a:prstGeom prst="roundRect">
             <a:avLst>
@@ -8955,8 +9045,8 @@
         </p:nvSpPr>
         <p:spPr>
           <a:xfrm>
-            <a:off x="4247388" y="2011680"/>
-            <a:ext cx="3696919" cy="3520440"/>
+            <a:off x="6187745" y="2011680"/>
+            <a:ext cx="5618988" cy="3520440"/>
           </a:xfrm>
           <a:prstGeom prst="roundRect">
             <a:avLst>
@@ -8983,37 +9073,42 @@
       </p:sp>
       <p:sp>
         <p:nvSpPr>
-          <p:cNvPr id="7" name="Shape 5"/>
-          <p:cNvSpPr/>
-          <p:nvPr/>
-        </p:nvSpPr>
-        <p:spPr>
-          <a:xfrm>
-            <a:off x="8108899" y="2011680"/>
-            <a:ext cx="3696919" cy="3520440"/>
-          </a:xfrm>
-          <a:prstGeom prst="roundRect">
-            <a:avLst>
-              <a:gd name="adj" fmla="val 4675"/>
-            </a:avLst>
-          </a:prstGeom>
-          <a:solidFill>
-            <a:srgbClr val="FFFFFF"/>
-          </a:solidFill>
-          <a:ln w="12700">
-            <a:solidFill>
-              <a:srgbClr val="EDEEF0"/>
-            </a:solidFill>
-            <a:prstDash val="solid"/>
-          </a:ln>
-          <a:effectLst>
-            <a:outerShdw sx="100000" sy="100000" kx="0" ky="0" algn="bl" rotWithShape="0" blurRad="152400" dist="25400" dir="5400000">
-              <a:srgbClr val="000000">
-                <a:alpha val="5000"/>
-              </a:srgbClr>
-            </a:outerShdw>
-          </a:effectLst>
-        </p:spPr>
+          <p:cNvPr id="7" name="Text 5"/>
+          <p:cNvSpPr/>
+          <p:nvPr/>
+        </p:nvSpPr>
+        <p:spPr>
+          <a:xfrm>
+            <a:off x="568757" y="2212848"/>
+            <a:ext cx="5253228" cy="274320"/>
+          </a:xfrm>
+          <a:prstGeom prst="rect">
+            <a:avLst/>
+          </a:prstGeom>
+          <a:noFill/>
+          <a:ln/>
+        </p:spPr>
+        <p:txBody>
+          <a:bodyPr wrap="square" rtlCol="0" anchor="ctr"/>
+          <a:lstStyle/>
+          <a:p>
+            <a:pPr indent="0" marL="0">
+              <a:buNone/>
+            </a:pPr>
+            <a:r>
+              <a:rPr lang="en-US" sz="1200" b="1" dirty="0">
+                <a:solidFill>
+                  <a:srgbClr val="4F6EF1"/>
+                </a:solidFill>
+                <a:latin typeface="Malgun Gothic" pitchFamily="34" charset="0"/>
+                <a:ea typeface="Malgun Gothic" pitchFamily="34" charset="-122"/>
+                <a:cs typeface="Malgun Gothic" pitchFamily="34" charset="-120"/>
+              </a:rPr>
+              <a:t>SSAFY BOB  ·  MCP 서버</a:t>
+            </a:r>
+            <a:endParaRPr lang="en-US" sz="1200" dirty="0"/>
+          </a:p>
+        </p:txBody>
       </p:sp>
       <p:sp>
         <p:nvSpPr>
@@ -9023,220 +9118,47 @@
         </p:nvSpPr>
         <p:spPr>
           <a:xfrm>
-            <a:off x="568757" y="2212848"/>
-            <a:ext cx="3328416" cy="228600"/>
-          </a:xfrm>
-          <a:prstGeom prst="rect">
-            <a:avLst/>
-          </a:prstGeom>
-          <a:noFill/>
-          <a:ln/>
-        </p:spPr>
-        <p:txBody>
-          <a:bodyPr wrap="square" rtlCol="0" anchor="ctr"/>
-          <a:lstStyle/>
-          <a:p>
-            <a:pPr indent="0" marL="0">
-              <a:buNone/>
-            </a:pPr>
-            <a:r>
-              <a:rPr lang="en-US" sz="900" b="1" dirty="0">
-                <a:solidFill>
-                  <a:srgbClr val="45515E"/>
-                </a:solidFill>
-                <a:latin typeface="Malgun Gothic" pitchFamily="34" charset="0"/>
-                <a:ea typeface="Malgun Gothic" pitchFamily="34" charset="-122"/>
-                <a:cs typeface="Malgun Gothic" pitchFamily="34" charset="-120"/>
-              </a:rPr>
-              <a:t>AGV</a:t>
-            </a:r>
-            <a:endParaRPr lang="en-US" sz="900" dirty="0"/>
-          </a:p>
-        </p:txBody>
-      </p:sp>
-      <p:sp>
-        <p:nvSpPr>
-          <p:cNvPr id="9" name="Text 7"/>
-          <p:cNvSpPr/>
-          <p:nvPr/>
-        </p:nvSpPr>
-        <p:spPr>
-          <a:xfrm>
-            <a:off x="568757" y="2487168"/>
-            <a:ext cx="3328416" cy="365760"/>
-          </a:xfrm>
-          <a:prstGeom prst="rect">
-            <a:avLst/>
-          </a:prstGeom>
-          <a:noFill/>
-          <a:ln/>
-        </p:spPr>
-        <p:txBody>
-          <a:bodyPr wrap="square" rtlCol="0" anchor="ctr"/>
-          <a:lstStyle/>
-          <a:p>
-            <a:pPr indent="0" marL="0">
-              <a:lnSpc>
-                <a:spcPct val="120000"/>
-              </a:lnSpc>
-              <a:buNone/>
-            </a:pPr>
-            <a:r>
-              <a:rPr lang="en-US" sz="1200" b="1" dirty="0">
-                <a:solidFill>
-                  <a:srgbClr val="222222"/>
-                </a:solidFill>
-                <a:latin typeface="Malgun Gothic" pitchFamily="34" charset="0"/>
-                <a:ea typeface="Malgun Gothic" pitchFamily="34" charset="-122"/>
-                <a:cs typeface="Malgun Gothic" pitchFamily="34" charset="-120"/>
-              </a:rPr>
-              <a:t>트랜잭션 ≠ 외부 통신</a:t>
-            </a:r>
-            <a:endParaRPr lang="en-US" sz="1200" dirty="0"/>
-          </a:p>
-        </p:txBody>
-      </p:sp>
-      <p:sp>
-        <p:nvSpPr>
-          <p:cNvPr id="10" name="Text 8"/>
-          <p:cNvSpPr/>
-          <p:nvPr/>
-        </p:nvSpPr>
-        <p:spPr>
-          <a:xfrm>
-            <a:off x="568757" y="2944368"/>
-            <a:ext cx="3328416" cy="1691640"/>
-          </a:xfrm>
-          <a:prstGeom prst="rect">
-            <a:avLst/>
-          </a:prstGeom>
-          <a:noFill/>
-          <a:ln/>
-        </p:spPr>
-        <p:txBody>
-          <a:bodyPr wrap="square" rtlCol="0" anchor="ctr"/>
-          <a:lstStyle/>
-          <a:p>
-            <a:pPr indent="0" marL="0">
-              <a:lnSpc>
-                <a:spcPct val="155000"/>
-              </a:lnSpc>
+            <a:off x="568757" y="2523744"/>
+            <a:ext cx="5253228" cy="228600"/>
+          </a:xfrm>
+          <a:prstGeom prst="rect">
+            <a:avLst/>
+          </a:prstGeom>
+          <a:noFill/>
+          <a:ln/>
+        </p:spPr>
+        <p:txBody>
+          <a:bodyPr wrap="square" rtlCol="0" anchor="ctr"/>
+          <a:lstStyle/>
+          <a:p>
+            <a:pPr indent="0" marL="0">
               <a:buNone/>
             </a:pPr>
             <a:r>
               <a:rPr lang="en-US" sz="950" dirty="0">
                 <a:solidFill>
-                  <a:srgbClr val="404040"/>
-                </a:solidFill>
-                <a:latin typeface="Malgun Gothic" pitchFamily="34" charset="0"/>
-                <a:ea typeface="Malgun Gothic" pitchFamily="34" charset="-122"/>
-                <a:cs typeface="Malgun Gothic" pitchFamily="34" charset="-120"/>
-              </a:rPr>
-              <a:t>@Transactional 안에서</a:t>
+                  <a:srgbClr val="8E8E93"/>
+                </a:solidFill>
+                <a:latin typeface="Malgun Gothic" pitchFamily="34" charset="0"/>
+                <a:ea typeface="Malgun Gothic" pitchFamily="34" charset="-122"/>
+                <a:cs typeface="Malgun Gothic" pitchFamily="34" charset="-120"/>
+              </a:rPr>
+              <a:t>Python · FastMCP · Smithery · uv</a:t>
             </a:r>
             <a:endParaRPr lang="en-US" sz="950" dirty="0"/>
           </a:p>
-          <a:p>
-            <a:pPr indent="0" marL="0">
-              <a:lnSpc>
-                <a:spcPct val="155000"/>
-              </a:lnSpc>
-              <a:buNone/>
-            </a:pPr>
-            <a:r>
-              <a:rPr lang="en-US" sz="950" dirty="0">
-                <a:solidFill>
-                  <a:srgbClr val="404040"/>
-                </a:solidFill>
-                <a:latin typeface="Malgun Gothic" pitchFamily="34" charset="0"/>
-                <a:ea typeface="Malgun Gothic" pitchFamily="34" charset="-122"/>
-                <a:cs typeface="Malgun Gothic" pitchFamily="34" charset="-120"/>
-              </a:rPr>
-              <a:t>MQTT publish 바로 호출</a:t>
-            </a:r>
-            <a:endParaRPr lang="en-US" sz="950" dirty="0"/>
-          </a:p>
-          <a:p>
-            <a:pPr indent="0" marL="0">
-              <a:lnSpc>
-                <a:spcPct val="155000"/>
-              </a:lnSpc>
-              <a:buNone/>
-            </a:pPr>
-            <a:r>
-              <a:rPr lang="en-US" sz="950" dirty="0">
-                <a:solidFill>
-                  <a:srgbClr val="404040"/>
-                </a:solidFill>
-                <a:latin typeface="Malgun Gothic" pitchFamily="34" charset="0"/>
-                <a:ea typeface="Malgun Gothic" pitchFamily="34" charset="-122"/>
-                <a:cs typeface="Malgun Gothic" pitchFamily="34" charset="-120"/>
-              </a:rPr>
-              <a:t>→ DB 커밋 전에 메시지 발행</a:t>
-            </a:r>
-            <a:endParaRPr lang="en-US" sz="950" dirty="0"/>
-          </a:p>
-          <a:p>
-            <a:pPr indent="0" marL="0">
-              <a:lnSpc>
-                <a:spcPct val="155000"/>
-              </a:lnSpc>
-              <a:buNone/>
-            </a:pPr>
-            <a:endParaRPr lang="en-US" sz="950" dirty="0"/>
-          </a:p>
-          <a:p>
-            <a:pPr indent="0" marL="0">
-              <a:lnSpc>
-                <a:spcPct val="155000"/>
-              </a:lnSpc>
-              <a:buNone/>
-            </a:pPr>
-            <a:r>
-              <a:rPr lang="en-US" sz="950" dirty="0">
-                <a:solidFill>
-                  <a:srgbClr val="404040"/>
-                </a:solidFill>
-                <a:latin typeface="Malgun Gothic" pitchFamily="34" charset="0"/>
-                <a:ea typeface="Malgun Gothic" pitchFamily="34" charset="-122"/>
-                <a:cs typeface="Malgun Gothic" pitchFamily="34" charset="-120"/>
-              </a:rPr>
-              <a:t>afterCommit() 훅으로</a:t>
-            </a:r>
-            <a:endParaRPr lang="en-US" sz="950" dirty="0"/>
-          </a:p>
-          <a:p>
-            <a:pPr indent="0" marL="0">
-              <a:lnSpc>
-                <a:spcPct val="155000"/>
-              </a:lnSpc>
-              <a:buNone/>
-            </a:pPr>
-            <a:r>
-              <a:rPr lang="en-US" sz="950" dirty="0">
-                <a:solidFill>
-                  <a:srgbClr val="404040"/>
-                </a:solidFill>
-                <a:latin typeface="Malgun Gothic" pitchFamily="34" charset="0"/>
-                <a:ea typeface="Malgun Gothic" pitchFamily="34" charset="-122"/>
-                <a:cs typeface="Malgun Gothic" pitchFamily="34" charset="-120"/>
-              </a:rPr>
-              <a:t>커밋 이후에만 발행하도록 해결</a:t>
-            </a:r>
-            <a:endParaRPr lang="en-US" sz="950" dirty="0"/>
-          </a:p>
-        </p:txBody>
-      </p:sp>
-      <p:sp>
-        <p:nvSpPr>
-          <p:cNvPr id="11" name="Shape 9"/>
-          <p:cNvSpPr/>
-          <p:nvPr/>
-        </p:nvSpPr>
-        <p:spPr>
-          <a:xfrm>
-            <a:off x="568757" y="4773168"/>
-            <a:ext cx="3145536" cy="9144"/>
+        </p:txBody>
+      </p:sp>
+      <p:sp>
+        <p:nvSpPr>
+          <p:cNvPr id="9" name="Shape 7"/>
+          <p:cNvSpPr/>
+          <p:nvPr/>
+        </p:nvSpPr>
+        <p:spPr>
+          <a:xfrm>
+            <a:off x="568757" y="2816352"/>
+            <a:ext cx="5070348" cy="9144"/>
           </a:xfrm>
           <a:prstGeom prst="line">
             <a:avLst/>
@@ -9252,171 +9174,14 @@
       </p:sp>
       <p:sp>
         <p:nvSpPr>
-          <p:cNvPr id="12" name="Text 10"/>
-          <p:cNvSpPr/>
-          <p:nvPr/>
-        </p:nvSpPr>
-        <p:spPr>
-          <a:xfrm>
-            <a:off x="568757" y="4864608"/>
-            <a:ext cx="3328416" cy="365760"/>
-          </a:xfrm>
-          <a:prstGeom prst="rect">
-            <a:avLst/>
-          </a:prstGeom>
-          <a:noFill/>
-          <a:ln/>
-        </p:spPr>
-        <p:txBody>
-          <a:bodyPr wrap="square" rtlCol="0" anchor="ctr"/>
-          <a:lstStyle/>
-          <a:p>
-            <a:pPr indent="0" marL="0">
-              <a:lnSpc>
-                <a:spcPct val="140000"/>
-              </a:lnSpc>
-              <a:buNone/>
-            </a:pPr>
-            <a:r>
-              <a:rPr lang="en-US" sz="900" dirty="0">
-                <a:solidFill>
-                  <a:srgbClr val="45515E"/>
-                </a:solidFill>
-                <a:latin typeface="Malgun Gothic" pitchFamily="34" charset="0"/>
-                <a:ea typeface="Malgun Gothic" pitchFamily="34" charset="-122"/>
-                <a:cs typeface="Malgun Gothic" pitchFamily="34" charset="-120"/>
-              </a:rPr>
-              <a:t>DB 커밋 이후에만 외부에 알려라</a:t>
-            </a:r>
-            <a:endParaRPr lang="en-US" sz="900" dirty="0"/>
-          </a:p>
-        </p:txBody>
-      </p:sp>
-      <p:sp>
-        <p:nvSpPr>
-          <p:cNvPr id="13" name="Shape 11"/>
-          <p:cNvSpPr/>
-          <p:nvPr/>
-        </p:nvSpPr>
-        <p:spPr>
-          <a:xfrm>
-            <a:off x="4247388" y="2029968"/>
-            <a:ext cx="3715207" cy="3483864"/>
-          </a:xfrm>
-          <a:prstGeom prst="roundRect">
-            <a:avLst>
-              <a:gd name="adj" fmla="val 3675"/>
-            </a:avLst>
-          </a:prstGeom>
-          <a:solidFill>
-            <a:srgbClr val="F8F9FF"/>
-          </a:solidFill>
-          <a:ln w="17780">
-            <a:solidFill>
-              <a:srgbClr val="A8B7F8"/>
-            </a:solidFill>
-            <a:prstDash val="solid"/>
-          </a:ln>
-          <a:effectLst>
-            <a:outerShdw sx="100000" sy="100000" kx="0" ky="0" algn="bl" rotWithShape="0" blurRad="190500" dist="50800" dir="5400000">
-              <a:srgbClr val="4F6EF1">
-                <a:alpha val="20000"/>
-              </a:srgbClr>
-            </a:outerShdw>
-          </a:effectLst>
-        </p:spPr>
-      </p:sp>
-      <p:sp>
-        <p:nvSpPr>
-          <p:cNvPr id="14" name="Text 12"/>
-          <p:cNvSpPr/>
-          <p:nvPr/>
-        </p:nvSpPr>
-        <p:spPr>
-          <a:xfrm>
-            <a:off x="4430268" y="2212848"/>
-            <a:ext cx="3328416" cy="228600"/>
-          </a:xfrm>
-          <a:prstGeom prst="rect">
-            <a:avLst/>
-          </a:prstGeom>
-          <a:noFill/>
-          <a:ln/>
-        </p:spPr>
-        <p:txBody>
-          <a:bodyPr wrap="square" rtlCol="0" anchor="ctr"/>
-          <a:lstStyle/>
-          <a:p>
-            <a:pPr indent="0" marL="0">
-              <a:buNone/>
-            </a:pPr>
-            <a:r>
-              <a:rPr lang="en-US" sz="900" b="1" dirty="0">
-                <a:solidFill>
-                  <a:srgbClr val="4F6EF1"/>
-                </a:solidFill>
-                <a:latin typeface="Malgun Gothic" pitchFamily="34" charset="0"/>
-                <a:ea typeface="Malgun Gothic" pitchFamily="34" charset="-122"/>
-                <a:cs typeface="Malgun Gothic" pitchFamily="34" charset="-120"/>
-              </a:rPr>
-              <a:t>영묘</a:t>
-            </a:r>
-            <a:endParaRPr lang="en-US" sz="900" dirty="0"/>
-          </a:p>
-        </p:txBody>
-      </p:sp>
-      <p:sp>
-        <p:nvSpPr>
-          <p:cNvPr id="15" name="Text 13"/>
-          <p:cNvSpPr/>
-          <p:nvPr/>
-        </p:nvSpPr>
-        <p:spPr>
-          <a:xfrm>
-            <a:off x="4430268" y="2487168"/>
-            <a:ext cx="3328416" cy="365760"/>
-          </a:xfrm>
-          <a:prstGeom prst="rect">
-            <a:avLst/>
-          </a:prstGeom>
-          <a:noFill/>
-          <a:ln/>
-        </p:spPr>
-        <p:txBody>
-          <a:bodyPr wrap="square" rtlCol="0" anchor="ctr"/>
-          <a:lstStyle/>
-          <a:p>
-            <a:pPr indent="0" marL="0">
-              <a:lnSpc>
-                <a:spcPct val="120000"/>
-              </a:lnSpc>
-              <a:buNone/>
-            </a:pPr>
-            <a:r>
-              <a:rPr lang="en-US" sz="1200" b="1" dirty="0">
-                <a:solidFill>
-                  <a:srgbClr val="4F6EF1"/>
-                </a:solidFill>
-                <a:latin typeface="Malgun Gothic" pitchFamily="34" charset="0"/>
-                <a:ea typeface="Malgun Gothic" pitchFamily="34" charset="-122"/>
-                <a:cs typeface="Malgun Gothic" pitchFamily="34" charset="-120"/>
-              </a:rPr>
-              <a:t>인터페이스가 먼저다</a:t>
-            </a:r>
-            <a:endParaRPr lang="en-US" sz="1200" dirty="0"/>
-          </a:p>
-        </p:txBody>
-      </p:sp>
-      <p:sp>
-        <p:nvSpPr>
-          <p:cNvPr id="16" name="Text 14"/>
-          <p:cNvSpPr/>
-          <p:nvPr/>
-        </p:nvSpPr>
-        <p:spPr>
-          <a:xfrm>
-            <a:off x="4430268" y="2944368"/>
-            <a:ext cx="3328416" cy="1691640"/>
+          <p:cNvPr id="10" name="Text 8"/>
+          <p:cNvSpPr/>
+          <p:nvPr/>
+        </p:nvSpPr>
+        <p:spPr>
+          <a:xfrm>
+            <a:off x="568757" y="2907792"/>
+            <a:ext cx="5253228" cy="2377440"/>
           </a:xfrm>
           <a:prstGeom prst="rect">
             <a:avLst/>
@@ -9435,17 +9200,17 @@
               <a:buNone/>
             </a:pPr>
             <a:r>
-              <a:rPr lang="en-US" sz="950" dirty="0">
-                <a:solidFill>
-                  <a:srgbClr val="404040"/>
-                </a:solidFill>
-                <a:latin typeface="Malgun Gothic" pitchFamily="34" charset="0"/>
-                <a:ea typeface="Malgun Gothic" pitchFamily="34" charset="-122"/>
-                <a:cs typeface="Malgun Gothic" pitchFamily="34" charset="-120"/>
-              </a:rPr>
-              <a:t>WebSocketManager 하나에</a:t>
-            </a:r>
-            <a:endParaRPr lang="en-US" sz="950" dirty="0"/>
+              <a:rPr lang="en-US" sz="1050" dirty="0">
+                <a:solidFill>
+                  <a:srgbClr val="222222"/>
+                </a:solidFill>
+                <a:latin typeface="Malgun Gothic" pitchFamily="34" charset="0"/>
+                <a:ea typeface="Malgun Gothic" pitchFamily="34" charset="-122"/>
+                <a:cs typeface="Malgun Gothic" pitchFamily="34" charset="-120"/>
+              </a:rPr>
+              <a:t>LLM 에이전트가 SSAFY 식단 정보를</a:t>
+            </a:r>
+            <a:endParaRPr lang="en-US" sz="1050" dirty="0"/>
           </a:p>
           <a:p>
             <a:pPr indent="0" marL="0">
@@ -9455,17 +9220,17 @@
               <a:buNone/>
             </a:pPr>
             <a:r>
-              <a:rPr lang="en-US" sz="950" dirty="0">
-                <a:solidFill>
-                  <a:srgbClr val="404040"/>
-                </a:solidFill>
-                <a:latin typeface="Malgun Gothic" pitchFamily="34" charset="0"/>
-                <a:ea typeface="Malgun Gothic" pitchFamily="34" charset="-122"/>
-                <a:cs typeface="Malgun Gothic" pitchFamily="34" charset="-120"/>
-              </a:rPr>
-              <a:t>연결·룸·브로드캐스트가 혼재</a:t>
-            </a:r>
-            <a:endParaRPr lang="en-US" sz="950" dirty="0"/>
+              <a:rPr lang="en-US" sz="1050" dirty="0">
+                <a:solidFill>
+                  <a:srgbClr val="222222"/>
+                </a:solidFill>
+                <a:latin typeface="Malgun Gothic" pitchFamily="34" charset="0"/>
+                <a:ea typeface="Malgun Gothic" pitchFamily="34" charset="-122"/>
+                <a:cs typeface="Malgun Gothic" pitchFamily="34" charset="-120"/>
+              </a:rPr>
+              <a:t>조회할 수 있는 MCP 서버 개발.</a:t>
+            </a:r>
+            <a:endParaRPr lang="en-US" sz="1050" dirty="0"/>
           </a:p>
           <a:p>
             <a:pPr indent="0" marL="0">
@@ -9474,18 +9239,7 @@
               </a:lnSpc>
               <a:buNone/>
             </a:pPr>
-            <a:r>
-              <a:rPr lang="en-US" sz="950" dirty="0">
-                <a:solidFill>
-                  <a:srgbClr val="404040"/>
-                </a:solidFill>
-                <a:latin typeface="Malgun Gothic" pitchFamily="34" charset="0"/>
-                <a:ea typeface="Malgun Gothic" pitchFamily="34" charset="-122"/>
-                <a:cs typeface="Malgun Gothic" pitchFamily="34" charset="-120"/>
-              </a:rPr>
-              <a:t>→ 기능 추가마다 예상 못한</a:t>
-            </a:r>
-            <a:endParaRPr lang="en-US" sz="950" dirty="0"/>
+            <a:endParaRPr lang="en-US" sz="1050" dirty="0"/>
           </a:p>
           <a:p>
             <a:pPr indent="0" marL="0">
@@ -9495,17 +9249,17 @@
               <a:buNone/>
             </a:pPr>
             <a:r>
-              <a:rPr lang="en-US" sz="950" dirty="0">
-                <a:solidFill>
-                  <a:srgbClr val="404040"/>
-                </a:solidFill>
-                <a:latin typeface="Malgun Gothic" pitchFamily="34" charset="0"/>
-                <a:ea typeface="Malgun Gothic" pitchFamily="34" charset="-122"/>
-                <a:cs typeface="Malgun Gothic" pitchFamily="34" charset="-120"/>
-              </a:rPr>
-              <a:t>버그 발생</a:t>
-            </a:r>
-            <a:endParaRPr lang="en-US" sz="950" dirty="0"/>
+              <a:rPr lang="en-US" sz="1050" dirty="0">
+                <a:solidFill>
+                  <a:srgbClr val="222222"/>
+                </a:solidFill>
+                <a:latin typeface="Malgun Gothic" pitchFamily="34" charset="0"/>
+                <a:ea typeface="Malgun Gothic" pitchFamily="34" charset="-122"/>
+                <a:cs typeface="Malgun Gothic" pitchFamily="34" charset="-120"/>
+              </a:rPr>
+              <a:t>@mcp.tool로 도구 등록. 자연어에서</a:t>
+            </a:r>
+            <a:endParaRPr lang="en-US" sz="1050" dirty="0"/>
           </a:p>
           <a:p>
             <a:pPr indent="0" marL="0">
@@ -9514,7 +9268,18 @@
               </a:lnSpc>
               <a:buNone/>
             </a:pPr>
-            <a:endParaRPr lang="en-US" sz="950" dirty="0"/>
+            <a:r>
+              <a:rPr lang="en-US" sz="1050" dirty="0">
+                <a:solidFill>
+                  <a:srgbClr val="222222"/>
+                </a:solidFill>
+                <a:latin typeface="Malgun Gothic" pitchFamily="34" charset="0"/>
+                <a:ea typeface="Malgun Gothic" pitchFamily="34" charset="-122"/>
+                <a:cs typeface="Malgun Gothic" pitchFamily="34" charset="-120"/>
+              </a:rPr>
+              <a:t>날짜·층수 파라미터를 추출하도록</a:t>
+            </a:r>
+            <a:endParaRPr lang="en-US" sz="1050" dirty="0"/>
           </a:p>
           <a:p>
             <a:pPr indent="0" marL="0">
@@ -9524,15 +9289,142 @@
               <a:buNone/>
             </a:pPr>
             <a:r>
+              <a:rPr lang="en-US" sz="1050" dirty="0">
+                <a:solidFill>
+                  <a:srgbClr val="222222"/>
+                </a:solidFill>
+                <a:latin typeface="Malgun Gothic" pitchFamily="34" charset="0"/>
+                <a:ea typeface="Malgun Gothic" pitchFamily="34" charset="-122"/>
+                <a:cs typeface="Malgun Gothic" pitchFamily="34" charset="-120"/>
+              </a:rPr>
+              <a:t>Pydantic 입력 스키마 정의.</a:t>
+            </a:r>
+            <a:endParaRPr lang="en-US" sz="1050" dirty="0"/>
+          </a:p>
+          <a:p>
+            <a:pPr indent="0" marL="0">
+              <a:lnSpc>
+                <a:spcPct val="155000"/>
+              </a:lnSpc>
+              <a:buNone/>
+            </a:pPr>
+            <a:endParaRPr lang="en-US" sz="1050" dirty="0"/>
+          </a:p>
+          <a:p>
+            <a:pPr indent="0" marL="0">
+              <a:lnSpc>
+                <a:spcPct val="155000"/>
+              </a:lnSpc>
+              <a:buNone/>
+            </a:pPr>
+            <a:r>
+              <a:rPr lang="en-US" sz="1050" dirty="0">
+                <a:solidFill>
+                  <a:srgbClr val="222222"/>
+                </a:solidFill>
+                <a:latin typeface="Malgun Gothic" pitchFamily="34" charset="0"/>
+                <a:ea typeface="Malgun Gothic" pitchFamily="34" charset="-122"/>
+                <a:cs typeface="Malgun Gothic" pitchFamily="34" charset="-120"/>
+              </a:rPr>
+              <a:t>요청 시점에 외부 JSON을 페칭하는</a:t>
+            </a:r>
+            <a:endParaRPr lang="en-US" sz="1050" dirty="0"/>
+          </a:p>
+          <a:p>
+            <a:pPr indent="0" marL="0">
+              <a:lnSpc>
+                <a:spcPct val="155000"/>
+              </a:lnSpc>
+              <a:buNone/>
+            </a:pPr>
+            <a:r>
+              <a:rPr lang="en-US" sz="1050" dirty="0">
+                <a:solidFill>
+                  <a:srgbClr val="222222"/>
+                </a:solidFill>
+                <a:latin typeface="Malgun Gothic" pitchFamily="34" charset="0"/>
+                <a:ea typeface="Malgun Gothic" pitchFamily="34" charset="-122"/>
+                <a:cs typeface="Malgun Gothic" pitchFamily="34" charset="-120"/>
+              </a:rPr>
+              <a:t>stateless 구조. Smithery 배포.</a:t>
+            </a:r>
+            <a:endParaRPr lang="en-US" sz="1050" dirty="0"/>
+          </a:p>
+        </p:txBody>
+      </p:sp>
+      <p:sp>
+        <p:nvSpPr>
+          <p:cNvPr id="11" name="Text 9"/>
+          <p:cNvSpPr/>
+          <p:nvPr/>
+        </p:nvSpPr>
+        <p:spPr>
+          <a:xfrm>
+            <a:off x="6370625" y="2212848"/>
+            <a:ext cx="5253228" cy="274320"/>
+          </a:xfrm>
+          <a:prstGeom prst="rect">
+            <a:avLst/>
+          </a:prstGeom>
+          <a:noFill/>
+          <a:ln/>
+        </p:spPr>
+        <p:txBody>
+          <a:bodyPr wrap="square" rtlCol="0" anchor="ctr"/>
+          <a:lstStyle/>
+          <a:p>
+            <a:pPr indent="0" marL="0">
+              <a:buNone/>
+            </a:pPr>
+            <a:r>
+              <a:rPr lang="en-US" sz="1200" b="1" dirty="0">
+                <a:solidFill>
+                  <a:srgbClr val="45515E"/>
+                </a:solidFill>
+                <a:latin typeface="Malgun Gothic" pitchFamily="34" charset="0"/>
+                <a:ea typeface="Malgun Gothic" pitchFamily="34" charset="-122"/>
+                <a:cs typeface="Malgun Gothic" pitchFamily="34" charset="-120"/>
+              </a:rPr>
+              <a:t>코리안스낵샵</a:t>
+            </a:r>
+            <a:endParaRPr lang="en-US" sz="1200" dirty="0"/>
+          </a:p>
+        </p:txBody>
+      </p:sp>
+      <p:sp>
+        <p:nvSpPr>
+          <p:cNvPr id="12" name="Text 10"/>
+          <p:cNvSpPr/>
+          <p:nvPr/>
+        </p:nvSpPr>
+        <p:spPr>
+          <a:xfrm>
+            <a:off x="6370625" y="2523744"/>
+            <a:ext cx="5253228" cy="228600"/>
+          </a:xfrm>
+          <a:prstGeom prst="rect">
+            <a:avLst/>
+          </a:prstGeom>
+          <a:noFill/>
+          <a:ln/>
+        </p:spPr>
+        <p:txBody>
+          <a:bodyPr wrap="square" rtlCol="0" anchor="ctr"/>
+          <a:lstStyle/>
+          <a:p>
+            <a:pPr indent="0" marL="0">
+              <a:buNone/>
+            </a:pPr>
+            <a:r>
               <a:rPr lang="en-US" sz="950" dirty="0">
                 <a:solidFill>
-                  <a:srgbClr val="404040"/>
-                </a:solidFill>
-                <a:latin typeface="Malgun Gothic" pitchFamily="34" charset="0"/>
-                <a:ea typeface="Malgun Gothic" pitchFamily="34" charset="-122"/>
-                <a:cs typeface="Malgun Gothic" pitchFamily="34" charset="-120"/>
-              </a:rPr>
-              <a:t>3단계 리팩토링으로 분리</a:t>
+                  <a:srgbClr val="8E8E93"/>
+                </a:solidFill>
+                <a:latin typeface="Malgun Gothic" pitchFamily="34" charset="0"/>
+                <a:ea typeface="Malgun Gothic" pitchFamily="34" charset="-122"/>
+                <a:cs typeface="Malgun Gothic" pitchFamily="34" charset="-120"/>
+              </a:rPr>
+              <a:t>Java 17 · Spring Boot · AWS RDS · MySQL · JWT · Google OAuth2</a:t>
             </a:r>
             <a:endParaRPr lang="en-US" sz="950" dirty="0"/>
           </a:p>
@@ -9540,14 +9432,14 @@
       </p:sp>
       <p:sp>
         <p:nvSpPr>
-          <p:cNvPr id="17" name="Shape 15"/>
-          <p:cNvSpPr/>
-          <p:nvPr/>
-        </p:nvSpPr>
-        <p:spPr>
-          <a:xfrm>
-            <a:off x="4430268" y="4773168"/>
-            <a:ext cx="3145536" cy="9144"/>
+          <p:cNvPr id="13" name="Shape 11"/>
+          <p:cNvSpPr/>
+          <p:nvPr/>
+        </p:nvSpPr>
+        <p:spPr>
+          <a:xfrm>
+            <a:off x="6370625" y="2816352"/>
+            <a:ext cx="5070348" cy="9144"/>
           </a:xfrm>
           <a:prstGeom prst="line">
             <a:avLst/>
@@ -9563,137 +9455,14 @@
       </p:sp>
       <p:sp>
         <p:nvSpPr>
-          <p:cNvPr id="18" name="Text 16"/>
-          <p:cNvSpPr/>
-          <p:nvPr/>
-        </p:nvSpPr>
-        <p:spPr>
-          <a:xfrm>
-            <a:off x="4430268" y="4864608"/>
-            <a:ext cx="3328416" cy="365760"/>
-          </a:xfrm>
-          <a:prstGeom prst="rect">
-            <a:avLst/>
-          </a:prstGeom>
-          <a:noFill/>
-          <a:ln/>
-        </p:spPr>
-        <p:txBody>
-          <a:bodyPr wrap="square" rtlCol="0" anchor="ctr"/>
-          <a:lstStyle/>
-          <a:p>
-            <a:pPr indent="0" marL="0">
-              <a:lnSpc>
-                <a:spcPct val="140000"/>
-              </a:lnSpc>
-              <a:buNone/>
-            </a:pPr>
-            <a:r>
-              <a:rPr lang="en-US" sz="900" dirty="0">
-                <a:solidFill>
-                  <a:srgbClr val="4F6EF1"/>
-                </a:solidFill>
-                <a:latin typeface="Malgun Gothic" pitchFamily="34" charset="0"/>
-                <a:ea typeface="Malgun Gothic" pitchFamily="34" charset="-122"/>
-                <a:cs typeface="Malgun Gothic" pitchFamily="34" charset="-120"/>
-              </a:rPr>
-              <a:t>처음부터 경계를 안 잡으면 기술 부채다</a:t>
-            </a:r>
-            <a:endParaRPr lang="en-US" sz="900" dirty="0"/>
-          </a:p>
-        </p:txBody>
-      </p:sp>
-      <p:sp>
-        <p:nvSpPr>
-          <p:cNvPr id="19" name="Text 17"/>
-          <p:cNvSpPr/>
-          <p:nvPr/>
-        </p:nvSpPr>
-        <p:spPr>
-          <a:xfrm>
-            <a:off x="8291779" y="2212848"/>
-            <a:ext cx="3328416" cy="228600"/>
-          </a:xfrm>
-          <a:prstGeom prst="rect">
-            <a:avLst/>
-          </a:prstGeom>
-          <a:noFill/>
-          <a:ln/>
-        </p:spPr>
-        <p:txBody>
-          <a:bodyPr wrap="square" rtlCol="0" anchor="ctr"/>
-          <a:lstStyle/>
-          <a:p>
-            <a:pPr indent="0" marL="0">
-              <a:buNone/>
-            </a:pPr>
-            <a:r>
-              <a:rPr lang="en-US" sz="900" b="1" dirty="0">
-                <a:solidFill>
-                  <a:srgbClr val="45515E"/>
-                </a:solidFill>
-                <a:latin typeface="Malgun Gothic" pitchFamily="34" charset="0"/>
-                <a:ea typeface="Malgun Gothic" pitchFamily="34" charset="-122"/>
-                <a:cs typeface="Malgun Gothic" pitchFamily="34" charset="-120"/>
-              </a:rPr>
-              <a:t>STICKER</a:t>
-            </a:r>
-            <a:endParaRPr lang="en-US" sz="900" dirty="0"/>
-          </a:p>
-        </p:txBody>
-      </p:sp>
-      <p:sp>
-        <p:nvSpPr>
-          <p:cNvPr id="20" name="Text 18"/>
-          <p:cNvSpPr/>
-          <p:nvPr/>
-        </p:nvSpPr>
-        <p:spPr>
-          <a:xfrm>
-            <a:off x="8291779" y="2487168"/>
-            <a:ext cx="3328416" cy="365760"/>
-          </a:xfrm>
-          <a:prstGeom prst="rect">
-            <a:avLst/>
-          </a:prstGeom>
-          <a:noFill/>
-          <a:ln/>
-        </p:spPr>
-        <p:txBody>
-          <a:bodyPr wrap="square" rtlCol="0" anchor="ctr"/>
-          <a:lstStyle/>
-          <a:p>
-            <a:pPr indent="0" marL="0">
-              <a:lnSpc>
-                <a:spcPct val="120000"/>
-              </a:lnSpc>
-              <a:buNone/>
-            </a:pPr>
-            <a:r>
-              <a:rPr lang="en-US" sz="1200" b="1" dirty="0">
-                <a:solidFill>
-                  <a:srgbClr val="222222"/>
-                </a:solidFill>
-                <a:latin typeface="Malgun Gothic" pitchFamily="34" charset="0"/>
-                <a:ea typeface="Malgun Gothic" pitchFamily="34" charset="-122"/>
-                <a:cs typeface="Malgun Gothic" pitchFamily="34" charset="-120"/>
-              </a:rPr>
-              <a:t>Lifecycle 제어가 신뢰다</a:t>
-            </a:r>
-            <a:endParaRPr lang="en-US" sz="1200" dirty="0"/>
-          </a:p>
-        </p:txBody>
-      </p:sp>
-      <p:sp>
-        <p:nvSpPr>
-          <p:cNvPr id="21" name="Text 19"/>
-          <p:cNvSpPr/>
-          <p:nvPr/>
-        </p:nvSpPr>
-        <p:spPr>
-          <a:xfrm>
-            <a:off x="8291779" y="2944368"/>
-            <a:ext cx="3328416" cy="1691640"/>
+          <p:cNvPr id="14" name="Text 12"/>
+          <p:cNvSpPr/>
+          <p:nvPr/>
+        </p:nvSpPr>
+        <p:spPr>
+          <a:xfrm>
+            <a:off x="6370625" y="2907792"/>
+            <a:ext cx="5253228" cy="2377440"/>
           </a:xfrm>
           <a:prstGeom prst="rect">
             <a:avLst/>
@@ -9712,17 +9481,17 @@
               <a:buNone/>
             </a:pPr>
             <a:r>
-              <a:rPr lang="en-US" sz="950" dirty="0">
-                <a:solidFill>
-                  <a:srgbClr val="404040"/>
-                </a:solidFill>
-                <a:latin typeface="Malgun Gothic" pitchFamily="34" charset="0"/>
-                <a:ea typeface="Malgun Gothic" pitchFamily="34" charset="-122"/>
-                <a:cs typeface="Malgun Gothic" pitchFamily="34" charset="-120"/>
-              </a:rPr>
-              <a:t>@PostConstruct로 스레드 시작</a:t>
-            </a:r>
-            <a:endParaRPr lang="en-US" sz="950" dirty="0"/>
+              <a:rPr lang="en-US" sz="1050" dirty="0">
+                <a:solidFill>
+                  <a:srgbClr val="222222"/>
+                </a:solidFill>
+                <a:latin typeface="Malgun Gothic" pitchFamily="34" charset="0"/>
+                <a:ea typeface="Malgun Gothic" pitchFamily="34" charset="-122"/>
+                <a:cs typeface="Malgun Gothic" pitchFamily="34" charset="-120"/>
+              </a:rPr>
+              <a:t>해외 대상 한국 간식 소개 플랫폼</a:t>
+            </a:r>
+            <a:endParaRPr lang="en-US" sz="1050" dirty="0"/>
           </a:p>
           <a:p>
             <a:pPr indent="0" marL="0">
@@ -9732,17 +9501,17 @@
               <a:buNone/>
             </a:pPr>
             <a:r>
-              <a:rPr lang="en-US" sz="950" dirty="0">
-                <a:solidFill>
-                  <a:srgbClr val="404040"/>
-                </a:solidFill>
-                <a:latin typeface="Malgun Gothic" pitchFamily="34" charset="0"/>
-                <a:ea typeface="Malgun Gothic" pitchFamily="34" charset="-122"/>
-                <a:cs typeface="Malgun Gothic" pitchFamily="34" charset="-120"/>
-              </a:rPr>
-              <a:t>→ 서버 종료 시점을</a:t>
-            </a:r>
-            <a:endParaRPr lang="en-US" sz="950" dirty="0"/>
+              <a:rPr lang="en-US" sz="1050" dirty="0">
+                <a:solidFill>
+                  <a:srgbClr val="222222"/>
+                </a:solidFill>
+                <a:latin typeface="Malgun Gothic" pitchFamily="34" charset="0"/>
+                <a:ea typeface="Malgun Gothic" pitchFamily="34" charset="-122"/>
+                <a:cs typeface="Malgun Gothic" pitchFamily="34" charset="-120"/>
+              </a:rPr>
+              <a:t>백엔드.</a:t>
+            </a:r>
+            <a:endParaRPr lang="en-US" sz="1050" dirty="0"/>
           </a:p>
           <a:p>
             <a:pPr indent="0" marL="0">
@@ -9751,18 +9520,7 @@
               </a:lnSpc>
               <a:buNone/>
             </a:pPr>
-            <a:r>
-              <a:rPr lang="en-US" sz="950" dirty="0">
-                <a:solidFill>
-                  <a:srgbClr val="404040"/>
-                </a:solidFill>
-                <a:latin typeface="Malgun Gothic" pitchFamily="34" charset="0"/>
-                <a:ea typeface="Malgun Gothic" pitchFamily="34" charset="-122"/>
-                <a:cs typeface="Malgun Gothic" pitchFamily="34" charset="-120"/>
-              </a:rPr>
-              <a:t>제어할 방법이 없음</a:t>
-            </a:r>
-            <a:endParaRPr lang="en-US" sz="950" dirty="0"/>
+            <a:endParaRPr lang="en-US" sz="1050" dirty="0"/>
           </a:p>
           <a:p>
             <a:pPr indent="0" marL="0">
@@ -9771,7 +9529,18 @@
               </a:lnSpc>
               <a:buNone/>
             </a:pPr>
-            <a:endParaRPr lang="en-US" sz="950" dirty="0"/>
+            <a:r>
+              <a:rPr lang="en-US" sz="1050" dirty="0">
+                <a:solidFill>
+                  <a:srgbClr val="222222"/>
+                </a:solidFill>
+                <a:latin typeface="Malgun Gothic" pitchFamily="34" charset="0"/>
+                <a:ea typeface="Malgun Gothic" pitchFamily="34" charset="-122"/>
+                <a:cs typeface="Malgun Gothic" pitchFamily="34" charset="-120"/>
+              </a:rPr>
+              <a:t>JWT + Spring Security로 회원</a:t>
+            </a:r>
+            <a:endParaRPr lang="en-US" sz="1050" dirty="0"/>
           </a:p>
           <a:p>
             <a:pPr indent="0" marL="0">
@@ -9781,17 +9550,17 @@
               <a:buNone/>
             </a:pPr>
             <a:r>
-              <a:rPr lang="en-US" sz="950" dirty="0">
-                <a:solidFill>
-                  <a:srgbClr val="404040"/>
-                </a:solidFill>
-                <a:latin typeface="Malgun Gothic" pitchFamily="34" charset="0"/>
-                <a:ea typeface="Malgun Gothic" pitchFamily="34" charset="-122"/>
-                <a:cs typeface="Malgun Gothic" pitchFamily="34" charset="-120"/>
-              </a:rPr>
-              <a:t>SmartLifecycle로 교체 →</a:t>
-            </a:r>
-            <a:endParaRPr lang="en-US" sz="950" dirty="0"/>
+              <a:rPr lang="en-US" sz="1050" dirty="0">
+                <a:solidFill>
+                  <a:srgbClr val="222222"/>
+                </a:solidFill>
+                <a:latin typeface="Malgun Gothic" pitchFamily="34" charset="0"/>
+                <a:ea typeface="Malgun Gothic" pitchFamily="34" charset="-122"/>
+                <a:cs typeface="Malgun Gothic" pitchFamily="34" charset="-120"/>
+              </a:rPr>
+              <a:t>인증 구현. Google OAuth2 소셜</a:t>
+            </a:r>
+            <a:endParaRPr lang="en-US" sz="1050" dirty="0"/>
           </a:p>
           <a:p>
             <a:pPr indent="0" marL="0">
@@ -9801,88 +9570,43 @@
               <a:buNone/>
             </a:pPr>
             <a:r>
-              <a:rPr lang="en-US" sz="950" dirty="0">
-                <a:solidFill>
-                  <a:srgbClr val="404040"/>
-                </a:solidFill>
-                <a:latin typeface="Malgun Gothic" pitchFamily="34" charset="0"/>
-                <a:ea typeface="Malgun Gothic" pitchFamily="34" charset="-122"/>
-                <a:cs typeface="Malgun Gothic" pitchFamily="34" charset="-120"/>
-              </a:rPr>
-              <a:t>graceful shutdown 보장</a:t>
-            </a:r>
-            <a:endParaRPr lang="en-US" sz="950" dirty="0"/>
-          </a:p>
-        </p:txBody>
-      </p:sp>
-      <p:sp>
-        <p:nvSpPr>
-          <p:cNvPr id="22" name="Shape 20"/>
-          <p:cNvSpPr/>
-          <p:nvPr/>
-        </p:nvSpPr>
-        <p:spPr>
-          <a:xfrm>
-            <a:off x="8291779" y="4773168"/>
-            <a:ext cx="3145536" cy="9144"/>
-          </a:xfrm>
-          <a:prstGeom prst="line">
-            <a:avLst/>
-          </a:prstGeom>
-          <a:noFill/>
-          <a:ln w="10160">
-            <a:solidFill>
-              <a:srgbClr val="EDEEF0"/>
-            </a:solidFill>
-            <a:prstDash val="solid"/>
-          </a:ln>
-        </p:spPr>
-      </p:sp>
-      <p:sp>
-        <p:nvSpPr>
-          <p:cNvPr id="23" name="Text 21"/>
-          <p:cNvSpPr/>
-          <p:nvPr/>
-        </p:nvSpPr>
-        <p:spPr>
-          <a:xfrm>
-            <a:off x="8291779" y="4864608"/>
-            <a:ext cx="3328416" cy="365760"/>
-          </a:xfrm>
-          <a:prstGeom prst="rect">
-            <a:avLst/>
-          </a:prstGeom>
-          <a:noFill/>
-          <a:ln/>
-        </p:spPr>
-        <p:txBody>
-          <a:bodyPr wrap="square" rtlCol="0" anchor="ctr"/>
-          <a:lstStyle/>
+              <a:rPr lang="en-US" sz="1050" dirty="0">
+                <a:solidFill>
+                  <a:srgbClr val="222222"/>
+                </a:solidFill>
+                <a:latin typeface="Malgun Gothic" pitchFamily="34" charset="0"/>
+                <a:ea typeface="Malgun Gothic" pitchFamily="34" charset="-122"/>
+                <a:cs typeface="Malgun Gothic" pitchFamily="34" charset="-120"/>
+              </a:rPr>
+              <a:t>로그인 연동. AWS RDS MySQL</a:t>
+            </a:r>
+            <a:endParaRPr lang="en-US" sz="1050" dirty="0"/>
+          </a:p>
           <a:p>
             <a:pPr indent="0" marL="0">
               <a:lnSpc>
-                <a:spcPct val="140000"/>
+                <a:spcPct val="155000"/>
               </a:lnSpc>
               <a:buNone/>
             </a:pPr>
             <a:r>
-              <a:rPr lang="en-US" sz="900" dirty="0">
-                <a:solidFill>
-                  <a:srgbClr val="45515E"/>
-                </a:solidFill>
-                <a:latin typeface="Malgun Gothic" pitchFamily="34" charset="0"/>
-                <a:ea typeface="Malgun Gothic" pitchFamily="34" charset="-122"/>
-                <a:cs typeface="Malgun Gothic" pitchFamily="34" charset="-120"/>
-              </a:rPr>
-              <a:t>종료 타이밍을 잡아야 메시지가 안 날아간다</a:t>
-            </a:r>
-            <a:endParaRPr lang="en-US" sz="900" dirty="0"/>
-          </a:p>
-        </p:txBody>
-      </p:sp>
-      <p:sp>
-        <p:nvSpPr>
-          <p:cNvPr id="24" name="Shape 22"/>
+              <a:rPr lang="en-US" sz="1050" dirty="0">
+                <a:solidFill>
+                  <a:srgbClr val="222222"/>
+                </a:solidFill>
+                <a:latin typeface="Malgun Gothic" pitchFamily="34" charset="0"/>
+                <a:ea typeface="Malgun Gothic" pitchFamily="34" charset="-122"/>
+                <a:cs typeface="Malgun Gothic" pitchFamily="34" charset="-120"/>
+              </a:rPr>
+              <a:t>직접 구축 및 EC2 배포.</a:t>
+            </a:r>
+            <a:endParaRPr lang="en-US" sz="1050" dirty="0"/>
+          </a:p>
+        </p:txBody>
+      </p:sp>
+      <p:sp>
+        <p:nvSpPr>
+          <p:cNvPr id="15" name="Shape 13"/>
           <p:cNvSpPr/>
           <p:nvPr/>
         </p:nvSpPr>
@@ -9904,7 +9628,7 @@
       </p:sp>
       <p:sp>
         <p:nvSpPr>
-          <p:cNvPr id="25" name="Text 23"/>
+          <p:cNvPr id="16" name="Text 14"/>
           <p:cNvSpPr/>
           <p:nvPr/>
         </p:nvSpPr>
@@ -9935,7 +9659,7 @@
                 <a:ea typeface="Malgun Gothic" pitchFamily="34" charset="-122"/>
                 <a:cs typeface="Malgun Gothic" pitchFamily="34" charset="-120"/>
               </a:rPr>
-              <a:t>나중에 인터페이스를 나누는 비용은 처음부터 잡는 것의 몇 배입니다. 설계 초기에 잡아야 합니다.</a:t>
+              <a:t>MCP와 OAuth2 모두 외부 시스템과 연결하는 인터페이스 경계를 어떻게 정의하느냐가 핵심이었습니다.</a:t>
             </a:r>
             <a:endParaRPr lang="en-US" sz="900" dirty="0"/>
           </a:p>
@@ -9943,7 +9667,7 @@
       </p:sp>
       <p:sp>
         <p:nvSpPr>
-          <p:cNvPr id="26" name="Text 24"/>
+          <p:cNvPr id="17" name="Text 15"/>
           <p:cNvSpPr/>
           <p:nvPr/>
         </p:nvSpPr>
@@ -10021,7 +9745,7 @@
         <p:spPr>
           <a:xfrm>
             <a:off x="385877" y="279806"/>
-            <a:ext cx="5029200" cy="245974"/>
+            <a:ext cx="10972800" cy="245974"/>
           </a:xfrm>
           <a:prstGeom prst="rect">
             <a:avLst/>
@@ -10045,7 +9769,7 @@
                 <a:ea typeface="Malgun Gothic" pitchFamily="34" charset="-122"/>
                 <a:cs typeface="Malgun Gothic" pitchFamily="34" charset="-120"/>
               </a:rPr>
-              <a:t>RESOLUTION · 기술 스택</a:t>
+              <a:t>TECH STACK</a:t>
             </a:r>
             <a:endParaRPr lang="en-US" sz="1000" dirty="0"/>
           </a:p>
@@ -10084,7 +9808,7 @@
                 <a:ea typeface="Malgun Gothic" pitchFamily="34" charset="-122"/>
                 <a:cs typeface="Malgun Gothic" pitchFamily="34" charset="-120"/>
               </a:rPr>
-              <a:t>실물 시스템과 싸우며 검증한 백엔드 기술 스택</a:t>
+              <a:t>4개 프로젝트에서 직접 사용하며 검증한 기술 스택</a:t>
             </a:r>
             <a:endParaRPr lang="en-US" sz="2400" dirty="0"/>
           </a:p>
@@ -10123,7 +9847,7 @@
                 <a:ea typeface="Malgun Gothic" pitchFamily="34" charset="-122"/>
                 <a:cs typeface="Malgun Gothic" pitchFamily="34" charset="-120"/>
               </a:rPr>
-              <a:t>Spring Boot · AWS · C++ · 게임 서버 · 인프라 — 도메인 무관 구조 설계</a:t>
+              <a:t>Spring Boot · AWS · C++ · UE5 · 인프라</a:t>
             </a:r>
             <a:endParaRPr lang="en-US" sz="1200" dirty="0"/>
           </a:p>
@@ -10279,7 +10003,7 @@
         <p:spPr>
           <a:xfrm>
             <a:off x="568757" y="2560320"/>
-            <a:ext cx="2377440" cy="274320"/>
+            <a:ext cx="2560320" cy="274320"/>
           </a:xfrm>
           <a:prstGeom prst="rect">
             <a:avLst/>
@@ -10317,8 +10041,8 @@
         </p:nvSpPr>
         <p:spPr>
           <a:xfrm>
-            <a:off x="3017520" y="2560320"/>
-            <a:ext cx="3657600" cy="274320"/>
+            <a:off x="3200400" y="2560320"/>
+            <a:ext cx="3493008" cy="274320"/>
           </a:xfrm>
           <a:prstGeom prst="rect">
             <a:avLst/>
@@ -10357,7 +10081,7 @@
         <p:spPr>
           <a:xfrm>
             <a:off x="568757" y="3026664"/>
-            <a:ext cx="2377440" cy="274320"/>
+            <a:ext cx="2560320" cy="274320"/>
           </a:xfrm>
           <a:prstGeom prst="rect">
             <a:avLst/>
@@ -10395,8 +10119,8 @@
         </p:nvSpPr>
         <p:spPr>
           <a:xfrm>
-            <a:off x="3017520" y="3026664"/>
-            <a:ext cx="3657600" cy="274320"/>
+            <a:off x="3200400" y="3026664"/>
+            <a:ext cx="3493008" cy="274320"/>
           </a:xfrm>
           <a:prstGeom prst="rect">
             <a:avLst/>
@@ -10420,7 +10144,7 @@
                 <a:ea typeface="Malgun Gothic" pitchFamily="34" charset="-122"/>
                 <a:cs typeface="Malgun Gothic" pitchFamily="34" charset="-120"/>
               </a:rPr>
-              <a:t>Lettuce · Refresh Token · Cache · Pub/Sub</a:t>
+              <a:t>Refresh Token · 쓰기 버퍼 · 분산 락 · 중복 방지</a:t>
             </a:r>
             <a:endParaRPr lang="en-US" sz="950" dirty="0"/>
           </a:p>
@@ -10435,7 +10159,7 @@
         <p:spPr>
           <a:xfrm>
             <a:off x="568757" y="3493008"/>
-            <a:ext cx="2377440" cy="274320"/>
+            <a:ext cx="2560320" cy="274320"/>
           </a:xfrm>
           <a:prstGeom prst="rect">
             <a:avLst/>
@@ -10473,8 +10197,8 @@
         </p:nvSpPr>
         <p:spPr>
           <a:xfrm>
-            <a:off x="3017520" y="3493008"/>
-            <a:ext cx="3657600" cy="274320"/>
+            <a:off x="3200400" y="3493008"/>
+            <a:ext cx="3493008" cy="274320"/>
           </a:xfrm>
           <a:prstGeom prst="rect">
             <a:avLst/>
@@ -10498,7 +10222,7 @@
                 <a:ea typeface="Malgun Gothic" pitchFamily="34" charset="-122"/>
                 <a:cs typeface="Malgun Gothic" pitchFamily="34" charset="-120"/>
               </a:rPr>
-              <a:t>Eclipse Paho · Spring Integration · State Machine</a:t>
+              <a:t>Eclipse Paho · 토픽별 텔레메트리/명령 경로 분리</a:t>
             </a:r>
             <a:endParaRPr lang="en-US" sz="950" dirty="0"/>
           </a:p>
@@ -10513,7 +10237,7 @@
         <p:spPr>
           <a:xfrm>
             <a:off x="568757" y="3959352"/>
-            <a:ext cx="2377440" cy="274320"/>
+            <a:ext cx="2560320" cy="274320"/>
           </a:xfrm>
           <a:prstGeom prst="rect">
             <a:avLst/>
@@ -10551,8 +10275,8 @@
         </p:nvSpPr>
         <p:spPr>
           <a:xfrm>
-            <a:off x="3017520" y="3959352"/>
-            <a:ext cx="3657600" cy="274320"/>
+            <a:off x="3200400" y="3959352"/>
+            <a:ext cx="3493008" cy="274320"/>
           </a:xfrm>
           <a:prstGeom prst="rect">
             <a:avLst/>
@@ -10576,7 +10300,7 @@
                 <a:ea typeface="Malgun Gothic" pitchFamily="34" charset="-122"/>
                 <a:cs typeface="Malgun Gothic" pitchFamily="34" charset="-120"/>
               </a:rPr>
-              <a:t>STOMP Broker · Role-based Channels</a:t>
+              <a:t>STOMP Broker · 역할 기반 채널 · 1분 핸드셰이크 토큰</a:t>
             </a:r>
             <a:endParaRPr lang="en-US" sz="950" dirty="0"/>
           </a:p>
@@ -10591,7 +10315,7 @@
         <p:spPr>
           <a:xfrm>
             <a:off x="568757" y="4425696"/>
-            <a:ext cx="2377440" cy="274320"/>
+            <a:ext cx="2560320" cy="274320"/>
           </a:xfrm>
           <a:prstGeom prst="rect">
             <a:avLst/>
@@ -10615,7 +10339,7 @@
                 <a:ea typeface="Malgun Gothic" pitchFamily="34" charset="-122"/>
                 <a:cs typeface="Malgun Gothic" pitchFamily="34" charset="-120"/>
               </a:rPr>
-              <a:t>A* + Yen's K-Shortest</a:t>
+              <a:t>AWS SQS / S3</a:t>
             </a:r>
             <a:endParaRPr lang="en-US" sz="950" dirty="0"/>
           </a:p>
@@ -10629,8 +10353,8 @@
         </p:nvSpPr>
         <p:spPr>
           <a:xfrm>
-            <a:off x="3017520" y="4425696"/>
-            <a:ext cx="3657600" cy="274320"/>
+            <a:off x="3200400" y="4425696"/>
+            <a:ext cx="3493008" cy="274320"/>
           </a:xfrm>
           <a:prstGeom prst="rect">
             <a:avLst/>
@@ -10654,7 +10378,7 @@
                 <a:ea typeface="Malgun Gothic" pitchFamily="34" charset="-122"/>
                 <a:cs typeface="Malgun Gothic" pitchFamily="34" charset="-120"/>
               </a:rPr>
-              <a:t>Path Algorithm · RDP Simplifier · GraphCache</a:t>
+              <a:t>비동기 AI 파이프라인 · SmartLifecycle 소비기</a:t>
             </a:r>
             <a:endParaRPr lang="en-US" sz="950" dirty="0"/>
           </a:p>
@@ -10669,7 +10393,7 @@
         <p:spPr>
           <a:xfrm>
             <a:off x="568757" y="4892040"/>
-            <a:ext cx="2377440" cy="274320"/>
+            <a:ext cx="2560320" cy="274320"/>
           </a:xfrm>
           <a:prstGeom prst="rect">
             <a:avLst/>
@@ -10693,7 +10417,7 @@
                 <a:ea typeface="Malgun Gothic" pitchFamily="34" charset="-122"/>
                 <a:cs typeface="Malgun Gothic" pitchFamily="34" charset="-120"/>
               </a:rPr>
-              <a:t>AWS SQS / S3</a:t>
+              <a:t>PostgreSQL</a:t>
             </a:r>
             <a:endParaRPr lang="en-US" sz="950" dirty="0"/>
           </a:p>
@@ -10707,8 +10431,8 @@
         </p:nvSpPr>
         <p:spPr>
           <a:xfrm>
-            <a:off x="3017520" y="4892040"/>
-            <a:ext cx="3657600" cy="274320"/>
+            <a:off x="3200400" y="4892040"/>
+            <a:ext cx="3493008" cy="274320"/>
           </a:xfrm>
           <a:prstGeom prst="rect">
             <a:avLst/>
@@ -10732,7 +10456,7 @@
                 <a:ea typeface="Malgun Gothic" pitchFamily="34" charset="-122"/>
                 <a:cs typeface="Malgun Gothic" pitchFamily="34" charset="-120"/>
               </a:rPr>
-              <a:t>Async Pipeline · SmartLifecycle Consumer</a:t>
+              <a:t>시계열 이력 저장 · Redis 배치 후 적재</a:t>
             </a:r>
             <a:endParaRPr lang="en-US" sz="950" dirty="0"/>
           </a:p>
@@ -10824,7 +10548,7 @@
         </p:nvSpPr>
         <p:spPr>
           <a:xfrm>
-            <a:off x="7554773" y="2761488"/>
+            <a:off x="7554773" y="2779776"/>
             <a:ext cx="3977640" cy="256032"/>
           </a:xfrm>
           <a:prstGeom prst="rect">
@@ -10863,7 +10587,7 @@
         </p:nvSpPr>
         <p:spPr>
           <a:xfrm>
-            <a:off x="7554773" y="3035808"/>
+            <a:off x="7554773" y="3072384"/>
             <a:ext cx="3977640" cy="256032"/>
           </a:xfrm>
           <a:prstGeom prst="rect">
@@ -10888,7 +10612,7 @@
                 <a:ea typeface="Malgun Gothic" pitchFamily="34" charset="-122"/>
                 <a:cs typeface="Malgun Gothic" pitchFamily="34" charset="-120"/>
               </a:rPr>
-              <a:t>· Redis distributed lock</a:t>
+              <a:t>· Micrometer AOP · p95/p99</a:t>
             </a:r>
             <a:endParaRPr lang="en-US" sz="900" dirty="0"/>
           </a:p>
@@ -10966,7 +10690,7 @@
                 <a:ea typeface="Malgun Gothic" pitchFamily="34" charset="-122"/>
                 <a:cs typeface="Malgun Gothic" pitchFamily="34" charset="-120"/>
               </a:rPr>
-              <a:t>· C++17 · OpenGL · MQTT (RobotPal)</a:t>
+              <a:t>· C++17 · OpenGL · libjpeg (RobotPal)</a:t>
             </a:r>
             <a:endParaRPr lang="en-US" sz="900" dirty="0"/>
           </a:p>
@@ -10980,7 +10704,7 @@
         </p:nvSpPr>
         <p:spPr>
           <a:xfrm>
-            <a:off x="7554773" y="4590288"/>
+            <a:off x="7554773" y="4608576"/>
             <a:ext cx="3977640" cy="256032"/>
           </a:xfrm>
           <a:prstGeom prst="rect">
@@ -11005,7 +10729,7 @@
                 <a:ea typeface="Malgun Gothic" pitchFamily="34" charset="-122"/>
                 <a:cs typeface="Malgun Gothic" pitchFamily="34" charset="-120"/>
               </a:rPr>
-              <a:t>· UE5 · Opus · UDP (영묘)</a:t>
+              <a:t>· UE5 · C++ · UDP (mausoleum)</a:t>
             </a:r>
             <a:endParaRPr lang="en-US" sz="900" dirty="0"/>
           </a:p>
@@ -11019,7 +10743,7 @@
         </p:nvSpPr>
         <p:spPr>
           <a:xfrm>
-            <a:off x="7554773" y="4864608"/>
+            <a:off x="7554773" y="4901184"/>
             <a:ext cx="3977640" cy="256032"/>
           </a:xfrm>
           <a:prstGeom prst="rect">
@@ -11044,7 +10768,7 @@
                 <a:ea typeface="Malgun Gothic" pitchFamily="34" charset="-122"/>
                 <a:cs typeface="Malgun Gothic" pitchFamily="34" charset="-120"/>
               </a:rPr>
-              <a:t>· Python · FastAPI (STICKER AI)</a:t>
+              <a:t>· Python · FastMCP · Smithery (BOB)</a:t>
             </a:r>
             <a:endParaRPr lang="en-US" sz="900" dirty="0"/>
           </a:p>
@@ -11105,7 +10829,7 @@
                 <a:ea typeface="Malgun Gothic" pitchFamily="34" charset="-122"/>
                 <a:cs typeface="Malgun Gothic" pitchFamily="34" charset="-120"/>
               </a:rPr>
-              <a:t>백엔드 구조 설계가 핵심이지만, 하드웨어부터 AI 서버까지 연결하는 경험이 시야를 넓혔습니다.</a:t>
+              <a:t>백엔드 구조 설계가 중심이지만, 하드웨어 연동부터 AI 서버 연결까지 직접 다뤄보며 시야를 넓혔습니다.</a:t>
             </a:r>
             <a:endParaRPr lang="en-US" sz="900" dirty="0"/>
           </a:p>
